--- a/finale.pptx
+++ b/finale.pptx
@@ -48,7 +48,7 @@
       </p:grpSpPr>
       <p:sp>
         <p:nvSpPr>
-          <p:cNvPr id="1597592955" name="Header Placeholder 1"/>
+          <p:cNvPr id="299400012" name="Header Placeholder 1"/>
           <p:cNvSpPr>
             <a:spLocks noGrp="1"/>
           </p:cNvSpPr>
@@ -82,7 +82,7 @@
       </p:sp>
       <p:sp>
         <p:nvSpPr>
-          <p:cNvPr id="466864766" name="Date Placeholder 2"/>
+          <p:cNvPr id="1121679105" name="Date Placeholder 2"/>
           <p:cNvSpPr>
             <a:spLocks noGrp="1"/>
           </p:cNvSpPr>
@@ -120,7 +120,7 @@
       </p:sp>
       <p:sp>
         <p:nvSpPr>
-          <p:cNvPr id="1840260453" name="Slide Image Placeholder 3"/>
+          <p:cNvPr id="339710551" name="Slide Image Placeholder 3"/>
           <p:cNvSpPr>
             <a:spLocks noChangeAspect="1" noGrp="1" noRot="1"/>
           </p:cNvSpPr>
@@ -156,7 +156,7 @@
       </p:sp>
       <p:sp>
         <p:nvSpPr>
-          <p:cNvPr id="1853089941" name="Notes Placeholder 4"/>
+          <p:cNvPr id="1393512655" name="Notes Placeholder 4"/>
           <p:cNvSpPr>
             <a:spLocks noGrp="1"/>
           </p:cNvSpPr>
@@ -230,7 +230,7 @@
       </p:sp>
       <p:sp>
         <p:nvSpPr>
-          <p:cNvPr id="365384500" name="Footer Placeholder 5"/>
+          <p:cNvPr id="897800923" name="Footer Placeholder 5"/>
           <p:cNvSpPr>
             <a:spLocks noGrp="1"/>
           </p:cNvSpPr>
@@ -264,7 +264,7 @@
       </p:sp>
       <p:sp>
         <p:nvSpPr>
-          <p:cNvPr id="1550937828" name="Slide Number Placeholder 6"/>
+          <p:cNvPr id="1475457403" name="Slide Number Placeholder 6"/>
           <p:cNvSpPr>
             <a:spLocks noGrp="1"/>
           </p:cNvSpPr>
@@ -417,7 +417,7 @@
       </p:grpSpPr>
       <p:sp>
         <p:nvSpPr>
-          <p:cNvPr id="1963396728" name="Slide Image Placeholder 1"/>
+          <p:cNvPr id="1889777173" name="Slide Image Placeholder 1"/>
           <p:cNvSpPr>
             <a:spLocks noChangeAspect="1" noGrp="1" noRot="1"/>
           </p:cNvSpPr>
@@ -429,7 +429,7 @@
       </p:sp>
       <p:sp>
         <p:nvSpPr>
-          <p:cNvPr id="589579955" name="Notes Placeholder 2"/>
+          <p:cNvPr id="1883500180" name="Notes Placeholder 2"/>
           <p:cNvSpPr>
             <a:spLocks noGrp="1"/>
           </p:cNvSpPr>
@@ -451,7 +451,7 @@
       </p:sp>
       <p:sp>
         <p:nvSpPr>
-          <p:cNvPr id="1659947620" name="Slide Number Placeholder 3"/>
+          <p:cNvPr id="1124814888" name="Slide Number Placeholder 3"/>
           <p:cNvSpPr>
             <a:spLocks noGrp="1"/>
           </p:cNvSpPr>
@@ -502,7 +502,7 @@
       </p:grpSpPr>
       <p:sp>
         <p:nvSpPr>
-          <p:cNvPr id="511568049" name="Slide Image Placeholder 1"/>
+          <p:cNvPr id="292901996" name="Slide Image Placeholder 1"/>
           <p:cNvSpPr>
             <a:spLocks noChangeAspect="1" noGrp="1" noRot="1"/>
           </p:cNvSpPr>
@@ -514,7 +514,7 @@
       </p:sp>
       <p:sp>
         <p:nvSpPr>
-          <p:cNvPr id="1843755253" name="Notes Placeholder 2"/>
+          <p:cNvPr id="1335500127" name="Notes Placeholder 2"/>
           <p:cNvSpPr>
             <a:spLocks noGrp="1"/>
           </p:cNvSpPr>
@@ -536,7 +536,7 @@
       </p:sp>
       <p:sp>
         <p:nvSpPr>
-          <p:cNvPr id="1836804343" name="Slide Number Placeholder 3"/>
+          <p:cNvPr id="1903841854" name="Slide Number Placeholder 3"/>
           <p:cNvSpPr>
             <a:spLocks noGrp="1"/>
           </p:cNvSpPr>
@@ -587,7 +587,7 @@
       </p:grpSpPr>
       <p:sp>
         <p:nvSpPr>
-          <p:cNvPr id="1330520891" name="Slide Image Placeholder 1"/>
+          <p:cNvPr id="802222518" name="Slide Image Placeholder 1"/>
           <p:cNvSpPr>
             <a:spLocks noChangeAspect="1" noGrp="1" noRot="1"/>
           </p:cNvSpPr>
@@ -599,7 +599,7 @@
       </p:sp>
       <p:sp>
         <p:nvSpPr>
-          <p:cNvPr id="1270201730" name="Notes Placeholder 2"/>
+          <p:cNvPr id="1642648580" name="Notes Placeholder 2"/>
           <p:cNvSpPr>
             <a:spLocks noGrp="1"/>
           </p:cNvSpPr>
@@ -621,7 +621,7 @@
       </p:sp>
       <p:sp>
         <p:nvSpPr>
-          <p:cNvPr id="802239106" name="Slide Number Placeholder 3"/>
+          <p:cNvPr id="1013209915" name="Slide Number Placeholder 3"/>
           <p:cNvSpPr>
             <a:spLocks noGrp="1"/>
           </p:cNvSpPr>
@@ -672,7 +672,7 @@
       </p:grpSpPr>
       <p:sp>
         <p:nvSpPr>
-          <p:cNvPr id="853086417" name="Slide Image Placeholder 1"/>
+          <p:cNvPr id="1189316584" name="Slide Image Placeholder 1"/>
           <p:cNvSpPr>
             <a:spLocks noChangeAspect="1" noGrp="1" noRot="1"/>
           </p:cNvSpPr>
@@ -684,7 +684,7 @@
       </p:sp>
       <p:sp>
         <p:nvSpPr>
-          <p:cNvPr id="1099408467" name="Notes Placeholder 2"/>
+          <p:cNvPr id="1250485786" name="Notes Placeholder 2"/>
           <p:cNvSpPr>
             <a:spLocks noGrp="1"/>
           </p:cNvSpPr>
@@ -706,7 +706,7 @@
       </p:sp>
       <p:sp>
         <p:nvSpPr>
-          <p:cNvPr id="892135695" name="Slide Number Placeholder 3"/>
+          <p:cNvPr id="755895156" name="Slide Number Placeholder 3"/>
           <p:cNvSpPr>
             <a:spLocks noGrp="1"/>
           </p:cNvSpPr>
@@ -757,7 +757,7 @@
       </p:grpSpPr>
       <p:sp>
         <p:nvSpPr>
-          <p:cNvPr id="1018036808" name="Slide Image Placeholder 1"/>
+          <p:cNvPr id="1903220415" name="Slide Image Placeholder 1"/>
           <p:cNvSpPr>
             <a:spLocks noChangeAspect="1" noGrp="1" noRot="1"/>
           </p:cNvSpPr>
@@ -769,7 +769,7 @@
       </p:sp>
       <p:sp>
         <p:nvSpPr>
-          <p:cNvPr id="1613473152" name="Notes Placeholder 2"/>
+          <p:cNvPr id="397634245" name="Notes Placeholder 2"/>
           <p:cNvSpPr>
             <a:spLocks noGrp="1"/>
           </p:cNvSpPr>
@@ -791,7 +791,7 @@
       </p:sp>
       <p:sp>
         <p:nvSpPr>
-          <p:cNvPr id="257764117" name="Slide Number Placeholder 3"/>
+          <p:cNvPr id="1595257528" name="Slide Number Placeholder 3"/>
           <p:cNvSpPr>
             <a:spLocks noGrp="1"/>
           </p:cNvSpPr>
@@ -842,7 +842,7 @@
       </p:grpSpPr>
       <p:sp>
         <p:nvSpPr>
-          <p:cNvPr id="1196540166" name="Slide Image Placeholder 1"/>
+          <p:cNvPr id="2141936915" name="Slide Image Placeholder 1"/>
           <p:cNvSpPr>
             <a:spLocks noChangeAspect="1" noGrp="1" noRot="1"/>
           </p:cNvSpPr>
@@ -854,7 +854,7 @@
       </p:sp>
       <p:sp>
         <p:nvSpPr>
-          <p:cNvPr id="112493803" name="Notes Placeholder 2"/>
+          <p:cNvPr id="1904088681" name="Notes Placeholder 2"/>
           <p:cNvSpPr>
             <a:spLocks noGrp="1"/>
           </p:cNvSpPr>
@@ -876,7 +876,7 @@
       </p:sp>
       <p:sp>
         <p:nvSpPr>
-          <p:cNvPr id="319977090" name="Slide Number Placeholder 3"/>
+          <p:cNvPr id="98656446" name="Slide Number Placeholder 3"/>
           <p:cNvSpPr>
             <a:spLocks noGrp="1"/>
           </p:cNvSpPr>
@@ -927,7 +927,7 @@
       </p:grpSpPr>
       <p:sp>
         <p:nvSpPr>
-          <p:cNvPr id="2053929953" name="Slide Image Placeholder 1"/>
+          <p:cNvPr id="845446756" name="Slide Image Placeholder 1"/>
           <p:cNvSpPr>
             <a:spLocks noChangeAspect="1" noGrp="1" noRot="1"/>
           </p:cNvSpPr>
@@ -939,7 +939,7 @@
       </p:sp>
       <p:sp>
         <p:nvSpPr>
-          <p:cNvPr id="596863729" name="Notes Placeholder 2"/>
+          <p:cNvPr id="1101974010" name="Notes Placeholder 2"/>
           <p:cNvSpPr>
             <a:spLocks noGrp="1"/>
           </p:cNvSpPr>
@@ -961,7 +961,7 @@
       </p:sp>
       <p:sp>
         <p:nvSpPr>
-          <p:cNvPr id="1148697760" name="Slide Number Placeholder 3"/>
+          <p:cNvPr id="365816850" name="Slide Number Placeholder 3"/>
           <p:cNvSpPr>
             <a:spLocks noGrp="1"/>
           </p:cNvSpPr>
@@ -1012,7 +1012,7 @@
       </p:grpSpPr>
       <p:sp>
         <p:nvSpPr>
-          <p:cNvPr id="1250793033" name="Slide Image Placeholder 1"/>
+          <p:cNvPr id="1285077470" name="Slide Image Placeholder 1"/>
           <p:cNvSpPr>
             <a:spLocks noChangeAspect="1" noGrp="1" noRot="1"/>
           </p:cNvSpPr>
@@ -1024,7 +1024,7 @@
       </p:sp>
       <p:sp>
         <p:nvSpPr>
-          <p:cNvPr id="314902001" name="Notes Placeholder 2"/>
+          <p:cNvPr id="1816272536" name="Notes Placeholder 2"/>
           <p:cNvSpPr>
             <a:spLocks noGrp="1"/>
           </p:cNvSpPr>
@@ -1046,7 +1046,7 @@
       </p:sp>
       <p:sp>
         <p:nvSpPr>
-          <p:cNvPr id="1083943063" name="Slide Number Placeholder 3"/>
+          <p:cNvPr id="928490346" name="Slide Number Placeholder 3"/>
           <p:cNvSpPr>
             <a:spLocks noGrp="1"/>
           </p:cNvSpPr>
@@ -1097,7 +1097,7 @@
       </p:grpSpPr>
       <p:sp>
         <p:nvSpPr>
-          <p:cNvPr id="2106758333" name="Slide Image Placeholder 1"/>
+          <p:cNvPr id="1991520392" name="Slide Image Placeholder 1"/>
           <p:cNvSpPr>
             <a:spLocks noChangeAspect="1" noGrp="1" noRot="1"/>
           </p:cNvSpPr>
@@ -1109,7 +1109,7 @@
       </p:sp>
       <p:sp>
         <p:nvSpPr>
-          <p:cNvPr id="443348224" name="Notes Placeholder 2"/>
+          <p:cNvPr id="1420998008" name="Notes Placeholder 2"/>
           <p:cNvSpPr>
             <a:spLocks noGrp="1"/>
           </p:cNvSpPr>
@@ -1131,7 +1131,7 @@
       </p:sp>
       <p:sp>
         <p:nvSpPr>
-          <p:cNvPr id="91258230" name="Slide Number Placeholder 3"/>
+          <p:cNvPr id="94970681" name="Slide Number Placeholder 3"/>
           <p:cNvSpPr>
             <a:spLocks noGrp="1"/>
           </p:cNvSpPr>
@@ -1182,7 +1182,7 @@
       </p:grpSpPr>
       <p:sp>
         <p:nvSpPr>
-          <p:cNvPr id="1556797758" name="Slide Image Placeholder 1"/>
+          <p:cNvPr id="1887913308" name="Slide Image Placeholder 1"/>
           <p:cNvSpPr>
             <a:spLocks noChangeAspect="1" noGrp="1" noRot="1"/>
           </p:cNvSpPr>
@@ -1194,7 +1194,7 @@
       </p:sp>
       <p:sp>
         <p:nvSpPr>
-          <p:cNvPr id="131619395" name="Notes Placeholder 2"/>
+          <p:cNvPr id="1649009337" name="Notes Placeholder 2"/>
           <p:cNvSpPr>
             <a:spLocks noGrp="1"/>
           </p:cNvSpPr>
@@ -1216,7 +1216,7 @@
       </p:sp>
       <p:sp>
         <p:nvSpPr>
-          <p:cNvPr id="1337523489" name="Slide Number Placeholder 3"/>
+          <p:cNvPr id="288053459" name="Slide Number Placeholder 3"/>
           <p:cNvSpPr>
             <a:spLocks noGrp="1"/>
           </p:cNvSpPr>
@@ -1304,7 +1304,7 @@
       </p:grpSpPr>
       <p:sp>
         <p:nvSpPr>
-          <p:cNvPr id="1401766356" name="Shape 0"/>
+          <p:cNvPr id="320757532" name="Shape 0"/>
           <p:cNvSpPr/>
           <p:nvPr/>
         </p:nvSpPr>
@@ -1324,7 +1324,7 @@
       </p:sp>
       <p:sp>
         <p:nvSpPr>
-          <p:cNvPr id="1863451400" name="Shape 1"/>
+          <p:cNvPr id="477792977" name="Shape 1"/>
           <p:cNvSpPr/>
           <p:nvPr/>
         </p:nvSpPr>
@@ -1344,7 +1344,7 @@
       </p:sp>
       <p:pic>
         <p:nvPicPr>
-          <p:cNvPr id="814190654" name="Image 0" descr="preencoded.png">
+          <p:cNvPr id="1786593111" name="Image 0" descr="preencoded.png">
             <a:hlinkClick r:id="rId2" tooltip=""/>
           </p:cNvPr>
           <p:cNvPicPr>
@@ -1400,7 +1400,7 @@
       </p:grpSpPr>
       <p:sp>
         <p:nvSpPr>
-          <p:cNvPr id="1972330619" name="Shape 0"/>
+          <p:cNvPr id="939058079" name="Shape 0"/>
           <p:cNvSpPr/>
           <p:nvPr/>
         </p:nvSpPr>
@@ -1420,7 +1420,7 @@
       </p:sp>
       <p:sp>
         <p:nvSpPr>
-          <p:cNvPr id="1272134747" name="Shape 1"/>
+          <p:cNvPr id="1720175254" name="Shape 1"/>
           <p:cNvSpPr/>
           <p:nvPr/>
         </p:nvSpPr>
@@ -1440,7 +1440,7 @@
       </p:sp>
       <p:pic>
         <p:nvPicPr>
-          <p:cNvPr id="1786391499" name="Image 0" descr="preencoded.png">
+          <p:cNvPr id="1760872288" name="Image 0" descr="preencoded.png">
             <a:hlinkClick r:id="rId2" tooltip=""/>
           </p:cNvPr>
           <p:cNvPicPr>
@@ -1496,7 +1496,7 @@
       </p:grpSpPr>
       <p:sp>
         <p:nvSpPr>
-          <p:cNvPr id="2105870294" name="Shape 0"/>
+          <p:cNvPr id="1036296469" name="Shape 0"/>
           <p:cNvSpPr/>
           <p:nvPr/>
         </p:nvSpPr>
@@ -1516,7 +1516,7 @@
       </p:sp>
       <p:sp>
         <p:nvSpPr>
-          <p:cNvPr id="1083972182" name="Shape 1"/>
+          <p:cNvPr id="2073324052" name="Shape 1"/>
           <p:cNvSpPr/>
           <p:nvPr/>
         </p:nvSpPr>
@@ -1536,7 +1536,7 @@
       </p:sp>
       <p:pic>
         <p:nvPicPr>
-          <p:cNvPr id="473473363" name="Image 0" descr="preencoded.png">
+          <p:cNvPr id="1312768961" name="Image 0" descr="preencoded.png">
             <a:hlinkClick r:id="rId2" tooltip=""/>
           </p:cNvPr>
           <p:cNvPicPr>
@@ -1592,7 +1592,7 @@
       </p:grpSpPr>
       <p:sp>
         <p:nvSpPr>
-          <p:cNvPr id="2065268966" name="Shape 0"/>
+          <p:cNvPr id="545603951" name="Shape 0"/>
           <p:cNvSpPr/>
           <p:nvPr/>
         </p:nvSpPr>
@@ -1612,7 +1612,7 @@
       </p:sp>
       <p:sp>
         <p:nvSpPr>
-          <p:cNvPr id="1983492224" name="Shape 1"/>
+          <p:cNvPr id="1478763759" name="Shape 1"/>
           <p:cNvSpPr/>
           <p:nvPr/>
         </p:nvSpPr>
@@ -1632,7 +1632,7 @@
       </p:sp>
       <p:pic>
         <p:nvPicPr>
-          <p:cNvPr id="495991263" name="Image 0" descr="preencoded.png">
+          <p:cNvPr id="1856928510" name="Image 0" descr="preencoded.png">
             <a:hlinkClick r:id="rId2" tooltip=""/>
           </p:cNvPr>
           <p:cNvPicPr>
@@ -1688,7 +1688,7 @@
       </p:grpSpPr>
       <p:sp>
         <p:nvSpPr>
-          <p:cNvPr id="95576932" name="Shape 0"/>
+          <p:cNvPr id="441415408" name="Shape 0"/>
           <p:cNvSpPr/>
           <p:nvPr/>
         </p:nvSpPr>
@@ -1708,7 +1708,7 @@
       </p:sp>
       <p:sp>
         <p:nvSpPr>
-          <p:cNvPr id="1563157809" name="Shape 1"/>
+          <p:cNvPr id="1385782966" name="Shape 1"/>
           <p:cNvSpPr/>
           <p:nvPr/>
         </p:nvSpPr>
@@ -1728,7 +1728,7 @@
       </p:sp>
       <p:pic>
         <p:nvPicPr>
-          <p:cNvPr id="1723624725" name="Image 0" descr="preencoded.png">
+          <p:cNvPr id="1230812875" name="Image 0" descr="preencoded.png">
             <a:hlinkClick r:id="rId2" tooltip=""/>
           </p:cNvPr>
           <p:cNvPicPr>
@@ -1784,7 +1784,7 @@
       </p:grpSpPr>
       <p:sp>
         <p:nvSpPr>
-          <p:cNvPr id="2049787797" name="Shape 0"/>
+          <p:cNvPr id="1358472047" name="Shape 0"/>
           <p:cNvSpPr/>
           <p:nvPr/>
         </p:nvSpPr>
@@ -1804,7 +1804,7 @@
       </p:sp>
       <p:sp>
         <p:nvSpPr>
-          <p:cNvPr id="933770254" name="Shape 1"/>
+          <p:cNvPr id="760040635" name="Shape 1"/>
           <p:cNvSpPr/>
           <p:nvPr/>
         </p:nvSpPr>
@@ -1824,7 +1824,7 @@
       </p:sp>
       <p:pic>
         <p:nvPicPr>
-          <p:cNvPr id="601379499" name="Image 0" descr="preencoded.png">
+          <p:cNvPr id="1897958363" name="Image 0" descr="preencoded.png">
             <a:hlinkClick r:id="rId2" tooltip=""/>
           </p:cNvPr>
           <p:cNvPicPr>
@@ -1880,7 +1880,7 @@
       </p:grpSpPr>
       <p:sp>
         <p:nvSpPr>
-          <p:cNvPr id="642455212" name="Shape 0"/>
+          <p:cNvPr id="1791405250" name="Shape 0"/>
           <p:cNvSpPr/>
           <p:nvPr/>
         </p:nvSpPr>
@@ -1900,7 +1900,7 @@
       </p:sp>
       <p:sp>
         <p:nvSpPr>
-          <p:cNvPr id="2054598522" name="Shape 1"/>
+          <p:cNvPr id="1360790975" name="Shape 1"/>
           <p:cNvSpPr/>
           <p:nvPr/>
         </p:nvSpPr>
@@ -1920,7 +1920,7 @@
       </p:sp>
       <p:pic>
         <p:nvPicPr>
-          <p:cNvPr id="707084713" name="Image 0" descr="preencoded.png">
+          <p:cNvPr id="2137362177" name="Image 0" descr="preencoded.png">
             <a:hlinkClick r:id="rId2" tooltip=""/>
           </p:cNvPr>
           <p:cNvPicPr>
@@ -2253,7 +2253,7 @@
       </p:grpSpPr>
       <p:pic>
         <p:nvPicPr>
-          <p:cNvPr id="1421527197" name="Image 0" descr="preencoded.png"/>
+          <p:cNvPr id="1871837711" name="Image 0" descr="preencoded.png"/>
           <p:cNvPicPr>
             <a:picLocks noChangeAspect="1"/>
           </p:cNvPicPr>
@@ -2275,7 +2275,7 @@
       </p:pic>
       <p:sp>
         <p:nvSpPr>
-          <p:cNvPr id="1417179772" name="Text 0"/>
+          <p:cNvPr id="1947976525" name="Text 0"/>
           <p:cNvSpPr/>
           <p:nvPr/>
         </p:nvSpPr>
@@ -2318,7 +2318,7 @@
       </p:sp>
       <p:sp>
         <p:nvSpPr>
-          <p:cNvPr id="1677258828" name="Shape 1"/>
+          <p:cNvPr id="1166793198" name="Shape 1"/>
           <p:cNvSpPr/>
           <p:nvPr/>
         </p:nvSpPr>
@@ -2340,7 +2340,7 @@
       </p:sp>
       <p:pic>
         <p:nvPicPr>
-          <p:cNvPr id="800269857" name="Image 1" descr="preencoded.png"/>
+          <p:cNvPr id="2111364798" name="Image 1" descr="preencoded.png"/>
           <p:cNvPicPr>
             <a:picLocks noChangeAspect="1"/>
           </p:cNvPicPr>
@@ -2368,7 +2368,7 @@
       </p:pic>
       <p:sp>
         <p:nvSpPr>
-          <p:cNvPr id="918029741" name="Text 2"/>
+          <p:cNvPr id="989241786" name="Text 2"/>
           <p:cNvSpPr/>
           <p:nvPr/>
         </p:nvSpPr>
@@ -2411,7 +2411,7 @@
       </p:sp>
       <p:sp>
         <p:nvSpPr>
-          <p:cNvPr id="952196149" name="Text 3"/>
+          <p:cNvPr id="1304098241" name="Text 3"/>
           <p:cNvSpPr/>
           <p:nvPr/>
         </p:nvSpPr>
@@ -2465,7 +2465,7 @@
       </p:sp>
       <p:sp>
         <p:nvSpPr>
-          <p:cNvPr id="1556310826" name="Text 4"/>
+          <p:cNvPr id="349551887" name="Text 4"/>
           <p:cNvSpPr/>
           <p:nvPr/>
         </p:nvSpPr>
@@ -2588,7 +2588,7 @@
                 <a:cs typeface="Open Sans"/>
                 <a:hlinkClick r:id="rId6" tooltip=""/>
               </a:rPr>
-              <a:t>mini-cozy-room.netlify.app/team/renan</a:t>
+              <a:t>mini-cozy-room.netlify.app</a:t>
             </a:r>
             <a:endParaRPr lang="en-US" sz="1500"/>
           </a:p>
@@ -2596,7 +2596,7 @@
       </p:sp>
       <p:sp>
         <p:nvSpPr>
-          <p:cNvPr id="1053746839" name=""/>
+          <p:cNvPr id="1115493291" name=""/>
           <p:cNvSpPr/>
           <p:nvPr/>
         </p:nvSpPr>
@@ -2685,7 +2685,7 @@
       </p:grpSpPr>
       <p:sp>
         <p:nvSpPr>
-          <p:cNvPr id="1877773866" name="Text 0"/>
+          <p:cNvPr id="938794239" name="Text 0"/>
           <p:cNvSpPr/>
           <p:nvPr/>
         </p:nvSpPr>
@@ -2728,7 +2728,7 @@
       </p:sp>
       <p:sp>
         <p:nvSpPr>
-          <p:cNvPr id="1408981411" name="Text 1"/>
+          <p:cNvPr id="1524172006" name="Text 1"/>
           <p:cNvSpPr/>
           <p:nvPr/>
         </p:nvSpPr>
@@ -2760,7 +2760,7 @@
       </p:sp>
       <p:sp>
         <p:nvSpPr>
-          <p:cNvPr id="1914964364" name="Shape 2"/>
+          <p:cNvPr id="1895485029" name="Shape 2"/>
           <p:cNvSpPr/>
           <p:nvPr/>
         </p:nvSpPr>
@@ -2787,7 +2787,7 @@
       </p:sp>
       <p:pic>
         <p:nvPicPr>
-          <p:cNvPr id="1715502408" name="Image 0" descr="preencoded.png"/>
+          <p:cNvPr id="335740601" name="Image 0" descr="preencoded.png"/>
           <p:cNvPicPr>
             <a:picLocks noChangeAspect="1"/>
           </p:cNvPicPr>
@@ -2809,7 +2809,7 @@
       </p:pic>
       <p:pic>
         <p:nvPicPr>
-          <p:cNvPr id="832753328" name="Image 1" descr="preencoded.png"/>
+          <p:cNvPr id="791196929" name="Image 1" descr="preencoded.png"/>
           <p:cNvPicPr>
             <a:picLocks noChangeAspect="1"/>
           </p:cNvPicPr>
@@ -2831,7 +2831,7 @@
       </p:pic>
       <p:sp>
         <p:nvSpPr>
-          <p:cNvPr id="503814100" name="Text 3"/>
+          <p:cNvPr id="277307334" name="Text 3"/>
           <p:cNvSpPr/>
           <p:nvPr/>
         </p:nvSpPr>
@@ -2877,7 +2877,7 @@
       </p:sp>
       <p:sp>
         <p:nvSpPr>
-          <p:cNvPr id="675268200" name="Text 4"/>
+          <p:cNvPr id="1098400202" name="Text 4"/>
           <p:cNvSpPr/>
           <p:nvPr/>
         </p:nvSpPr>
@@ -2920,7 +2920,7 @@
       </p:sp>
       <p:sp>
         <p:nvSpPr>
-          <p:cNvPr id="1047812754" name="Shape 5"/>
+          <p:cNvPr id="1329343849" name="Shape 5"/>
           <p:cNvSpPr/>
           <p:nvPr/>
         </p:nvSpPr>
@@ -2947,7 +2947,7 @@
       </p:sp>
       <p:pic>
         <p:nvPicPr>
-          <p:cNvPr id="1593947154" name="Image 2" descr="preencoded.png"/>
+          <p:cNvPr id="265236789" name="Image 2" descr="preencoded.png"/>
           <p:cNvPicPr>
             <a:picLocks noChangeAspect="1"/>
           </p:cNvPicPr>
@@ -2969,7 +2969,7 @@
       </p:pic>
       <p:pic>
         <p:nvPicPr>
-          <p:cNvPr id="2144323121" name="Image 3" descr="preencoded.png"/>
+          <p:cNvPr id="1637933392" name="Image 3" descr="preencoded.png"/>
           <p:cNvPicPr>
             <a:picLocks noChangeAspect="1"/>
           </p:cNvPicPr>
@@ -2991,7 +2991,7 @@
       </p:pic>
       <p:sp>
         <p:nvSpPr>
-          <p:cNvPr id="1557508357" name="Text 6"/>
+          <p:cNvPr id="1910573272" name="Text 6"/>
           <p:cNvSpPr/>
           <p:nvPr/>
         </p:nvSpPr>
@@ -3037,7 +3037,7 @@
       </p:sp>
       <p:sp>
         <p:nvSpPr>
-          <p:cNvPr id="985375378" name="Text 7"/>
+          <p:cNvPr id="2036140619" name="Text 7"/>
           <p:cNvSpPr/>
           <p:nvPr/>
         </p:nvSpPr>
@@ -3080,7 +3080,7 @@
       </p:sp>
       <p:sp>
         <p:nvSpPr>
-          <p:cNvPr id="583248070" name="Shape 8"/>
+          <p:cNvPr id="1836082615" name="Shape 8"/>
           <p:cNvSpPr/>
           <p:nvPr/>
         </p:nvSpPr>
@@ -3107,7 +3107,7 @@
       </p:sp>
       <p:pic>
         <p:nvPicPr>
-          <p:cNvPr id="1652603118" name="Image 4" descr="preencoded.png"/>
+          <p:cNvPr id="1107728146" name="Image 4" descr="preencoded.png"/>
           <p:cNvPicPr>
             <a:picLocks noChangeAspect="1"/>
           </p:cNvPicPr>
@@ -3129,7 +3129,7 @@
       </p:pic>
       <p:pic>
         <p:nvPicPr>
-          <p:cNvPr id="1034492912" name="Image 5" descr="preencoded.png"/>
+          <p:cNvPr id="324396046" name="Image 5" descr="preencoded.png"/>
           <p:cNvPicPr>
             <a:picLocks noChangeAspect="1"/>
           </p:cNvPicPr>
@@ -3151,7 +3151,7 @@
       </p:pic>
       <p:sp>
         <p:nvSpPr>
-          <p:cNvPr id="1062101453" name="Text 9"/>
+          <p:cNvPr id="869648382" name="Text 9"/>
           <p:cNvSpPr/>
           <p:nvPr/>
         </p:nvSpPr>
@@ -3197,7 +3197,7 @@
       </p:sp>
       <p:sp>
         <p:nvSpPr>
-          <p:cNvPr id="903147248" name="Text 10"/>
+          <p:cNvPr id="797148447" name="Text 10"/>
           <p:cNvSpPr/>
           <p:nvPr/>
         </p:nvSpPr>
@@ -3240,7 +3240,7 @@
       </p:sp>
       <p:sp>
         <p:nvSpPr>
-          <p:cNvPr id="1207080431" name="Text 11"/>
+          <p:cNvPr id="969211575" name="Text 11"/>
           <p:cNvSpPr/>
           <p:nvPr/>
         </p:nvSpPr>
@@ -3294,7 +3294,7 @@
       </p:sp>
       <p:sp>
         <p:nvSpPr>
-          <p:cNvPr id="1797739125" name="Shape 12"/>
+          <p:cNvPr id="882961242" name="Shape 12"/>
           <p:cNvSpPr/>
           <p:nvPr/>
         </p:nvSpPr>
@@ -3314,7 +3314,7 @@
       </p:sp>
       <p:sp>
         <p:nvSpPr>
-          <p:cNvPr id="1132671682" name="Text 13"/>
+          <p:cNvPr id="1732329202" name="Text 13"/>
           <p:cNvSpPr/>
           <p:nvPr/>
         </p:nvSpPr>
@@ -3357,7 +3357,7 @@
       </p:sp>
       <p:sp>
         <p:nvSpPr>
-          <p:cNvPr id="1948582336" name="Text 14"/>
+          <p:cNvPr id="846199579" name="Text 14"/>
           <p:cNvSpPr/>
           <p:nvPr/>
         </p:nvSpPr>
@@ -3400,7 +3400,7 @@
       </p:sp>
       <p:sp>
         <p:nvSpPr>
-          <p:cNvPr id="1095659636" name="Text 15"/>
+          <p:cNvPr id="1994282894" name="Text 15"/>
           <p:cNvSpPr/>
           <p:nvPr/>
         </p:nvSpPr>
@@ -3443,7 +3443,7 @@
       </p:sp>
       <p:sp>
         <p:nvSpPr>
-          <p:cNvPr id="671110806" name="Text 16"/>
+          <p:cNvPr id="886294161" name="Text 16"/>
           <p:cNvSpPr/>
           <p:nvPr/>
         </p:nvSpPr>
@@ -3486,7 +3486,7 @@
       </p:sp>
       <p:sp>
         <p:nvSpPr>
-          <p:cNvPr id="659770062" name="Text 17"/>
+          <p:cNvPr id="1734007393" name="Text 17"/>
           <p:cNvSpPr/>
           <p:nvPr/>
         </p:nvSpPr>
@@ -3529,7 +3529,7 @@
       </p:sp>
       <p:sp>
         <p:nvSpPr>
-          <p:cNvPr id="360289620" name="Text 18"/>
+          <p:cNvPr id="664495954" name="Text 18"/>
           <p:cNvSpPr/>
           <p:nvPr/>
         </p:nvSpPr>
@@ -3572,7 +3572,7 @@
       </p:sp>
       <p:sp>
         <p:nvSpPr>
-          <p:cNvPr id="450492655" name="Text 19"/>
+          <p:cNvPr id="1390475885" name="Text 19"/>
           <p:cNvSpPr/>
           <p:nvPr/>
         </p:nvSpPr>
@@ -3615,7 +3615,7 @@
       </p:sp>
       <p:sp>
         <p:nvSpPr>
-          <p:cNvPr id="1747883700" name="Text 20"/>
+          <p:cNvPr id="1087073201" name="Text 20"/>
           <p:cNvSpPr/>
           <p:nvPr/>
         </p:nvSpPr>
@@ -3658,7 +3658,7 @@
       </p:sp>
       <p:sp>
         <p:nvSpPr>
-          <p:cNvPr id="2130548786" name="Text 21"/>
+          <p:cNvPr id="1548075858" name="Text 21"/>
           <p:cNvSpPr/>
           <p:nvPr/>
         </p:nvSpPr>
@@ -3701,7 +3701,7 @@
       </p:sp>
       <p:sp>
         <p:nvSpPr>
-          <p:cNvPr id="389016232" name="Text 22"/>
+          <p:cNvPr id="1895377544" name="Text 22"/>
           <p:cNvSpPr/>
           <p:nvPr/>
         </p:nvSpPr>
@@ -3744,7 +3744,7 @@
       </p:sp>
       <p:sp>
         <p:nvSpPr>
-          <p:cNvPr id="108450995" name="Text 23"/>
+          <p:cNvPr id="1462324794" name="Text 23"/>
           <p:cNvSpPr/>
           <p:nvPr/>
         </p:nvSpPr>
@@ -3787,7 +3787,7 @@
       </p:sp>
       <p:sp>
         <p:nvSpPr>
-          <p:cNvPr id="2082575702" name="Text 24"/>
+          <p:cNvPr id="558875778" name="Text 24"/>
           <p:cNvSpPr/>
           <p:nvPr/>
         </p:nvSpPr>
@@ -3830,7 +3830,7 @@
       </p:sp>
       <p:sp>
         <p:nvSpPr>
-          <p:cNvPr id="1301422964" name="Text 25"/>
+          <p:cNvPr id="381747257" name="Text 25"/>
           <p:cNvSpPr/>
           <p:nvPr/>
         </p:nvSpPr>
@@ -3873,7 +3873,7 @@
       </p:sp>
       <p:sp>
         <p:nvSpPr>
-          <p:cNvPr id="1175974637" name=""/>
+          <p:cNvPr id="495784427" name=""/>
           <p:cNvSpPr/>
           <p:nvPr/>
         </p:nvSpPr>
@@ -3962,7 +3962,7 @@
       </p:grpSpPr>
       <p:sp>
         <p:nvSpPr>
-          <p:cNvPr id="1676449186" name="Text 0"/>
+          <p:cNvPr id="845594650" name="Text 0"/>
           <p:cNvSpPr/>
           <p:nvPr/>
         </p:nvSpPr>
@@ -4005,7 +4005,7 @@
       </p:sp>
       <p:sp>
         <p:nvSpPr>
-          <p:cNvPr id="1201539203" name="Shape 1"/>
+          <p:cNvPr id="1663896108" name="Shape 1"/>
           <p:cNvSpPr/>
           <p:nvPr/>
         </p:nvSpPr>
@@ -4032,7 +4032,7 @@
       </p:sp>
       <p:pic>
         <p:nvPicPr>
-          <p:cNvPr id="7767083" name="Image 0" descr="preencoded.png"/>
+          <p:cNvPr id="1218040722" name="Image 0" descr="preencoded.png"/>
           <p:cNvPicPr>
             <a:picLocks noChangeAspect="1"/>
           </p:cNvPicPr>
@@ -4054,7 +4054,7 @@
       </p:pic>
       <p:sp>
         <p:nvSpPr>
-          <p:cNvPr id="875872631" name="Text 2"/>
+          <p:cNvPr id="1661119297" name="Text 2"/>
           <p:cNvSpPr/>
           <p:nvPr/>
         </p:nvSpPr>
@@ -4119,7 +4119,7 @@
       </p:sp>
       <p:sp>
         <p:nvSpPr>
-          <p:cNvPr id="733158189" name="Text 3"/>
+          <p:cNvPr id="1635262376" name="Text 3"/>
           <p:cNvSpPr/>
           <p:nvPr/>
         </p:nvSpPr>
@@ -4162,7 +4162,7 @@
       </p:sp>
       <p:sp>
         <p:nvSpPr>
-          <p:cNvPr id="1418284154" name="Shape 4"/>
+          <p:cNvPr id="146772213" name="Shape 4"/>
           <p:cNvSpPr/>
           <p:nvPr/>
         </p:nvSpPr>
@@ -4189,7 +4189,7 @@
       </p:sp>
       <p:pic>
         <p:nvPicPr>
-          <p:cNvPr id="1639716781" name="Image 1" descr="preencoded.png"/>
+          <p:cNvPr id="1927885699" name="Image 1" descr="preencoded.png"/>
           <p:cNvPicPr>
             <a:picLocks noChangeAspect="1"/>
           </p:cNvPicPr>
@@ -4211,7 +4211,7 @@
       </p:pic>
       <p:sp>
         <p:nvSpPr>
-          <p:cNvPr id="418036457" name="Text 5"/>
+          <p:cNvPr id="240188850" name="Text 5"/>
           <p:cNvSpPr/>
           <p:nvPr/>
         </p:nvSpPr>
@@ -4276,7 +4276,7 @@
       </p:sp>
       <p:sp>
         <p:nvSpPr>
-          <p:cNvPr id="2063785833" name="Text 6"/>
+          <p:cNvPr id="1493690722" name="Text 6"/>
           <p:cNvSpPr/>
           <p:nvPr/>
         </p:nvSpPr>
@@ -4319,7 +4319,7 @@
       </p:sp>
       <p:sp>
         <p:nvSpPr>
-          <p:cNvPr id="1379036466" name="Shape 7"/>
+          <p:cNvPr id="1002647485" name="Shape 7"/>
           <p:cNvSpPr/>
           <p:nvPr/>
         </p:nvSpPr>
@@ -4346,7 +4346,7 @@
       </p:sp>
       <p:pic>
         <p:nvPicPr>
-          <p:cNvPr id="717073673" name="Image 2" descr="preencoded.png"/>
+          <p:cNvPr id="899369220" name="Image 2" descr="preencoded.png"/>
           <p:cNvPicPr>
             <a:picLocks noChangeAspect="1"/>
           </p:cNvPicPr>
@@ -4368,7 +4368,7 @@
       </p:pic>
       <p:sp>
         <p:nvSpPr>
-          <p:cNvPr id="647755889" name="Text 8"/>
+          <p:cNvPr id="516260660" name="Text 8"/>
           <p:cNvSpPr/>
           <p:nvPr/>
         </p:nvSpPr>
@@ -4433,7 +4433,7 @@
       </p:sp>
       <p:sp>
         <p:nvSpPr>
-          <p:cNvPr id="1517576973" name="Text 9"/>
+          <p:cNvPr id="1192835591" name="Text 9"/>
           <p:cNvSpPr/>
           <p:nvPr/>
         </p:nvSpPr>
@@ -4476,7 +4476,7 @@
       </p:sp>
       <p:sp>
         <p:nvSpPr>
-          <p:cNvPr id="1056826839" name="Text 10"/>
+          <p:cNvPr id="733590959" name="Text 10"/>
           <p:cNvSpPr/>
           <p:nvPr/>
         </p:nvSpPr>
@@ -4519,7 +4519,7 @@
       </p:sp>
       <p:sp>
         <p:nvSpPr>
-          <p:cNvPr id="423232870" name="Shape 11"/>
+          <p:cNvPr id="1479905894" name="Shape 11"/>
           <p:cNvSpPr/>
           <p:nvPr/>
         </p:nvSpPr>
@@ -4541,7 +4541,7 @@
       </p:sp>
       <p:sp>
         <p:nvSpPr>
-          <p:cNvPr id="1241688181" name="Text 12"/>
+          <p:cNvPr id="1957279490" name="Text 12"/>
           <p:cNvSpPr/>
           <p:nvPr/>
         </p:nvSpPr>
@@ -4584,7 +4584,7 @@
       </p:sp>
       <p:sp>
         <p:nvSpPr>
-          <p:cNvPr id="1385429910" name="Text 13"/>
+          <p:cNvPr id="673949904" name="Text 13"/>
           <p:cNvSpPr/>
           <p:nvPr/>
         </p:nvSpPr>
@@ -4627,7 +4627,7 @@
       </p:sp>
       <p:sp>
         <p:nvSpPr>
-          <p:cNvPr id="1792202603" name="Text 14"/>
+          <p:cNvPr id="222948593" name="Text 14"/>
           <p:cNvSpPr/>
           <p:nvPr/>
         </p:nvSpPr>
@@ -4973,7 +4973,7 @@
       </p:sp>
       <p:sp>
         <p:nvSpPr>
-          <p:cNvPr id="1515494030" name="Text 15"/>
+          <p:cNvPr id="482455231" name="Text 15"/>
           <p:cNvSpPr/>
           <p:nvPr/>
         </p:nvSpPr>
@@ -5016,7 +5016,7 @@
       </p:sp>
       <p:sp>
         <p:nvSpPr>
-          <p:cNvPr id="2076387589" name="Shape 16"/>
+          <p:cNvPr id="981539938" name="Shape 16"/>
           <p:cNvSpPr/>
           <p:nvPr/>
         </p:nvSpPr>
@@ -5036,7 +5036,7 @@
       </p:sp>
       <p:sp>
         <p:nvSpPr>
-          <p:cNvPr id="833836929" name=""/>
+          <p:cNvPr id="1754560684" name=""/>
           <p:cNvSpPr/>
           <p:nvPr/>
         </p:nvSpPr>
@@ -5132,7 +5132,7 @@
       </p:grpSpPr>
       <p:sp>
         <p:nvSpPr>
-          <p:cNvPr id="1651235469" name="Text 0"/>
+          <p:cNvPr id="9293660" name="Text 0"/>
           <p:cNvSpPr/>
           <p:nvPr/>
         </p:nvSpPr>
@@ -5172,7 +5172,7 @@
       </p:sp>
       <p:sp>
         <p:nvSpPr>
-          <p:cNvPr id="598357884" name="Text 1"/>
+          <p:cNvPr id="1086042857" name="Text 1"/>
           <p:cNvSpPr/>
           <p:nvPr/>
         </p:nvSpPr>
@@ -5212,7 +5212,7 @@
       </p:sp>
       <p:sp>
         <p:nvSpPr>
-          <p:cNvPr id="1899411424" name="Shape 2"/>
+          <p:cNvPr id="60459063" name="Shape 2"/>
           <p:cNvSpPr/>
           <p:nvPr/>
         </p:nvSpPr>
@@ -5239,7 +5239,7 @@
       </p:sp>
       <p:sp>
         <p:nvSpPr>
-          <p:cNvPr id="314497802" name="Text 3"/>
+          <p:cNvPr id="1155922486" name="Text 3"/>
           <p:cNvSpPr/>
           <p:nvPr/>
         </p:nvSpPr>
@@ -5279,7 +5279,7 @@
       </p:sp>
       <p:sp>
         <p:nvSpPr>
-          <p:cNvPr id="1501853945" name="Text 4"/>
+          <p:cNvPr id="361610625" name="Text 4"/>
           <p:cNvSpPr/>
           <p:nvPr/>
         </p:nvSpPr>
@@ -5319,7 +5319,7 @@
       </p:sp>
       <p:sp>
         <p:nvSpPr>
-          <p:cNvPr id="1040274716" name="Shape 5"/>
+          <p:cNvPr id="1219200291" name="Shape 5"/>
           <p:cNvSpPr/>
           <p:nvPr/>
         </p:nvSpPr>
@@ -5346,7 +5346,7 @@
       </p:sp>
       <p:sp>
         <p:nvSpPr>
-          <p:cNvPr id="658633327" name="Text 6"/>
+          <p:cNvPr id="1322657940" name="Text 6"/>
           <p:cNvSpPr/>
           <p:nvPr/>
         </p:nvSpPr>
@@ -5386,7 +5386,7 @@
       </p:sp>
       <p:sp>
         <p:nvSpPr>
-          <p:cNvPr id="2065958681" name="Text 7"/>
+          <p:cNvPr id="711319777" name="Text 7"/>
           <p:cNvSpPr/>
           <p:nvPr/>
         </p:nvSpPr>
@@ -5426,7 +5426,7 @@
       </p:sp>
       <p:sp>
         <p:nvSpPr>
-          <p:cNvPr id="934204263" name="Shape 8"/>
+          <p:cNvPr id="1533869604" name="Shape 8"/>
           <p:cNvSpPr/>
           <p:nvPr/>
         </p:nvSpPr>
@@ -5453,7 +5453,7 @@
       </p:sp>
       <p:sp>
         <p:nvSpPr>
-          <p:cNvPr id="933717892" name="Text 9"/>
+          <p:cNvPr id="438432082" name="Text 9"/>
           <p:cNvSpPr/>
           <p:nvPr/>
         </p:nvSpPr>
@@ -5493,7 +5493,7 @@
       </p:sp>
       <p:sp>
         <p:nvSpPr>
-          <p:cNvPr id="91282400" name="Text 10"/>
+          <p:cNvPr id="1396576630" name="Text 10"/>
           <p:cNvSpPr/>
           <p:nvPr/>
         </p:nvSpPr>
@@ -5533,7 +5533,7 @@
       </p:sp>
       <p:sp>
         <p:nvSpPr>
-          <p:cNvPr id="1573335759" name="Shape 11"/>
+          <p:cNvPr id="507511120" name="Shape 11"/>
           <p:cNvSpPr/>
           <p:nvPr/>
         </p:nvSpPr>
@@ -5560,7 +5560,7 @@
       </p:sp>
       <p:sp>
         <p:nvSpPr>
-          <p:cNvPr id="633664346" name="Text 12"/>
+          <p:cNvPr id="1959313070" name="Text 12"/>
           <p:cNvSpPr/>
           <p:nvPr/>
         </p:nvSpPr>
@@ -5621,7 +5621,7 @@
       </p:sp>
       <p:sp>
         <p:nvSpPr>
-          <p:cNvPr id="945606145" name="Text 13"/>
+          <p:cNvPr id="1303210018" name="Text 13"/>
           <p:cNvSpPr/>
           <p:nvPr/>
         </p:nvSpPr>
@@ -5672,7 +5672,7 @@
       </p:sp>
       <p:sp>
         <p:nvSpPr>
-          <p:cNvPr id="1012543356" name="Shape 14"/>
+          <p:cNvPr id="350632335" name="Shape 14"/>
           <p:cNvSpPr/>
           <p:nvPr/>
         </p:nvSpPr>
@@ -5695,7 +5695,7 @@
       </p:sp>
       <p:sp>
         <p:nvSpPr>
-          <p:cNvPr id="179875102" name="Text 15"/>
+          <p:cNvPr id="1760251538" name="Text 15"/>
           <p:cNvSpPr/>
           <p:nvPr/>
         </p:nvSpPr>
@@ -5735,7 +5735,7 @@
       </p:sp>
       <p:sp>
         <p:nvSpPr>
-          <p:cNvPr id="1068506375" name="Text 16"/>
+          <p:cNvPr id="1939450572" name="Text 16"/>
           <p:cNvSpPr/>
           <p:nvPr/>
         </p:nvSpPr>
@@ -5841,7 +5841,7 @@
       </p:sp>
       <p:sp>
         <p:nvSpPr>
-          <p:cNvPr id="1706087609" name="Text 17"/>
+          <p:cNvPr id="965922897" name="Text 17"/>
           <p:cNvSpPr/>
           <p:nvPr/>
         </p:nvSpPr>
@@ -5881,7 +5881,7 @@
       </p:sp>
       <p:sp>
         <p:nvSpPr>
-          <p:cNvPr id="344807067" name="Shape 18"/>
+          <p:cNvPr id="1024611063" name="Shape 18"/>
           <p:cNvSpPr/>
           <p:nvPr/>
         </p:nvSpPr>
@@ -5908,7 +5908,7 @@
       </p:sp>
       <p:sp>
         <p:nvSpPr>
-          <p:cNvPr id="682831219" name="Text 19"/>
+          <p:cNvPr id="742183106" name="Text 19"/>
           <p:cNvSpPr/>
           <p:nvPr/>
         </p:nvSpPr>
@@ -5948,7 +5948,7 @@
       </p:sp>
       <p:sp>
         <p:nvSpPr>
-          <p:cNvPr id="933215076" name="Text 20"/>
+          <p:cNvPr id="213507972" name="Text 20"/>
           <p:cNvSpPr/>
           <p:nvPr/>
         </p:nvSpPr>
@@ -5988,7 +5988,7 @@
       </p:sp>
       <p:sp>
         <p:nvSpPr>
-          <p:cNvPr id="246109558" name="Shape 21"/>
+          <p:cNvPr id="1444862333" name="Shape 21"/>
           <p:cNvSpPr/>
           <p:nvPr/>
         </p:nvSpPr>
@@ -6015,7 +6015,7 @@
       </p:sp>
       <p:sp>
         <p:nvSpPr>
-          <p:cNvPr id="368802023" name="Text 22"/>
+          <p:cNvPr id="91537819" name="Text 22"/>
           <p:cNvSpPr/>
           <p:nvPr/>
         </p:nvSpPr>
@@ -6055,7 +6055,7 @@
       </p:sp>
       <p:sp>
         <p:nvSpPr>
-          <p:cNvPr id="702901662" name="Text 23"/>
+          <p:cNvPr id="409076059" name="Text 23"/>
           <p:cNvSpPr/>
           <p:nvPr/>
         </p:nvSpPr>
@@ -6095,7 +6095,7 @@
       </p:sp>
       <p:sp>
         <p:nvSpPr>
-          <p:cNvPr id="190699393" name="Shape 24"/>
+          <p:cNvPr id="1439046817" name="Shape 24"/>
           <p:cNvSpPr/>
           <p:nvPr/>
         </p:nvSpPr>
@@ -6122,7 +6122,7 @@
       </p:sp>
       <p:sp>
         <p:nvSpPr>
-          <p:cNvPr id="325554104" name="Text 25"/>
+          <p:cNvPr id="1938198029" name="Text 25"/>
           <p:cNvSpPr/>
           <p:nvPr/>
         </p:nvSpPr>
@@ -6162,7 +6162,7 @@
       </p:sp>
       <p:sp>
         <p:nvSpPr>
-          <p:cNvPr id="1850563882" name="Text 26"/>
+          <p:cNvPr id="309867087" name="Text 26"/>
           <p:cNvSpPr/>
           <p:nvPr/>
         </p:nvSpPr>
@@ -6202,7 +6202,7 @@
       </p:sp>
       <p:sp>
         <p:nvSpPr>
-          <p:cNvPr id="1426766706" name="Shape 27"/>
+          <p:cNvPr id="1416360231" name="Shape 27"/>
           <p:cNvSpPr/>
           <p:nvPr/>
         </p:nvSpPr>
@@ -6229,7 +6229,7 @@
       </p:sp>
       <p:sp>
         <p:nvSpPr>
-          <p:cNvPr id="346953968" name="Text 28"/>
+          <p:cNvPr id="192362964" name="Text 28"/>
           <p:cNvSpPr/>
           <p:nvPr/>
         </p:nvSpPr>
@@ -6269,7 +6269,7 @@
       </p:sp>
       <p:sp>
         <p:nvSpPr>
-          <p:cNvPr id="22110730" name="Text 29"/>
+          <p:cNvPr id="1830433685" name="Text 29"/>
           <p:cNvSpPr/>
           <p:nvPr/>
         </p:nvSpPr>
@@ -6309,7 +6309,7 @@
       </p:sp>
       <p:sp>
         <p:nvSpPr>
-          <p:cNvPr id="1967666012" name="Shape 30"/>
+          <p:cNvPr id="64487497" name="Shape 30"/>
           <p:cNvSpPr/>
           <p:nvPr/>
         </p:nvSpPr>
@@ -6336,7 +6336,7 @@
       </p:sp>
       <p:sp>
         <p:nvSpPr>
-          <p:cNvPr id="1544603863" name="Text 31"/>
+          <p:cNvPr id="1524759049" name="Text 31"/>
           <p:cNvSpPr/>
           <p:nvPr/>
         </p:nvSpPr>
@@ -6376,7 +6376,7 @@
       </p:sp>
       <p:sp>
         <p:nvSpPr>
-          <p:cNvPr id="382852758" name="Text 32"/>
+          <p:cNvPr id="548319377" name="Text 32"/>
           <p:cNvSpPr/>
           <p:nvPr/>
         </p:nvSpPr>
@@ -6416,7 +6416,7 @@
       </p:sp>
       <p:sp>
         <p:nvSpPr>
-          <p:cNvPr id="1116279520" name="Shape 33"/>
+          <p:cNvPr id="2032602373" name="Shape 33"/>
           <p:cNvSpPr/>
           <p:nvPr/>
         </p:nvSpPr>
@@ -6443,7 +6443,7 @@
       </p:sp>
       <p:sp>
         <p:nvSpPr>
-          <p:cNvPr id="1557517176" name="Text 34"/>
+          <p:cNvPr id="1788928473" name="Text 34"/>
           <p:cNvSpPr/>
           <p:nvPr/>
         </p:nvSpPr>
@@ -6483,7 +6483,7 @@
       </p:sp>
       <p:sp>
         <p:nvSpPr>
-          <p:cNvPr id="1738218707" name=""/>
+          <p:cNvPr id="894483481" name=""/>
           <p:cNvSpPr/>
           <p:nvPr/>
         </p:nvSpPr>
@@ -6572,7 +6572,7 @@
       </p:grpSpPr>
       <p:sp>
         <p:nvSpPr>
-          <p:cNvPr id="283975451" name="Text 0"/>
+          <p:cNvPr id="1168896378" name="Text 0"/>
           <p:cNvSpPr/>
           <p:nvPr/>
         </p:nvSpPr>
@@ -6615,7 +6615,7 @@
       </p:sp>
       <p:sp>
         <p:nvSpPr>
-          <p:cNvPr id="627317675" name="Text 1"/>
+          <p:cNvPr id="545493265" name="Text 1"/>
           <p:cNvSpPr/>
           <p:nvPr/>
         </p:nvSpPr>
@@ -6658,7 +6658,7 @@
       </p:sp>
       <p:sp>
         <p:nvSpPr>
-          <p:cNvPr id="820986616" name="Shape 2"/>
+          <p:cNvPr id="534522584" name="Shape 2"/>
           <p:cNvSpPr/>
           <p:nvPr/>
         </p:nvSpPr>
@@ -6678,7 +6678,7 @@
       </p:sp>
       <p:sp>
         <p:nvSpPr>
-          <p:cNvPr id="1573425432" name="Text 3"/>
+          <p:cNvPr id="98251735" name="Text 3"/>
           <p:cNvSpPr/>
           <p:nvPr/>
         </p:nvSpPr>
@@ -6721,7 +6721,7 @@
       </p:sp>
       <p:pic>
         <p:nvPicPr>
-          <p:cNvPr id="1591181294" name="Image 0" descr="preencoded.png"/>
+          <p:cNvPr id="1898297342" name="Image 0" descr="preencoded.png"/>
           <p:cNvPicPr>
             <a:picLocks noChangeAspect="1"/>
           </p:cNvPicPr>
@@ -6749,7 +6749,7 @@
       </p:pic>
       <p:sp>
         <p:nvSpPr>
-          <p:cNvPr id="273646523" name="Text 4"/>
+          <p:cNvPr id="1249462212" name="Text 4"/>
           <p:cNvSpPr/>
           <p:nvPr/>
         </p:nvSpPr>
@@ -6803,7 +6803,7 @@
       </p:sp>
       <p:sp>
         <p:nvSpPr>
-          <p:cNvPr id="1282520497" name="Text 5"/>
+          <p:cNvPr id="1948519084" name="Text 5"/>
           <p:cNvSpPr/>
           <p:nvPr/>
         </p:nvSpPr>
@@ -6846,7 +6846,7 @@
       </p:sp>
       <p:pic>
         <p:nvPicPr>
-          <p:cNvPr id="341453937" name="Image 1" descr="preencoded.png"/>
+          <p:cNvPr id="760191688" name="Image 1" descr="preencoded.png"/>
           <p:cNvPicPr>
             <a:picLocks noChangeAspect="1"/>
           </p:cNvPicPr>
@@ -6868,7 +6868,7 @@
       </p:pic>
       <p:sp>
         <p:nvSpPr>
-          <p:cNvPr id="2073937898" name="Text 6"/>
+          <p:cNvPr id="804964998" name="Text 6"/>
           <p:cNvSpPr/>
           <p:nvPr/>
         </p:nvSpPr>
@@ -6922,7 +6922,7 @@
       </p:sp>
       <p:sp>
         <p:nvSpPr>
-          <p:cNvPr id="1960618257" name="Text 7"/>
+          <p:cNvPr id="601263106" name="Text 7"/>
           <p:cNvSpPr/>
           <p:nvPr/>
         </p:nvSpPr>
@@ -6965,7 +6965,7 @@
       </p:sp>
       <p:pic>
         <p:nvPicPr>
-          <p:cNvPr id="461062014" name="Image 2" descr="preencoded.png"/>
+          <p:cNvPr id="737465674" name="Image 2" descr="preencoded.png"/>
           <p:cNvPicPr>
             <a:picLocks noChangeAspect="1"/>
           </p:cNvPicPr>
@@ -6987,7 +6987,7 @@
       </p:pic>
       <p:sp>
         <p:nvSpPr>
-          <p:cNvPr id="1615058534" name="Text 8"/>
+          <p:cNvPr id="804760930" name="Text 8"/>
           <p:cNvSpPr/>
           <p:nvPr/>
         </p:nvSpPr>
@@ -7041,7 +7041,7 @@
       </p:sp>
       <p:sp>
         <p:nvSpPr>
-          <p:cNvPr id="249993754" name="Text 9"/>
+          <p:cNvPr id="1324180786" name="Text 9"/>
           <p:cNvSpPr/>
           <p:nvPr/>
         </p:nvSpPr>
@@ -7084,7 +7084,7 @@
       </p:sp>
       <p:pic>
         <p:nvPicPr>
-          <p:cNvPr id="841566084" name="Image 3" descr="preencoded.png"/>
+          <p:cNvPr id="1636761848" name="Image 3" descr="preencoded.png"/>
           <p:cNvPicPr>
             <a:picLocks noChangeAspect="1"/>
           </p:cNvPicPr>
@@ -7106,7 +7106,7 @@
       </p:pic>
       <p:sp>
         <p:nvSpPr>
-          <p:cNvPr id="1221400584" name="Text 10"/>
+          <p:cNvPr id="1415265533" name="Text 10"/>
           <p:cNvSpPr/>
           <p:nvPr/>
         </p:nvSpPr>
@@ -7160,7 +7160,7 @@
       </p:sp>
       <p:sp>
         <p:nvSpPr>
-          <p:cNvPr id="1585645585" name="Text 11"/>
+          <p:cNvPr id="2121812136" name="Text 11"/>
           <p:cNvSpPr/>
           <p:nvPr/>
         </p:nvSpPr>
@@ -7203,7 +7203,7 @@
       </p:sp>
       <p:pic>
         <p:nvPicPr>
-          <p:cNvPr id="1928868241" name="Image 4" descr="preencoded.png"/>
+          <p:cNvPr id="1707673718" name="Image 4" descr="preencoded.png"/>
           <p:cNvPicPr>
             <a:picLocks noChangeAspect="1"/>
           </p:cNvPicPr>
@@ -7225,7 +7225,7 @@
       </p:pic>
       <p:sp>
         <p:nvSpPr>
-          <p:cNvPr id="1478495597" name="Text 12"/>
+          <p:cNvPr id="313399093" name="Text 12"/>
           <p:cNvSpPr/>
           <p:nvPr/>
         </p:nvSpPr>
@@ -7290,7 +7290,7 @@
       </p:sp>
       <p:sp>
         <p:nvSpPr>
-          <p:cNvPr id="5535245" name="Text 13"/>
+          <p:cNvPr id="1775997796" name="Text 13"/>
           <p:cNvSpPr/>
           <p:nvPr/>
         </p:nvSpPr>
@@ -7333,7 +7333,7 @@
       </p:sp>
       <p:pic>
         <p:nvPicPr>
-          <p:cNvPr id="821632866" name="Image 5" descr="preencoded.png"/>
+          <p:cNvPr id="1912076946" name="Image 5" descr="preencoded.png"/>
           <p:cNvPicPr>
             <a:picLocks noChangeAspect="1"/>
           </p:cNvPicPr>
@@ -7355,7 +7355,7 @@
       </p:pic>
       <p:sp>
         <p:nvSpPr>
-          <p:cNvPr id="2127335759" name="Text 14"/>
+          <p:cNvPr id="552467746" name="Text 14"/>
           <p:cNvSpPr/>
           <p:nvPr/>
         </p:nvSpPr>
@@ -7409,7 +7409,7 @@
       </p:sp>
       <p:sp>
         <p:nvSpPr>
-          <p:cNvPr id="170195499" name="Text 15"/>
+          <p:cNvPr id="1364857885" name="Text 15"/>
           <p:cNvSpPr/>
           <p:nvPr/>
         </p:nvSpPr>
@@ -7452,7 +7452,7 @@
       </p:sp>
       <p:sp>
         <p:nvSpPr>
-          <p:cNvPr id="1096416425" name="Text 16"/>
+          <p:cNvPr id="52918001" name="Text 16"/>
           <p:cNvSpPr/>
           <p:nvPr/>
         </p:nvSpPr>
@@ -7495,7 +7495,7 @@
       </p:sp>
       <p:sp>
         <p:nvSpPr>
-          <p:cNvPr id="2051487053" name="Shape 17"/>
+          <p:cNvPr id="595013659" name="Shape 17"/>
           <p:cNvSpPr/>
           <p:nvPr/>
         </p:nvSpPr>
@@ -7522,7 +7522,7 @@
       </p:sp>
       <p:pic>
         <p:nvPicPr>
-          <p:cNvPr id="1783910498" name="Image 6" descr="preencoded.png"/>
+          <p:cNvPr id="902078569" name="Image 6" descr="preencoded.png"/>
           <p:cNvPicPr>
             <a:picLocks noChangeAspect="1"/>
           </p:cNvPicPr>
@@ -7544,7 +7544,7 @@
       </p:pic>
       <p:sp>
         <p:nvSpPr>
-          <p:cNvPr id="1356606963" name="Text 18"/>
+          <p:cNvPr id="880819314" name="Text 18"/>
           <p:cNvSpPr/>
           <p:nvPr/>
         </p:nvSpPr>
@@ -7598,7 +7598,7 @@
       </p:sp>
       <p:sp>
         <p:nvSpPr>
-          <p:cNvPr id="1808205159" name="Text 19"/>
+          <p:cNvPr id="526906901" name="Text 19"/>
           <p:cNvSpPr/>
           <p:nvPr/>
         </p:nvSpPr>
@@ -7641,7 +7641,7 @@
       </p:sp>
       <p:sp>
         <p:nvSpPr>
-          <p:cNvPr id="844274492" name="Shape 20"/>
+          <p:cNvPr id="125144980" name="Shape 20"/>
           <p:cNvSpPr/>
           <p:nvPr/>
         </p:nvSpPr>
@@ -7668,7 +7668,7 @@
       </p:sp>
       <p:pic>
         <p:nvPicPr>
-          <p:cNvPr id="1856116130" name="Image 7" descr="preencoded.png"/>
+          <p:cNvPr id="1954545903" name="Image 7" descr="preencoded.png"/>
           <p:cNvPicPr>
             <a:picLocks noChangeAspect="1"/>
           </p:cNvPicPr>
@@ -7690,7 +7690,7 @@
       </p:pic>
       <p:sp>
         <p:nvSpPr>
-          <p:cNvPr id="67203706" name="Text 21"/>
+          <p:cNvPr id="1583305750" name="Text 21"/>
           <p:cNvSpPr/>
           <p:nvPr/>
         </p:nvSpPr>
@@ -7733,7 +7733,7 @@
       </p:sp>
       <p:sp>
         <p:nvSpPr>
-          <p:cNvPr id="271006496" name="Text 22"/>
+          <p:cNvPr id="1856269481" name="Text 22"/>
           <p:cNvSpPr/>
           <p:nvPr/>
         </p:nvSpPr>
@@ -7776,7 +7776,7 @@
       </p:sp>
       <p:sp>
         <p:nvSpPr>
-          <p:cNvPr id="1787014319" name="Shape 23"/>
+          <p:cNvPr id="421747186" name="Shape 23"/>
           <p:cNvSpPr/>
           <p:nvPr/>
         </p:nvSpPr>
@@ -7803,7 +7803,7 @@
       </p:sp>
       <p:pic>
         <p:nvPicPr>
-          <p:cNvPr id="417267631" name="Image 8" descr="preencoded.png"/>
+          <p:cNvPr id="571774193" name="Image 8" descr="preencoded.png"/>
           <p:cNvPicPr>
             <a:picLocks noChangeAspect="1"/>
           </p:cNvPicPr>
@@ -7825,7 +7825,7 @@
       </p:pic>
       <p:sp>
         <p:nvSpPr>
-          <p:cNvPr id="1216860669" name="Text 24"/>
+          <p:cNvPr id="1369360910" name="Text 24"/>
           <p:cNvSpPr/>
           <p:nvPr/>
         </p:nvSpPr>
@@ -7868,7 +7868,7 @@
       </p:sp>
       <p:sp>
         <p:nvSpPr>
-          <p:cNvPr id="1349294053" name="Text 25"/>
+          <p:cNvPr id="2037760838" name="Text 25"/>
           <p:cNvSpPr/>
           <p:nvPr/>
         </p:nvSpPr>
@@ -7911,7 +7911,7 @@
       </p:sp>
       <p:sp>
         <p:nvSpPr>
-          <p:cNvPr id="2072921259" name="Shape 26"/>
+          <p:cNvPr id="1029597806" name="Shape 26"/>
           <p:cNvSpPr/>
           <p:nvPr/>
         </p:nvSpPr>
@@ -7938,7 +7938,7 @@
       </p:sp>
       <p:pic>
         <p:nvPicPr>
-          <p:cNvPr id="130543262" name="Image 9" descr="preencoded.png"/>
+          <p:cNvPr id="1477360889" name="Image 9" descr="preencoded.png"/>
           <p:cNvPicPr>
             <a:picLocks noChangeAspect="1"/>
           </p:cNvPicPr>
@@ -7960,7 +7960,7 @@
       </p:pic>
       <p:sp>
         <p:nvSpPr>
-          <p:cNvPr id="1512973791" name="Text 27"/>
+          <p:cNvPr id="1227815639" name="Text 27"/>
           <p:cNvSpPr/>
           <p:nvPr/>
         </p:nvSpPr>
@@ -8003,7 +8003,7 @@
       </p:sp>
       <p:sp>
         <p:nvSpPr>
-          <p:cNvPr id="902536436" name="Text 28"/>
+          <p:cNvPr id="322085428" name="Text 28"/>
           <p:cNvSpPr/>
           <p:nvPr/>
         </p:nvSpPr>
@@ -8046,7 +8046,7 @@
       </p:sp>
       <p:sp>
         <p:nvSpPr>
-          <p:cNvPr id="1025577634" name="Shape 31"/>
+          <p:cNvPr id="1412029270" name="Shape 31"/>
           <p:cNvSpPr/>
           <p:nvPr/>
         </p:nvSpPr>
@@ -8068,7 +8068,7 @@
       </p:sp>
       <p:pic>
         <p:nvPicPr>
-          <p:cNvPr id="1469571407" name="Image 10" descr="preencoded.png"/>
+          <p:cNvPr id="319391543" name="Image 10" descr="preencoded.png"/>
           <p:cNvPicPr>
             <a:picLocks noChangeAspect="1"/>
           </p:cNvPicPr>
@@ -8090,7 +8090,7 @@
       </p:pic>
       <p:sp>
         <p:nvSpPr>
-          <p:cNvPr id="2096634981" name="Text 32"/>
+          <p:cNvPr id="2070480021" name="Text 32"/>
           <p:cNvSpPr/>
           <p:nvPr/>
         </p:nvSpPr>
@@ -8155,7 +8155,7 @@
       </p:sp>
       <p:sp>
         <p:nvSpPr>
-          <p:cNvPr id="696307484" name=""/>
+          <p:cNvPr id="1716601058" name=""/>
           <p:cNvSpPr/>
           <p:nvPr/>
         </p:nvSpPr>
@@ -8369,7 +8369,7 @@
       </p:grpSpPr>
       <p:sp>
         <p:nvSpPr>
-          <p:cNvPr id="527555313" name="Text 0"/>
+          <p:cNvPr id="741970461" name="Text 0"/>
           <p:cNvSpPr/>
           <p:nvPr/>
         </p:nvSpPr>
@@ -8409,7 +8409,7 @@
       </p:sp>
       <p:sp>
         <p:nvSpPr>
-          <p:cNvPr id="1238261109" name="Text 1"/>
+          <p:cNvPr id="1616452807" name="Text 1"/>
           <p:cNvSpPr/>
           <p:nvPr/>
         </p:nvSpPr>
@@ -8460,7 +8460,7 @@
       </p:sp>
       <p:sp>
         <p:nvSpPr>
-          <p:cNvPr id="233864949" name="Shape 2"/>
+          <p:cNvPr id="662261594" name="Shape 2"/>
           <p:cNvSpPr/>
           <p:nvPr/>
         </p:nvSpPr>
@@ -8482,7 +8482,7 @@
       </p:sp>
       <p:sp>
         <p:nvSpPr>
-          <p:cNvPr id="703035043" name="Shape 3"/>
+          <p:cNvPr id="36932084" name="Shape 3"/>
           <p:cNvSpPr/>
           <p:nvPr/>
         </p:nvSpPr>
@@ -8509,7 +8509,7 @@
       </p:sp>
       <p:sp>
         <p:nvSpPr>
-          <p:cNvPr id="1219598974" name="Text 4"/>
+          <p:cNvPr id="1645356572" name="Text 4"/>
           <p:cNvSpPr/>
           <p:nvPr/>
         </p:nvSpPr>
@@ -8570,7 +8570,7 @@
       </p:sp>
       <p:sp>
         <p:nvSpPr>
-          <p:cNvPr id="1282121660" name="Shape 5"/>
+          <p:cNvPr id="431168087" name="Shape 5"/>
           <p:cNvSpPr/>
           <p:nvPr/>
         </p:nvSpPr>
@@ -8595,7 +8595,7 @@
       </p:sp>
       <p:sp>
         <p:nvSpPr>
-          <p:cNvPr id="1656022357" name="Shape 6"/>
+          <p:cNvPr id="210945375" name="Shape 6"/>
           <p:cNvSpPr/>
           <p:nvPr/>
         </p:nvSpPr>
@@ -8631,7 +8631,7 @@
       </p:sp>
       <p:sp>
         <p:nvSpPr>
-          <p:cNvPr id="53805926" name="Shape 7"/>
+          <p:cNvPr id="1559362269" name="Shape 7"/>
           <p:cNvSpPr/>
           <p:nvPr/>
         </p:nvSpPr>
@@ -8656,7 +8656,7 @@
       </p:sp>
       <p:sp>
         <p:nvSpPr>
-          <p:cNvPr id="1301336284" name="Text 8"/>
+          <p:cNvPr id="1395069565" name="Text 8"/>
           <p:cNvSpPr/>
           <p:nvPr/>
         </p:nvSpPr>
@@ -8717,7 +8717,7 @@
       </p:sp>
       <p:sp>
         <p:nvSpPr>
-          <p:cNvPr id="2018740025" name="Shape 9"/>
+          <p:cNvPr id="1627406485" name="Shape 9"/>
           <p:cNvSpPr/>
           <p:nvPr/>
         </p:nvSpPr>
@@ -8741,7 +8741,7 @@
       </p:sp>
       <p:sp>
         <p:nvSpPr>
-          <p:cNvPr id="1076567625" name="Shape 10"/>
+          <p:cNvPr id="1490836501" name="Shape 10"/>
           <p:cNvSpPr/>
           <p:nvPr/>
         </p:nvSpPr>
@@ -8765,7 +8765,7 @@
       </p:sp>
       <p:sp>
         <p:nvSpPr>
-          <p:cNvPr id="1406931836" name="Text 11"/>
+          <p:cNvPr id="918571311" name="Text 11"/>
           <p:cNvSpPr/>
           <p:nvPr/>
         </p:nvSpPr>
@@ -8805,7 +8805,7 @@
       </p:sp>
       <p:sp>
         <p:nvSpPr>
-          <p:cNvPr id="379275845" name="Shape 12"/>
+          <p:cNvPr id="1003038752" name="Shape 12"/>
           <p:cNvSpPr/>
           <p:nvPr/>
         </p:nvSpPr>
@@ -8841,7 +8841,7 @@
       </p:sp>
       <p:sp>
         <p:nvSpPr>
-          <p:cNvPr id="167114437" name="Shape 13"/>
+          <p:cNvPr id="1289973181" name="Shape 13"/>
           <p:cNvSpPr/>
           <p:nvPr/>
         </p:nvSpPr>
@@ -8866,7 +8866,7 @@
       </p:sp>
       <p:sp>
         <p:nvSpPr>
-          <p:cNvPr id="2130653518" name="Text 14"/>
+          <p:cNvPr id="1986422310" name="Text 14"/>
           <p:cNvSpPr/>
           <p:nvPr/>
         </p:nvSpPr>
@@ -8927,7 +8927,7 @@
       </p:sp>
       <p:sp>
         <p:nvSpPr>
-          <p:cNvPr id="1805437265" name="Shape 15"/>
+          <p:cNvPr id="616501241" name="Shape 15"/>
           <p:cNvSpPr/>
           <p:nvPr/>
         </p:nvSpPr>
@@ -8951,7 +8951,7 @@
       </p:sp>
       <p:sp>
         <p:nvSpPr>
-          <p:cNvPr id="918873075" name="Shape 16"/>
+          <p:cNvPr id="955017790" name="Shape 16"/>
           <p:cNvSpPr/>
           <p:nvPr/>
         </p:nvSpPr>
@@ -8975,7 +8975,7 @@
       </p:sp>
       <p:sp>
         <p:nvSpPr>
-          <p:cNvPr id="1834583697" name="Text 17"/>
+          <p:cNvPr id="1313827485" name="Text 17"/>
           <p:cNvSpPr/>
           <p:nvPr/>
         </p:nvSpPr>
@@ -9015,7 +9015,7 @@
       </p:sp>
       <p:sp>
         <p:nvSpPr>
-          <p:cNvPr id="394963161" name="Shape 18"/>
+          <p:cNvPr id="1437973011" name="Shape 18"/>
           <p:cNvSpPr/>
           <p:nvPr/>
         </p:nvSpPr>
@@ -9042,7 +9042,7 @@
       </p:sp>
       <p:sp>
         <p:nvSpPr>
-          <p:cNvPr id="1706683058" name="Shape 19"/>
+          <p:cNvPr id="468864781" name="Shape 19"/>
           <p:cNvSpPr/>
           <p:nvPr/>
         </p:nvSpPr>
@@ -9067,7 +9067,7 @@
       </p:sp>
       <p:sp>
         <p:nvSpPr>
-          <p:cNvPr id="546344802" name="Text 20"/>
+          <p:cNvPr id="1566047356" name="Text 20"/>
           <p:cNvSpPr/>
           <p:nvPr/>
         </p:nvSpPr>
@@ -9128,7 +9128,7 @@
       </p:sp>
       <p:sp>
         <p:nvSpPr>
-          <p:cNvPr id="1179911276" name="Shape 21"/>
+          <p:cNvPr id="167779754" name="Shape 21"/>
           <p:cNvSpPr/>
           <p:nvPr/>
         </p:nvSpPr>
@@ -9152,7 +9152,7 @@
       </p:sp>
       <p:sp>
         <p:nvSpPr>
-          <p:cNvPr id="713634307" name="Shape 22"/>
+          <p:cNvPr id="273838290" name="Shape 22"/>
           <p:cNvSpPr/>
           <p:nvPr/>
         </p:nvSpPr>
@@ -9176,7 +9176,7 @@
       </p:sp>
       <p:sp>
         <p:nvSpPr>
-          <p:cNvPr id="1795499624" name="Text 23"/>
+          <p:cNvPr id="66059695" name="Text 23"/>
           <p:cNvSpPr/>
           <p:nvPr/>
         </p:nvSpPr>
@@ -9216,7 +9216,7 @@
       </p:sp>
       <p:sp>
         <p:nvSpPr>
-          <p:cNvPr id="883417081" name="Shape 24"/>
+          <p:cNvPr id="1610557016" name="Shape 24"/>
           <p:cNvSpPr/>
           <p:nvPr/>
         </p:nvSpPr>
@@ -9252,7 +9252,7 @@
       </p:sp>
       <p:sp>
         <p:nvSpPr>
-          <p:cNvPr id="1242684150" name="Shape 25"/>
+          <p:cNvPr id="315229676" name="Shape 25"/>
           <p:cNvSpPr/>
           <p:nvPr/>
         </p:nvSpPr>
@@ -9277,7 +9277,7 @@
       </p:sp>
       <p:sp>
         <p:nvSpPr>
-          <p:cNvPr id="1758098004" name="Text 26"/>
+          <p:cNvPr id="1673247185" name="Text 26"/>
           <p:cNvSpPr/>
           <p:nvPr/>
         </p:nvSpPr>
@@ -9338,7 +9338,7 @@
       </p:sp>
       <p:sp>
         <p:nvSpPr>
-          <p:cNvPr id="703668616" name="Shape 27"/>
+          <p:cNvPr id="175179858" name="Shape 27"/>
           <p:cNvSpPr/>
           <p:nvPr/>
         </p:nvSpPr>
@@ -9362,7 +9362,7 @@
       </p:sp>
       <p:sp>
         <p:nvSpPr>
-          <p:cNvPr id="1062265722" name="Shape 28"/>
+          <p:cNvPr id="1081900679" name="Shape 28"/>
           <p:cNvSpPr/>
           <p:nvPr/>
         </p:nvSpPr>
@@ -9386,7 +9386,7 @@
       </p:sp>
       <p:sp>
         <p:nvSpPr>
-          <p:cNvPr id="1884641379" name="Text 29"/>
+          <p:cNvPr id="42420440" name="Text 29"/>
           <p:cNvSpPr/>
           <p:nvPr/>
         </p:nvSpPr>
@@ -9426,7 +9426,7 @@
       </p:sp>
       <p:sp>
         <p:nvSpPr>
-          <p:cNvPr id="879900610" name="Shape 30"/>
+          <p:cNvPr id="598725559" name="Shape 30"/>
           <p:cNvSpPr/>
           <p:nvPr/>
         </p:nvSpPr>
@@ -9453,7 +9453,7 @@
       </p:sp>
       <p:sp>
         <p:nvSpPr>
-          <p:cNvPr id="1292540470" name="Shape 31"/>
+          <p:cNvPr id="67098302" name="Shape 31"/>
           <p:cNvSpPr/>
           <p:nvPr/>
         </p:nvSpPr>
@@ -9477,7 +9477,7 @@
       </p:sp>
       <p:sp>
         <p:nvSpPr>
-          <p:cNvPr id="1696732933" name="Text 32"/>
+          <p:cNvPr id="872122220" name="Text 32"/>
           <p:cNvSpPr/>
           <p:nvPr/>
         </p:nvSpPr>
@@ -9517,7 +9517,7 @@
       </p:sp>
       <p:sp>
         <p:nvSpPr>
-          <p:cNvPr id="1530649554" name="Shape 33"/>
+          <p:cNvPr id="1989865061" name="Shape 33"/>
           <p:cNvSpPr/>
           <p:nvPr/>
         </p:nvSpPr>
@@ -9541,7 +9541,7 @@
       </p:sp>
       <p:sp>
         <p:nvSpPr>
-          <p:cNvPr id="2004853679" name="Text 34"/>
+          <p:cNvPr id="1120007120" name="Text 34"/>
           <p:cNvSpPr/>
           <p:nvPr/>
         </p:nvSpPr>
@@ -9581,7 +9581,7 @@
       </p:sp>
       <p:sp>
         <p:nvSpPr>
-          <p:cNvPr id="1425396804" name=""/>
+          <p:cNvPr id="337762270" name=""/>
           <p:cNvSpPr/>
           <p:nvPr/>
         </p:nvSpPr>
@@ -9670,7 +9670,7 @@
       </p:grpSpPr>
       <p:sp>
         <p:nvSpPr>
-          <p:cNvPr id="773864417" name="Text 0"/>
+          <p:cNvPr id="1254564183" name="Text 0"/>
           <p:cNvSpPr/>
           <p:nvPr/>
         </p:nvSpPr>
@@ -9713,7 +9713,7 @@
       </p:sp>
       <p:sp>
         <p:nvSpPr>
-          <p:cNvPr id="734932736" name="Text 1"/>
+          <p:cNvPr id="1467019388" name="Text 1"/>
           <p:cNvSpPr/>
           <p:nvPr/>
         </p:nvSpPr>
@@ -9756,7 +9756,7 @@
       </p:sp>
       <p:sp>
         <p:nvSpPr>
-          <p:cNvPr id="774455473" name="Shape 2"/>
+          <p:cNvPr id="2015984374" name="Shape 2"/>
           <p:cNvSpPr/>
           <p:nvPr/>
         </p:nvSpPr>
@@ -9778,7 +9778,7 @@
       </p:sp>
       <p:pic>
         <p:nvPicPr>
-          <p:cNvPr id="771621517" name="Image 0" descr="preencoded.png"/>
+          <p:cNvPr id="1805902124" name="Image 0" descr="preencoded.png"/>
           <p:cNvPicPr>
             <a:picLocks noChangeAspect="1"/>
           </p:cNvPicPr>
@@ -9800,7 +9800,7 @@
       </p:pic>
       <p:pic>
         <p:nvPicPr>
-          <p:cNvPr id="1080961630" name="Image 1" descr="preencoded.png"/>
+          <p:cNvPr id="1521414970" name="Image 1" descr="preencoded.png"/>
           <p:cNvPicPr>
             <a:picLocks noChangeAspect="1"/>
           </p:cNvPicPr>
@@ -9828,7 +9828,7 @@
       </p:pic>
       <p:sp>
         <p:nvSpPr>
-          <p:cNvPr id="1286460782" name="Text 3"/>
+          <p:cNvPr id="120556007" name="Text 3"/>
           <p:cNvSpPr/>
           <p:nvPr/>
         </p:nvSpPr>
@@ -9871,7 +9871,7 @@
       </p:sp>
       <p:sp>
         <p:nvSpPr>
-          <p:cNvPr id="1705733089" name="Text 4"/>
+          <p:cNvPr id="1497389713" name="Text 4"/>
           <p:cNvSpPr/>
           <p:nvPr/>
         </p:nvSpPr>
@@ -9914,7 +9914,7 @@
       </p:sp>
       <p:sp>
         <p:nvSpPr>
-          <p:cNvPr id="1413789751" name="Shape 5"/>
+          <p:cNvPr id="1090893606" name="Shape 5"/>
           <p:cNvSpPr/>
           <p:nvPr/>
         </p:nvSpPr>
@@ -9936,7 +9936,7 @@
       </p:sp>
       <p:pic>
         <p:nvPicPr>
-          <p:cNvPr id="766018452" name="Image 2" descr="preencoded.png"/>
+          <p:cNvPr id="2002470148" name="Image 2" descr="preencoded.png"/>
           <p:cNvPicPr>
             <a:picLocks noChangeAspect="1"/>
           </p:cNvPicPr>
@@ -9958,7 +9958,7 @@
       </p:pic>
       <p:pic>
         <p:nvPicPr>
-          <p:cNvPr id="1218474337" name="Image 3" descr="preencoded.png"/>
+          <p:cNvPr id="136284374" name="Image 3" descr="preencoded.png"/>
           <p:cNvPicPr>
             <a:picLocks noChangeAspect="1"/>
           </p:cNvPicPr>
@@ -9986,7 +9986,7 @@
       </p:pic>
       <p:sp>
         <p:nvSpPr>
-          <p:cNvPr id="1671272106" name="Text 6"/>
+          <p:cNvPr id="2089142305" name="Text 6"/>
           <p:cNvSpPr/>
           <p:nvPr/>
         </p:nvSpPr>
@@ -10029,7 +10029,7 @@
       </p:sp>
       <p:sp>
         <p:nvSpPr>
-          <p:cNvPr id="1721935963" name="Text 7"/>
+          <p:cNvPr id="1613855841" name="Text 7"/>
           <p:cNvSpPr/>
           <p:nvPr/>
         </p:nvSpPr>
@@ -10072,7 +10072,7 @@
       </p:sp>
       <p:sp>
         <p:nvSpPr>
-          <p:cNvPr id="1405088207" name="Shape 8"/>
+          <p:cNvPr id="482878129" name="Shape 8"/>
           <p:cNvSpPr/>
           <p:nvPr/>
         </p:nvSpPr>
@@ -10094,7 +10094,7 @@
       </p:sp>
       <p:pic>
         <p:nvPicPr>
-          <p:cNvPr id="836337949" name="Image 4" descr="preencoded.png"/>
+          <p:cNvPr id="380978893" name="Image 4" descr="preencoded.png"/>
           <p:cNvPicPr>
             <a:picLocks noChangeAspect="1"/>
           </p:cNvPicPr>
@@ -10116,7 +10116,7 @@
       </p:pic>
       <p:pic>
         <p:nvPicPr>
-          <p:cNvPr id="114312302" name="Image 5" descr="preencoded.png"/>
+          <p:cNvPr id="831956631" name="Image 5" descr="preencoded.png"/>
           <p:cNvPicPr>
             <a:picLocks noChangeAspect="1"/>
           </p:cNvPicPr>
@@ -10144,7 +10144,7 @@
       </p:pic>
       <p:sp>
         <p:nvSpPr>
-          <p:cNvPr id="845173423" name="Text 9"/>
+          <p:cNvPr id="465412709" name="Text 9"/>
           <p:cNvSpPr/>
           <p:nvPr/>
         </p:nvSpPr>
@@ -10187,7 +10187,7 @@
       </p:sp>
       <p:sp>
         <p:nvSpPr>
-          <p:cNvPr id="255179373" name="Text 10"/>
+          <p:cNvPr id="1318569260" name="Text 10"/>
           <p:cNvSpPr/>
           <p:nvPr/>
         </p:nvSpPr>
@@ -10230,7 +10230,7 @@
       </p:sp>
       <p:sp>
         <p:nvSpPr>
-          <p:cNvPr id="1610790771" name="Shape 11"/>
+          <p:cNvPr id="1935695726" name="Shape 11"/>
           <p:cNvSpPr/>
           <p:nvPr/>
         </p:nvSpPr>
@@ -10252,7 +10252,7 @@
       </p:sp>
       <p:pic>
         <p:nvPicPr>
-          <p:cNvPr id="1225152661" name="Image 6" descr="preencoded.png"/>
+          <p:cNvPr id="511604961" name="Image 6" descr="preencoded.png"/>
           <p:cNvPicPr>
             <a:picLocks noChangeAspect="1"/>
           </p:cNvPicPr>
@@ -10274,7 +10274,7 @@
       </p:pic>
       <p:pic>
         <p:nvPicPr>
-          <p:cNvPr id="576662004" name="Image 7" descr="preencoded.png"/>
+          <p:cNvPr id="2002838149" name="Image 7" descr="preencoded.png"/>
           <p:cNvPicPr>
             <a:picLocks noChangeAspect="1"/>
           </p:cNvPicPr>
@@ -10302,7 +10302,7 @@
       </p:pic>
       <p:sp>
         <p:nvSpPr>
-          <p:cNvPr id="945325185" name="Text 12"/>
+          <p:cNvPr id="735395779" name="Text 12"/>
           <p:cNvSpPr/>
           <p:nvPr/>
         </p:nvSpPr>
@@ -10345,7 +10345,7 @@
       </p:sp>
       <p:sp>
         <p:nvSpPr>
-          <p:cNvPr id="1572461332" name="Text 13"/>
+          <p:cNvPr id="882648240" name="Text 13"/>
           <p:cNvSpPr/>
           <p:nvPr/>
         </p:nvSpPr>
@@ -10388,7 +10388,7 @@
       </p:sp>
       <p:sp>
         <p:nvSpPr>
-          <p:cNvPr id="1984304400" name="Text 14"/>
+          <p:cNvPr id="1882237484" name="Text 14"/>
           <p:cNvSpPr/>
           <p:nvPr/>
         </p:nvSpPr>
@@ -10431,7 +10431,7 @@
       </p:sp>
       <p:sp>
         <p:nvSpPr>
-          <p:cNvPr id="1565415396" name="Text 15"/>
+          <p:cNvPr id="1073197595" name="Text 15"/>
           <p:cNvSpPr/>
           <p:nvPr/>
         </p:nvSpPr>
@@ -10474,7 +10474,7 @@
       </p:sp>
       <p:sp>
         <p:nvSpPr>
-          <p:cNvPr id="2090256467" name="Text 16"/>
+          <p:cNvPr id="1933378323" name="Text 16"/>
           <p:cNvSpPr/>
           <p:nvPr/>
         </p:nvSpPr>
@@ -10517,7 +10517,7 @@
       </p:sp>
       <p:sp>
         <p:nvSpPr>
-          <p:cNvPr id="1759215665" name="Text 17"/>
+          <p:cNvPr id="1148249187" name="Text 17"/>
           <p:cNvSpPr/>
           <p:nvPr/>
         </p:nvSpPr>
@@ -10560,7 +10560,7 @@
       </p:sp>
       <p:sp>
         <p:nvSpPr>
-          <p:cNvPr id="1262453071" name="Text 18"/>
+          <p:cNvPr id="1194772077" name="Text 18"/>
           <p:cNvSpPr/>
           <p:nvPr/>
         </p:nvSpPr>
@@ -10603,7 +10603,7 @@
       </p:sp>
       <p:sp>
         <p:nvSpPr>
-          <p:cNvPr id="426115926" name="Shape 19"/>
+          <p:cNvPr id="935015991" name="Shape 19"/>
           <p:cNvSpPr/>
           <p:nvPr/>
         </p:nvSpPr>
@@ -10623,7 +10623,7 @@
       </p:sp>
       <p:sp>
         <p:nvSpPr>
-          <p:cNvPr id="1466800547" name=""/>
+          <p:cNvPr id="1773949593" name=""/>
           <p:cNvSpPr/>
           <p:nvPr/>
         </p:nvSpPr>
@@ -10712,7 +10712,7 @@
       </p:grpSpPr>
       <p:sp>
         <p:nvSpPr>
-          <p:cNvPr id="756350014" name="Text 0"/>
+          <p:cNvPr id="1567148384" name="Text 0"/>
           <p:cNvSpPr/>
           <p:nvPr/>
         </p:nvSpPr>
@@ -10755,7 +10755,7 @@
       </p:sp>
       <p:sp>
         <p:nvSpPr>
-          <p:cNvPr id="1434741033" name="Shape 1"/>
+          <p:cNvPr id="1036159377" name="Shape 1"/>
           <p:cNvSpPr/>
           <p:nvPr/>
         </p:nvSpPr>
@@ -10782,7 +10782,7 @@
       </p:sp>
       <p:sp>
         <p:nvSpPr>
-          <p:cNvPr id="1051445018" name="Text 2"/>
+          <p:cNvPr id="1610449180" name="Text 2"/>
           <p:cNvSpPr/>
           <p:nvPr/>
         </p:nvSpPr>
@@ -10825,7 +10825,7 @@
       </p:sp>
       <p:sp>
         <p:nvSpPr>
-          <p:cNvPr id="2001180241" name="Text 3"/>
+          <p:cNvPr id="688500227" name="Text 3"/>
           <p:cNvSpPr/>
           <p:nvPr/>
         </p:nvSpPr>
@@ -10868,7 +10868,7 @@
       </p:sp>
       <p:sp>
         <p:nvSpPr>
-          <p:cNvPr id="1267306256" name="Text 4"/>
+          <p:cNvPr id="1191865932" name="Text 4"/>
           <p:cNvSpPr/>
           <p:nvPr/>
         </p:nvSpPr>
@@ -10911,7 +10911,7 @@
       </p:sp>
       <p:sp>
         <p:nvSpPr>
-          <p:cNvPr id="1893519090" name="Text 5"/>
+          <p:cNvPr id="1475204634" name="Text 5"/>
           <p:cNvSpPr/>
           <p:nvPr/>
         </p:nvSpPr>
@@ -10954,7 +10954,7 @@
       </p:sp>
       <p:sp>
         <p:nvSpPr>
-          <p:cNvPr id="1726213571" name="Text 6"/>
+          <p:cNvPr id="1901044955" name="Text 6"/>
           <p:cNvSpPr/>
           <p:nvPr/>
         </p:nvSpPr>
@@ -10997,7 +10997,7 @@
       </p:sp>
       <p:sp>
         <p:nvSpPr>
-          <p:cNvPr id="771090270" name="Text 7"/>
+          <p:cNvPr id="334110514" name="Text 7"/>
           <p:cNvSpPr/>
           <p:nvPr/>
         </p:nvSpPr>
@@ -11040,7 +11040,7 @@
       </p:sp>
       <p:sp>
         <p:nvSpPr>
-          <p:cNvPr id="741877454" name="Text 8"/>
+          <p:cNvPr id="394719185" name="Text 8"/>
           <p:cNvSpPr/>
           <p:nvPr/>
         </p:nvSpPr>
@@ -11083,7 +11083,7 @@
       </p:sp>
       <p:sp>
         <p:nvSpPr>
-          <p:cNvPr id="1878742116" name="Text 9"/>
+          <p:cNvPr id="1915975776" name="Text 9"/>
           <p:cNvSpPr/>
           <p:nvPr/>
         </p:nvSpPr>
@@ -11126,7 +11126,7 @@
       </p:sp>
       <p:sp>
         <p:nvSpPr>
-          <p:cNvPr id="236395297" name="Text 10"/>
+          <p:cNvPr id="536672206" name="Text 10"/>
           <p:cNvSpPr/>
           <p:nvPr/>
         </p:nvSpPr>
@@ -11169,7 +11169,7 @@
       </p:sp>
       <p:sp>
         <p:nvSpPr>
-          <p:cNvPr id="1725775605" name="Text 11"/>
+          <p:cNvPr id="1640742854" name="Text 11"/>
           <p:cNvSpPr/>
           <p:nvPr/>
         </p:nvSpPr>
@@ -11212,7 +11212,7 @@
       </p:sp>
       <p:sp>
         <p:nvSpPr>
-          <p:cNvPr id="905626427" name="Text 12"/>
+          <p:cNvPr id="146930596" name="Text 12"/>
           <p:cNvSpPr/>
           <p:nvPr/>
         </p:nvSpPr>
@@ -11255,7 +11255,7 @@
       </p:sp>
       <p:sp>
         <p:nvSpPr>
-          <p:cNvPr id="461789352" name="Text 13"/>
+          <p:cNvPr id="368900825" name="Text 13"/>
           <p:cNvSpPr/>
           <p:nvPr/>
         </p:nvSpPr>
@@ -11298,7 +11298,7 @@
       </p:sp>
       <p:sp>
         <p:nvSpPr>
-          <p:cNvPr id="1754580985" name="Text 14"/>
+          <p:cNvPr id="910412240" name="Text 14"/>
           <p:cNvSpPr/>
           <p:nvPr/>
         </p:nvSpPr>
@@ -11341,7 +11341,7 @@
       </p:sp>
       <p:sp>
         <p:nvSpPr>
-          <p:cNvPr id="563732745" name="Text 15"/>
+          <p:cNvPr id="1399007987" name="Text 15"/>
           <p:cNvSpPr/>
           <p:nvPr/>
         </p:nvSpPr>
@@ -11384,7 +11384,7 @@
       </p:sp>
       <p:sp>
         <p:nvSpPr>
-          <p:cNvPr id="1949828101" name="Text 16"/>
+          <p:cNvPr id="2107845513" name="Text 16"/>
           <p:cNvSpPr/>
           <p:nvPr/>
         </p:nvSpPr>
@@ -11427,7 +11427,7 @@
       </p:sp>
       <p:sp>
         <p:nvSpPr>
-          <p:cNvPr id="815946066" name="Text 17"/>
+          <p:cNvPr id="168274526" name="Text 17"/>
           <p:cNvSpPr/>
           <p:nvPr/>
         </p:nvSpPr>
@@ -11470,7 +11470,7 @@
       </p:sp>
       <p:sp>
         <p:nvSpPr>
-          <p:cNvPr id="34178998" name="Text 18"/>
+          <p:cNvPr id="226847780" name="Text 18"/>
           <p:cNvSpPr/>
           <p:nvPr/>
         </p:nvSpPr>
@@ -11513,7 +11513,7 @@
       </p:sp>
       <p:sp>
         <p:nvSpPr>
-          <p:cNvPr id="1371367975" name="Text 19"/>
+          <p:cNvPr id="1670481630" name="Text 19"/>
           <p:cNvSpPr/>
           <p:nvPr/>
         </p:nvSpPr>
@@ -11556,7 +11556,7 @@
       </p:sp>
       <p:sp>
         <p:nvSpPr>
-          <p:cNvPr id="1841908456" name="Text 20"/>
+          <p:cNvPr id="1645508708" name="Text 20"/>
           <p:cNvSpPr/>
           <p:nvPr/>
         </p:nvSpPr>
@@ -11599,7 +11599,7 @@
       </p:sp>
       <p:sp>
         <p:nvSpPr>
-          <p:cNvPr id="77798359" name="Text 21"/>
+          <p:cNvPr id="2041419516" name="Text 21"/>
           <p:cNvSpPr/>
           <p:nvPr/>
         </p:nvSpPr>
@@ -11642,7 +11642,7 @@
       </p:sp>
       <p:sp>
         <p:nvSpPr>
-          <p:cNvPr id="620509132" name="Text 22"/>
+          <p:cNvPr id="1355412372" name="Text 22"/>
           <p:cNvSpPr/>
           <p:nvPr/>
         </p:nvSpPr>
@@ -11685,7 +11685,7 @@
       </p:sp>
       <p:sp>
         <p:nvSpPr>
-          <p:cNvPr id="1374808667" name="Text 23"/>
+          <p:cNvPr id="265461046" name="Text 23"/>
           <p:cNvSpPr/>
           <p:nvPr/>
         </p:nvSpPr>
@@ -11728,7 +11728,7 @@
       </p:sp>
       <p:sp>
         <p:nvSpPr>
-          <p:cNvPr id="1737634786" name="Text 24"/>
+          <p:cNvPr id="977066922" name="Text 24"/>
           <p:cNvSpPr/>
           <p:nvPr/>
         </p:nvSpPr>
@@ -11771,7 +11771,7 @@
       </p:sp>
       <p:sp>
         <p:nvSpPr>
-          <p:cNvPr id="1058395984" name="Text 25"/>
+          <p:cNvPr id="1141776148" name="Text 25"/>
           <p:cNvSpPr/>
           <p:nvPr/>
         </p:nvSpPr>
@@ -11814,7 +11814,7 @@
       </p:sp>
       <p:sp>
         <p:nvSpPr>
-          <p:cNvPr id="51848945" name="Text 26"/>
+          <p:cNvPr id="1237959213" name="Text 26"/>
           <p:cNvSpPr/>
           <p:nvPr/>
         </p:nvSpPr>
@@ -11857,7 +11857,7 @@
       </p:sp>
       <p:sp>
         <p:nvSpPr>
-          <p:cNvPr id="423295524" name="Text 27"/>
+          <p:cNvPr id="1219191905" name="Text 27"/>
           <p:cNvSpPr/>
           <p:nvPr/>
         </p:nvSpPr>
@@ -11900,7 +11900,7 @@
       </p:sp>
       <p:sp>
         <p:nvSpPr>
-          <p:cNvPr id="149213731" name="Text 28"/>
+          <p:cNvPr id="1156183087" name="Text 28"/>
           <p:cNvSpPr/>
           <p:nvPr/>
         </p:nvSpPr>
@@ -11943,7 +11943,7 @@
       </p:sp>
       <p:sp>
         <p:nvSpPr>
-          <p:cNvPr id="795554207" name="Shape 31"/>
+          <p:cNvPr id="1912337243" name="Shape 31"/>
           <p:cNvSpPr/>
           <p:nvPr/>
         </p:nvSpPr>
@@ -11965,7 +11965,7 @@
       </p:sp>
       <p:sp>
         <p:nvSpPr>
-          <p:cNvPr id="587936751" name="Text 32"/>
+          <p:cNvPr id="1817841314" name="Text 32"/>
           <p:cNvSpPr/>
           <p:nvPr/>
         </p:nvSpPr>
@@ -12008,7 +12008,7 @@
       </p:sp>
       <p:sp>
         <p:nvSpPr>
-          <p:cNvPr id="1329076684" name="Text 33"/>
+          <p:cNvPr id="1615443263" name="Text 33"/>
           <p:cNvSpPr/>
           <p:nvPr/>
         </p:nvSpPr>
@@ -12051,7 +12051,7 @@
       </p:sp>
       <p:sp>
         <p:nvSpPr>
-          <p:cNvPr id="918793519" name="Shape 34"/>
+          <p:cNvPr id="186784088" name="Shape 34"/>
           <p:cNvSpPr/>
           <p:nvPr/>
         </p:nvSpPr>
@@ -12073,7 +12073,7 @@
       </p:sp>
       <p:sp>
         <p:nvSpPr>
-          <p:cNvPr id="1050698530" name="Text 35"/>
+          <p:cNvPr id="1659110069" name="Text 35"/>
           <p:cNvSpPr/>
           <p:nvPr/>
         </p:nvSpPr>
@@ -12116,7 +12116,7 @@
       </p:sp>
       <p:sp>
         <p:nvSpPr>
-          <p:cNvPr id="907339181" name="Text 36"/>
+          <p:cNvPr id="1019239314" name="Text 36"/>
           <p:cNvSpPr/>
           <p:nvPr/>
         </p:nvSpPr>
@@ -12159,7 +12159,7 @@
       </p:sp>
       <p:sp>
         <p:nvSpPr>
-          <p:cNvPr id="2030545701" name="Shape 37"/>
+          <p:cNvPr id="553997059" name="Shape 37"/>
           <p:cNvSpPr/>
           <p:nvPr/>
         </p:nvSpPr>
@@ -12181,7 +12181,7 @@
       </p:sp>
       <p:sp>
         <p:nvSpPr>
-          <p:cNvPr id="1590030980" name="Text 38"/>
+          <p:cNvPr id="2018185027" name="Text 38"/>
           <p:cNvSpPr/>
           <p:nvPr/>
         </p:nvSpPr>
@@ -12224,7 +12224,7 @@
       </p:sp>
       <p:sp>
         <p:nvSpPr>
-          <p:cNvPr id="1409295349" name="Text 39"/>
+          <p:cNvPr id="1918612957" name="Text 39"/>
           <p:cNvSpPr/>
           <p:nvPr/>
         </p:nvSpPr>
@@ -12267,7 +12267,7 @@
       </p:sp>
       <p:sp>
         <p:nvSpPr>
-          <p:cNvPr id="240205570" name=""/>
+          <p:cNvPr id="728228341" name=""/>
           <p:cNvSpPr/>
           <p:nvPr/>
         </p:nvSpPr>
@@ -12356,7 +12356,7 @@
       </p:grpSpPr>
       <p:sp>
         <p:nvSpPr>
-          <p:cNvPr id="119934420" name="Text 0"/>
+          <p:cNvPr id="218872284" name="Text 0"/>
           <p:cNvSpPr/>
           <p:nvPr/>
         </p:nvSpPr>
@@ -12399,7 +12399,7 @@
       </p:sp>
       <p:sp>
         <p:nvSpPr>
-          <p:cNvPr id="134220294" name="Text 1"/>
+          <p:cNvPr id="1993238714" name="Text 1"/>
           <p:cNvSpPr/>
           <p:nvPr/>
         </p:nvSpPr>
@@ -12453,7 +12453,7 @@
       </p:sp>
       <p:sp>
         <p:nvSpPr>
-          <p:cNvPr id="534797007" name="Shape 2"/>
+          <p:cNvPr id="1198411116" name="Shape 2"/>
           <p:cNvSpPr/>
           <p:nvPr/>
         </p:nvSpPr>
@@ -12475,7 +12475,7 @@
       </p:sp>
       <p:sp>
         <p:nvSpPr>
-          <p:cNvPr id="1519021517" name="Shape 3"/>
+          <p:cNvPr id="429592732" name="Shape 3"/>
           <p:cNvSpPr/>
           <p:nvPr/>
         </p:nvSpPr>
@@ -12497,7 +12497,7 @@
       </p:sp>
       <p:pic>
         <p:nvPicPr>
-          <p:cNvPr id="274824644" name="Image 0" descr="preencoded.png"/>
+          <p:cNvPr id="128228382" name="Image 0" descr="preencoded.png"/>
           <p:cNvPicPr>
             <a:picLocks noChangeAspect="1"/>
           </p:cNvPicPr>
@@ -12525,7 +12525,7 @@
       </p:pic>
       <p:sp>
         <p:nvSpPr>
-          <p:cNvPr id="859246945" name="Text 4"/>
+          <p:cNvPr id="1325947474" name="Text 4"/>
           <p:cNvSpPr/>
           <p:nvPr/>
         </p:nvSpPr>
@@ -12568,7 +12568,7 @@
       </p:sp>
       <p:sp>
         <p:nvSpPr>
-          <p:cNvPr id="65512887" name="Text 5"/>
+          <p:cNvPr id="552195895" name="Text 5"/>
           <p:cNvSpPr/>
           <p:nvPr/>
         </p:nvSpPr>
@@ -12658,7 +12658,7 @@
       </p:sp>
       <p:sp>
         <p:nvSpPr>
-          <p:cNvPr id="52727388" name="Shape 6"/>
+          <p:cNvPr id="662590523" name="Shape 6"/>
           <p:cNvSpPr/>
           <p:nvPr/>
         </p:nvSpPr>
@@ -12680,7 +12680,7 @@
       </p:sp>
       <p:sp>
         <p:nvSpPr>
-          <p:cNvPr id="1473485468" name="Shape 7"/>
+          <p:cNvPr id="1158575721" name="Shape 7"/>
           <p:cNvSpPr/>
           <p:nvPr/>
         </p:nvSpPr>
@@ -12702,7 +12702,7 @@
       </p:sp>
       <p:pic>
         <p:nvPicPr>
-          <p:cNvPr id="1058496482" name="Image 1" descr="preencoded.png"/>
+          <p:cNvPr id="382390047" name="Image 1" descr="preencoded.png"/>
           <p:cNvPicPr>
             <a:picLocks noChangeAspect="1"/>
           </p:cNvPicPr>
@@ -12730,7 +12730,7 @@
       </p:pic>
       <p:sp>
         <p:nvSpPr>
-          <p:cNvPr id="1956338123" name="Text 8"/>
+          <p:cNvPr id="443250673" name="Text 8"/>
           <p:cNvSpPr/>
           <p:nvPr/>
         </p:nvSpPr>
@@ -12773,7 +12773,7 @@
       </p:sp>
       <p:sp>
         <p:nvSpPr>
-          <p:cNvPr id="1818105258" name="Text 9"/>
+          <p:cNvPr id="1857073414" name="Text 9"/>
           <p:cNvSpPr/>
           <p:nvPr/>
         </p:nvSpPr>
@@ -12838,7 +12838,7 @@
       </p:sp>
       <p:sp>
         <p:nvSpPr>
-          <p:cNvPr id="1412520504" name="Shape 10"/>
+          <p:cNvPr id="1163316833" name="Shape 10"/>
           <p:cNvSpPr/>
           <p:nvPr/>
         </p:nvSpPr>
@@ -12860,7 +12860,7 @@
       </p:sp>
       <p:sp>
         <p:nvSpPr>
-          <p:cNvPr id="1761545356" name="Shape 11"/>
+          <p:cNvPr id="1861875434" name="Shape 11"/>
           <p:cNvSpPr/>
           <p:nvPr/>
         </p:nvSpPr>
@@ -12882,7 +12882,7 @@
       </p:sp>
       <p:pic>
         <p:nvPicPr>
-          <p:cNvPr id="1537599080" name="Image 2" descr="preencoded.png"/>
+          <p:cNvPr id="632253330" name="Image 2" descr="preencoded.png"/>
           <p:cNvPicPr>
             <a:picLocks noChangeAspect="1"/>
           </p:cNvPicPr>
@@ -12910,7 +12910,7 @@
       </p:pic>
       <p:sp>
         <p:nvSpPr>
-          <p:cNvPr id="586286463" name="Text 12"/>
+          <p:cNvPr id="23877980" name="Text 12"/>
           <p:cNvSpPr/>
           <p:nvPr/>
         </p:nvSpPr>
@@ -12953,7 +12953,7 @@
       </p:sp>
       <p:sp>
         <p:nvSpPr>
-          <p:cNvPr id="646334449" name="Text 13"/>
+          <p:cNvPr id="1728190354" name="Text 13"/>
           <p:cNvSpPr/>
           <p:nvPr/>
         </p:nvSpPr>
@@ -13018,7 +13018,7 @@
       </p:sp>
       <p:sp>
         <p:nvSpPr>
-          <p:cNvPr id="1544939207" name="Shape 14"/>
+          <p:cNvPr id="447689569" name="Shape 14"/>
           <p:cNvSpPr/>
           <p:nvPr/>
         </p:nvSpPr>
@@ -13040,7 +13040,7 @@
       </p:sp>
       <p:pic>
         <p:nvPicPr>
-          <p:cNvPr id="1834531574" name="Image 3" descr="preencoded.png"/>
+          <p:cNvPr id="1725056616" name="Image 3" descr="preencoded.png"/>
           <p:cNvPicPr>
             <a:picLocks noChangeAspect="1"/>
           </p:cNvPicPr>
@@ -13062,7 +13062,7 @@
       </p:pic>
       <p:sp>
         <p:nvSpPr>
-          <p:cNvPr id="1033821282" name="Text 15"/>
+          <p:cNvPr id="311977950" name="Text 15"/>
           <p:cNvSpPr/>
           <p:nvPr/>
         </p:nvSpPr>
@@ -13138,7 +13138,7 @@
       </p:sp>
       <p:sp>
         <p:nvSpPr>
-          <p:cNvPr id="1287244573" name=""/>
+          <p:cNvPr id="850786309" name=""/>
           <p:cNvSpPr/>
           <p:nvPr/>
         </p:nvSpPr>
@@ -13227,7 +13227,7 @@
       </p:grpSpPr>
       <p:sp>
         <p:nvSpPr>
-          <p:cNvPr id="1638529315" name="Text 0"/>
+          <p:cNvPr id="865776794" name="Text 0"/>
           <p:cNvSpPr/>
           <p:nvPr/>
         </p:nvSpPr>
@@ -13270,7 +13270,7 @@
       </p:sp>
       <p:sp>
         <p:nvSpPr>
-          <p:cNvPr id="56124834" name="Shape 1"/>
+          <p:cNvPr id="1444068099" name="Shape 1"/>
           <p:cNvSpPr/>
           <p:nvPr/>
         </p:nvSpPr>
@@ -13292,7 +13292,7 @@
       </p:sp>
       <p:sp>
         <p:nvSpPr>
-          <p:cNvPr id="399746091" name="Text 2"/>
+          <p:cNvPr id="1796546088" name="Text 2"/>
           <p:cNvSpPr/>
           <p:nvPr/>
         </p:nvSpPr>
@@ -13335,7 +13335,7 @@
       </p:sp>
       <p:sp>
         <p:nvSpPr>
-          <p:cNvPr id="1962097000" name="Text 3"/>
+          <p:cNvPr id="1542422468" name="Text 3"/>
           <p:cNvSpPr/>
           <p:nvPr/>
         </p:nvSpPr>
@@ -13389,7 +13389,7 @@
       </p:sp>
       <p:sp>
         <p:nvSpPr>
-          <p:cNvPr id="216557342" name="Text 4"/>
+          <p:cNvPr id="1110763785" name="Text 4"/>
           <p:cNvSpPr/>
           <p:nvPr/>
         </p:nvSpPr>
@@ -13432,7 +13432,7 @@
       </p:sp>
       <p:sp>
         <p:nvSpPr>
-          <p:cNvPr id="1640727695" name="Text 5"/>
+          <p:cNvPr id="1455200829" name="Text 5"/>
           <p:cNvSpPr/>
           <p:nvPr/>
         </p:nvSpPr>
@@ -13564,7 +13564,7 @@
       </p:sp>
       <p:sp>
         <p:nvSpPr>
-          <p:cNvPr id="20860596" name="Text 6"/>
+          <p:cNvPr id="1303916992" name="Text 6"/>
           <p:cNvSpPr/>
           <p:nvPr/>
         </p:nvSpPr>
@@ -13618,7 +13618,7 @@
       </p:sp>
       <p:sp>
         <p:nvSpPr>
-          <p:cNvPr id="1951417517" name="Text 7"/>
+          <p:cNvPr id="2090390967" name="Text 7"/>
           <p:cNvSpPr/>
           <p:nvPr/>
         </p:nvSpPr>
@@ -13661,7 +13661,7 @@
       </p:sp>
       <p:pic>
         <p:nvPicPr>
-          <p:cNvPr id="798765927" name="Image 0" descr="preencoded.png"/>
+          <p:cNvPr id="681187542" name="Image 0" descr="preencoded.png"/>
           <p:cNvPicPr>
             <a:picLocks noChangeAspect="1"/>
           </p:cNvPicPr>
@@ -13689,7 +13689,7 @@
       </p:pic>
       <p:sp>
         <p:nvSpPr>
-          <p:cNvPr id="1055910259" name="Text 8"/>
+          <p:cNvPr id="106091059" name="Text 8"/>
           <p:cNvSpPr/>
           <p:nvPr/>
         </p:nvSpPr>
@@ -13732,7 +13732,7 @@
       </p:sp>
       <p:sp>
         <p:nvSpPr>
-          <p:cNvPr id="2025587364" name="Text 9"/>
+          <p:cNvPr id="946842012" name="Text 9"/>
           <p:cNvSpPr/>
           <p:nvPr/>
         </p:nvSpPr>
@@ -13775,7 +13775,7 @@
       </p:sp>
       <p:pic>
         <p:nvPicPr>
-          <p:cNvPr id="1134419326" name="Image 1" descr="preencoded.png"/>
+          <p:cNvPr id="1800377383" name="Image 1" descr="preencoded.png"/>
           <p:cNvPicPr>
             <a:picLocks noChangeAspect="1"/>
           </p:cNvPicPr>
@@ -13803,7 +13803,7 @@
       </p:pic>
       <p:sp>
         <p:nvSpPr>
-          <p:cNvPr id="1916950620" name="Text 10"/>
+          <p:cNvPr id="630204395" name="Text 10"/>
           <p:cNvSpPr/>
           <p:nvPr/>
         </p:nvSpPr>
@@ -13846,7 +13846,7 @@
       </p:sp>
       <p:sp>
         <p:nvSpPr>
-          <p:cNvPr id="711805487" name="Text 11"/>
+          <p:cNvPr id="290424810" name="Text 11"/>
           <p:cNvSpPr/>
           <p:nvPr/>
         </p:nvSpPr>
@@ -13889,7 +13889,7 @@
       </p:sp>
       <p:pic>
         <p:nvPicPr>
-          <p:cNvPr id="1359015472" name="Image 2" descr="preencoded.png"/>
+          <p:cNvPr id="1732894981" name="Image 2" descr="preencoded.png"/>
           <p:cNvPicPr>
             <a:picLocks noChangeAspect="1"/>
           </p:cNvPicPr>
@@ -13917,7 +13917,7 @@
       </p:pic>
       <p:sp>
         <p:nvSpPr>
-          <p:cNvPr id="2056772194" name="Text 12"/>
+          <p:cNvPr id="774468859" name="Text 12"/>
           <p:cNvSpPr/>
           <p:nvPr/>
         </p:nvSpPr>
@@ -13960,7 +13960,7 @@
       </p:sp>
       <p:sp>
         <p:nvSpPr>
-          <p:cNvPr id="628871154" name="Text 13"/>
+          <p:cNvPr id="1030027838" name="Text 13"/>
           <p:cNvSpPr/>
           <p:nvPr/>
         </p:nvSpPr>
@@ -14003,7 +14003,7 @@
       </p:sp>
       <p:pic>
         <p:nvPicPr>
-          <p:cNvPr id="104669126" name="Image 3" descr="preencoded.png"/>
+          <p:cNvPr id="688685698" name="Image 3" descr="preencoded.png"/>
           <p:cNvPicPr>
             <a:picLocks noChangeAspect="1"/>
           </p:cNvPicPr>
@@ -14031,7 +14031,7 @@
       </p:pic>
       <p:sp>
         <p:nvSpPr>
-          <p:cNvPr id="1034567452" name="Text 14"/>
+          <p:cNvPr id="1394025966" name="Text 14"/>
           <p:cNvSpPr/>
           <p:nvPr/>
         </p:nvSpPr>
@@ -14074,7 +14074,7 @@
       </p:sp>
       <p:sp>
         <p:nvSpPr>
-          <p:cNvPr id="1793851034" name="Text 15"/>
+          <p:cNvPr id="705779375" name="Text 15"/>
           <p:cNvSpPr/>
           <p:nvPr/>
         </p:nvSpPr>
@@ -14117,7 +14117,7 @@
       </p:sp>
       <p:pic>
         <p:nvPicPr>
-          <p:cNvPr id="1367304867" name="Image 4" descr="preencoded.png"/>
+          <p:cNvPr id="2074093805" name="Image 4" descr="preencoded.png"/>
           <p:cNvPicPr>
             <a:picLocks noChangeAspect="1"/>
           </p:cNvPicPr>
@@ -14145,7 +14145,7 @@
       </p:pic>
       <p:sp>
         <p:nvSpPr>
-          <p:cNvPr id="260638175" name="Text 16"/>
+          <p:cNvPr id="1840888763" name="Text 16"/>
           <p:cNvSpPr/>
           <p:nvPr/>
         </p:nvSpPr>
@@ -14188,7 +14188,7 @@
       </p:sp>
       <p:sp>
         <p:nvSpPr>
-          <p:cNvPr id="1043581497" name="Text 17"/>
+          <p:cNvPr id="728233344" name="Text 17"/>
           <p:cNvSpPr/>
           <p:nvPr/>
         </p:nvSpPr>
@@ -14231,7 +14231,7 @@
       </p:sp>
       <p:sp>
         <p:nvSpPr>
-          <p:cNvPr id="86229511" name="Text 18"/>
+          <p:cNvPr id="749647355" name="Text 18"/>
           <p:cNvSpPr/>
           <p:nvPr/>
         </p:nvSpPr>
@@ -14274,7 +14274,7 @@
       </p:sp>
       <p:sp>
         <p:nvSpPr>
-          <p:cNvPr id="396296599" name="Shape 19"/>
+          <p:cNvPr id="1171697045" name="Shape 19"/>
           <p:cNvSpPr/>
           <p:nvPr/>
         </p:nvSpPr>
@@ -14294,7 +14294,7 @@
       </p:sp>
       <p:sp>
         <p:nvSpPr>
-          <p:cNvPr id="409637510" name=""/>
+          <p:cNvPr id="674160218" name=""/>
           <p:cNvSpPr/>
           <p:nvPr/>
         </p:nvSpPr>

--- a/finale.pptx
+++ b/finale.pptx
@@ -9,6 +9,7 @@
   </p:notesMasterIdLst>
   <p:sldIdLst>
     <p:sldId id="256" r:id="rId3"/>
+    <p:sldId id="266" r:id="rId17"/>
     <p:sldId id="257" r:id="rId4"/>
     <p:sldId id="258" r:id="rId5"/>
     <p:sldId id="259" r:id="rId6"/>
@@ -1253,7 +1254,7 @@
   <p:cSld name="DEFAULT">
     <p:bg>
       <p:bgRef idx="1001">
-        <a:schemeClr val="bg1"/>
+        <a:srgbClr val="14142E"/>
       </p:bgRef>
     </p:bg>
     <p:spTree>
@@ -1284,7 +1285,7 @@
     <p:bg>
       <p:bgPr shadeToTitle="0">
         <a:solidFill>
-          <a:srgbClr val="000000"/>
+          <a:srgbClr val="0B0B14"/>
         </a:solidFill>
       </p:bgPr>
     </p:bg>
@@ -1317,7 +1318,7 @@
             <a:avLst/>
           </a:prstGeom>
           <a:solidFill>
-            <a:srgbClr val="F4F0FF"/>
+            <a:srgbClr val="0B0B14"/>
           </a:solidFill>
           <a:ln/>
         </p:spPr>
@@ -1337,7 +1338,7 @@
             <a:avLst/>
           </a:prstGeom>
           <a:solidFill>
-            <a:srgbClr val="FBFAFF"/>
+            <a:srgbClr val="14142E"/>
           </a:solidFill>
           <a:ln/>
         </p:spPr>
@@ -1380,7 +1381,7 @@
     <p:bg>
       <p:bgPr shadeToTitle="0">
         <a:solidFill>
-          <a:srgbClr val="000000"/>
+          <a:srgbClr val="0B0B14"/>
         </a:solidFill>
       </p:bgPr>
     </p:bg>
@@ -1413,7 +1414,7 @@
             <a:avLst/>
           </a:prstGeom>
           <a:solidFill>
-            <a:srgbClr val="F4F0FF"/>
+            <a:srgbClr val="0B0B14"/>
           </a:solidFill>
           <a:ln/>
         </p:spPr>
@@ -1433,7 +1434,7 @@
             <a:avLst/>
           </a:prstGeom>
           <a:solidFill>
-            <a:srgbClr val="FBFAFF"/>
+            <a:srgbClr val="14142E"/>
           </a:solidFill>
           <a:ln/>
         </p:spPr>
@@ -1476,7 +1477,7 @@
     <p:bg>
       <p:bgPr shadeToTitle="0">
         <a:solidFill>
-          <a:srgbClr val="000000"/>
+          <a:srgbClr val="0B0B14"/>
         </a:solidFill>
       </p:bgPr>
     </p:bg>
@@ -1509,7 +1510,7 @@
             <a:avLst/>
           </a:prstGeom>
           <a:solidFill>
-            <a:srgbClr val="F4F0FF"/>
+            <a:srgbClr val="0B0B14"/>
           </a:solidFill>
           <a:ln/>
         </p:spPr>
@@ -1529,7 +1530,7 @@
             <a:avLst/>
           </a:prstGeom>
           <a:solidFill>
-            <a:srgbClr val="FBFAFF"/>
+            <a:srgbClr val="14142E"/>
           </a:solidFill>
           <a:ln/>
         </p:spPr>
@@ -1572,7 +1573,7 @@
     <p:bg>
       <p:bgPr shadeToTitle="0">
         <a:solidFill>
-          <a:srgbClr val="000000"/>
+          <a:srgbClr val="0B0B14"/>
         </a:solidFill>
       </p:bgPr>
     </p:bg>
@@ -1605,7 +1606,7 @@
             <a:avLst/>
           </a:prstGeom>
           <a:solidFill>
-            <a:srgbClr val="F4F0FF"/>
+            <a:srgbClr val="0B0B14"/>
           </a:solidFill>
           <a:ln/>
         </p:spPr>
@@ -1625,7 +1626,7 @@
             <a:avLst/>
           </a:prstGeom>
           <a:solidFill>
-            <a:srgbClr val="FBFAFF"/>
+            <a:srgbClr val="14142E"/>
           </a:solidFill>
           <a:ln/>
         </p:spPr>
@@ -1668,7 +1669,7 @@
     <p:bg>
       <p:bgPr shadeToTitle="0">
         <a:solidFill>
-          <a:srgbClr val="000000"/>
+          <a:srgbClr val="0B0B14"/>
         </a:solidFill>
       </p:bgPr>
     </p:bg>
@@ -1701,7 +1702,7 @@
             <a:avLst/>
           </a:prstGeom>
           <a:solidFill>
-            <a:srgbClr val="F4F0FF"/>
+            <a:srgbClr val="0B0B14"/>
           </a:solidFill>
           <a:ln/>
         </p:spPr>
@@ -1721,7 +1722,7 @@
             <a:avLst/>
           </a:prstGeom>
           <a:solidFill>
-            <a:srgbClr val="FBFAFF"/>
+            <a:srgbClr val="14142E"/>
           </a:solidFill>
           <a:ln/>
         </p:spPr>
@@ -1764,7 +1765,7 @@
     <p:bg>
       <p:bgPr shadeToTitle="0">
         <a:solidFill>
-          <a:srgbClr val="000000"/>
+          <a:srgbClr val="0B0B14"/>
         </a:solidFill>
       </p:bgPr>
     </p:bg>
@@ -1797,7 +1798,7 @@
             <a:avLst/>
           </a:prstGeom>
           <a:solidFill>
-            <a:srgbClr val="F4F0FF"/>
+            <a:srgbClr val="0B0B14"/>
           </a:solidFill>
           <a:ln/>
         </p:spPr>
@@ -1817,7 +1818,7 @@
             <a:avLst/>
           </a:prstGeom>
           <a:solidFill>
-            <a:srgbClr val="FBFAFF"/>
+            <a:srgbClr val="14142E"/>
           </a:solidFill>
           <a:ln/>
         </p:spPr>
@@ -1860,7 +1861,7 @@
     <p:bg>
       <p:bgPr shadeToTitle="0">
         <a:solidFill>
-          <a:srgbClr val="000000"/>
+          <a:srgbClr val="0B0B14"/>
         </a:solidFill>
       </p:bgPr>
     </p:bg>
@@ -1893,7 +1894,7 @@
             <a:avLst/>
           </a:prstGeom>
           <a:solidFill>
-            <a:srgbClr val="F4F0FF"/>
+            <a:srgbClr val="0B0B14"/>
           </a:solidFill>
           <a:ln/>
         </p:spPr>
@@ -1913,7 +1914,7 @@
             <a:avLst/>
           </a:prstGeom>
           <a:solidFill>
-            <a:srgbClr val="FBFAFF"/>
+            <a:srgbClr val="14142E"/>
           </a:solidFill>
           <a:ln/>
         </p:spPr>
@@ -2304,7 +2305,7 @@
             <a:r>
               <a:rPr lang="en-US" sz="5200" b="1">
                 <a:solidFill>
-                  <a:srgbClr val="403CCF"/>
+                  <a:srgbClr val="9A93F5"/>
                 </a:solidFill>
                 <a:latin typeface="Libre Baskerville"/>
                 <a:ea typeface="Libre Baskerville"/>
@@ -2333,7 +2334,7 @@
             </a:avLst>
           </a:prstGeom>
           <a:solidFill>
-            <a:srgbClr val="D7D6F5"/>
+            <a:srgbClr val="23213C"/>
           </a:solidFill>
           <a:ln/>
         </p:spPr>
@@ -2397,7 +2398,7 @@
             <a:r>
               <a:rPr lang="en-US" sz="1500">
                 <a:solidFill>
-                  <a:srgbClr val="49495A"/>
+                  <a:srgbClr val="C4B8F5"/>
                 </a:solidFill>
                 <a:latin typeface="Open Sans"/>
                 <a:ea typeface="Open Sans"/>
@@ -2440,7 +2441,7 @@
             <a:r>
               <a:rPr lang="en-US" sz="2200">
                 <a:solidFill>
-                  <a:srgbClr val="5955EB"/>
+                  <a:srgbClr val="ADA8F9"/>
                 </a:solidFill>
                 <a:latin typeface="Libre Baskerville"/>
                 <a:ea typeface="Libre Baskerville"/>
@@ -2451,7 +2452,7 @@
             <a:r>
               <a:rPr lang="en-US" sz="2200">
                 <a:solidFill>
-                  <a:srgbClr val="403CCF"/>
+                  <a:srgbClr val="9A93F5"/>
                 </a:solidFill>
                 <a:latin typeface="Libre Baskerville"/>
                 <a:ea typeface="Libre Baskerville"/>
@@ -2494,7 +2495,7 @@
             <a:r>
               <a:rPr lang="en-US" sz="1750">
                 <a:solidFill>
-                  <a:srgbClr val="49495A"/>
+                  <a:srgbClr val="C4B8F5"/>
                 </a:solidFill>
                 <a:latin typeface="Open Sans"/>
                 <a:ea typeface="Open Sans"/>
@@ -2505,7 +2506,7 @@
             <a:r>
               <a:rPr lang="en-US" sz="1750" b="1">
                 <a:solidFill>
-                  <a:srgbClr val="49495A"/>
+                  <a:srgbClr val="C4B8F5"/>
                 </a:solidFill>
                 <a:latin typeface="Open Sans"/>
                 <a:ea typeface="Open Sans"/>
@@ -2516,7 +2517,7 @@
             <a:r>
               <a:rPr lang="en-US" sz="1750">
                 <a:solidFill>
-                  <a:srgbClr val="49495A"/>
+                  <a:srgbClr val="C4B8F5"/>
                 </a:solidFill>
                 <a:latin typeface="Open Sans"/>
                 <a:ea typeface="Open Sans"/>
@@ -2527,7 +2528,7 @@
             <a:r>
               <a:rPr lang="en-US" sz="1750" b="1">
                 <a:solidFill>
-                  <a:srgbClr val="49495A"/>
+                  <a:srgbClr val="C4B8F5"/>
                 </a:solidFill>
                 <a:latin typeface="Open Sans"/>
                 <a:ea typeface="Open Sans"/>
@@ -2538,7 +2539,7 @@
             <a:r>
               <a:rPr lang="en-US" sz="1750">
                 <a:solidFill>
-                  <a:srgbClr val="49495A"/>
+                  <a:srgbClr val="C4B8F5"/>
                 </a:solidFill>
                 <a:latin typeface="Open Sans"/>
                 <a:ea typeface="Open Sans"/>
@@ -2549,7 +2550,7 @@
             <a:r>
               <a:rPr lang="en-US" sz="1750" b="1">
                 <a:solidFill>
-                  <a:srgbClr val="49495A"/>
+                  <a:srgbClr val="C4B8F5"/>
                 </a:solidFill>
                 <a:latin typeface="Open Sans"/>
                 <a:ea typeface="Open Sans"/>
@@ -2558,39 +2559,6 @@
               <a:t>Cristian Marino</a:t>
             </a:r>
             <a:endParaRPr lang="en-US" sz="1750"/>
-          </a:p>
-          <a:p>
-            <a:pPr marL="0" indent="0" algn="l">
-              <a:lnSpc>
-                <a:spcPts val="2850"/>
-              </a:lnSpc>
-              <a:buNone/>
-              <a:defRPr/>
-            </a:pPr>
-            <a:r>
-              <a:rPr lang="en-US" sz="1500">
-                <a:solidFill>
-                  <a:srgbClr val="49495A"/>
-                </a:solidFill>
-                <a:latin typeface="Open Sans"/>
-                <a:ea typeface="Open Sans"/>
-                <a:cs typeface="Open Sans"/>
-              </a:rPr>
-              <a:t>🔗 </a:t>
-            </a:r>
-            <a:r>
-              <a:rPr lang="en-US" sz="1500" u="sng">
-                <a:solidFill>
-                  <a:srgbClr val="4F46E5"/>
-                </a:solidFill>
-                <a:latin typeface="Open Sans"/>
-                <a:ea typeface="Open Sans"/>
-                <a:cs typeface="Open Sans"/>
-                <a:hlinkClick r:id="rId6" tooltip=""/>
-              </a:rPr>
-              <a:t>mini-cozy-room.netlify.app</a:t>
-            </a:r>
-            <a:endParaRPr lang="en-US" sz="1500"/>
           </a:p>
         </p:txBody>
       </p:sp>
@@ -2609,7 +2577,7 @@
             <a:avLst/>
           </a:prstGeom>
           <a:solidFill>
-            <a:schemeClr val="bg1"/>
+            <a:srgbClr val="14142E"/>
           </a:solidFill>
           <a:ln w="12700" cap="flat" cmpd="sng" algn="ctr">
             <a:noFill/>
@@ -2714,7 +2682,7 @@
             <a:r>
               <a:rPr lang="en-US" sz="5000" b="1" u="sng">
                 <a:solidFill>
-                  <a:srgbClr val="403CCF"/>
+                  <a:srgbClr val="9A93F5"/>
                 </a:solidFill>
                 <a:latin typeface="Libre Baskerville"/>
                 <a:ea typeface="Libre Baskerville"/>
@@ -2775,11 +2743,11 @@
             </a:avLst>
           </a:prstGeom>
           <a:solidFill>
-            <a:srgbClr val="FBFAFF"/>
+            <a:srgbClr val="14142E"/>
           </a:solidFill>
           <a:ln w="22860">
             <a:solidFill>
-              <a:srgbClr val="D0CED9"/>
+              <a:srgbClr val="1A1A2E"/>
             </a:solidFill>
             <a:prstDash val="solid"/>
           </a:ln>
@@ -2860,7 +2828,7 @@
             <a:r>
               <a:rPr lang="en-US" sz="2200">
                 <a:solidFill>
-                  <a:srgbClr val="49495A"/>
+                  <a:srgbClr val="C4B8F5"/>
                 </a:solidFill>
                 <a:latin typeface="FreeSerif"/>
                 <a:ea typeface="FreeSerif"/>
@@ -2906,7 +2874,7 @@
             <a:r>
               <a:rPr lang="en-US" sz="1400">
                 <a:solidFill>
-                  <a:srgbClr val="49495A"/>
+                  <a:srgbClr val="C4B8F5"/>
                 </a:solidFill>
                 <a:latin typeface="Open Sans"/>
                 <a:ea typeface="Open Sans"/>
@@ -2935,11 +2903,11 @@
             </a:avLst>
           </a:prstGeom>
           <a:solidFill>
-            <a:srgbClr val="FBFAFF"/>
+            <a:srgbClr val="14142E"/>
           </a:solidFill>
           <a:ln w="22860">
             <a:solidFill>
-              <a:srgbClr val="D0CED9"/>
+              <a:srgbClr val="1A1A2E"/>
             </a:solidFill>
             <a:prstDash val="solid"/>
           </a:ln>
@@ -3020,7 +2988,7 @@
             <a:r>
               <a:rPr lang="en-US" sz="2200">
                 <a:solidFill>
-                  <a:srgbClr val="49495A"/>
+                  <a:srgbClr val="C4B8F5"/>
                 </a:solidFill>
                 <a:latin typeface="FreeSerif"/>
                 <a:ea typeface="FreeSerif"/>
@@ -3066,7 +3034,7 @@
             <a:r>
               <a:rPr lang="en-US" sz="1400">
                 <a:solidFill>
-                  <a:srgbClr val="49495A"/>
+                  <a:srgbClr val="C4B8F5"/>
                 </a:solidFill>
                 <a:latin typeface="Open Sans"/>
                 <a:ea typeface="Open Sans"/>
@@ -3095,11 +3063,11 @@
             </a:avLst>
           </a:prstGeom>
           <a:solidFill>
-            <a:srgbClr val="FBFAFF"/>
+            <a:srgbClr val="14142E"/>
           </a:solidFill>
           <a:ln w="22860">
             <a:solidFill>
-              <a:srgbClr val="D0CED9"/>
+              <a:srgbClr val="1A1A2E"/>
             </a:solidFill>
             <a:prstDash val="solid"/>
           </a:ln>
@@ -3180,7 +3148,7 @@
             <a:r>
               <a:rPr lang="en-US" sz="2200">
                 <a:solidFill>
-                  <a:srgbClr val="49495A"/>
+                  <a:srgbClr val="C4B8F5"/>
                 </a:solidFill>
                 <a:latin typeface="FreeSerif"/>
                 <a:ea typeface="FreeSerif"/>
@@ -3226,7 +3194,7 @@
             <a:r>
               <a:rPr lang="en-US" sz="1400">
                 <a:solidFill>
-                  <a:srgbClr val="49495A"/>
+                  <a:srgbClr val="C4B8F5"/>
                 </a:solidFill>
                 <a:latin typeface="Open Sans"/>
                 <a:ea typeface="Open Sans"/>
@@ -3269,7 +3237,7 @@
             <a:r>
               <a:rPr lang="en-US" sz="2000" i="1">
                 <a:solidFill>
-                  <a:srgbClr val="49495A"/>
+                  <a:srgbClr val="C4B8F5"/>
                 </a:solidFill>
                 <a:latin typeface="Open Sans"/>
                 <a:ea typeface="Open Sans"/>
@@ -3280,7 +3248,7 @@
             <a:r>
               <a:rPr lang="en-US" sz="2000" b="1">
                 <a:solidFill>
-                  <a:srgbClr val="49495A"/>
+                  <a:srgbClr val="C4B8F5"/>
                 </a:solidFill>
                 <a:latin typeface="Open Sans"/>
                 <a:ea typeface="Open Sans"/>
@@ -3307,7 +3275,7 @@
             <a:avLst/>
           </a:prstGeom>
           <a:solidFill>
-            <a:srgbClr val="403CCF"/>
+            <a:srgbClr val="5A52DC"/>
           </a:solidFill>
           <a:ln/>
         </p:spPr>
@@ -3343,7 +3311,7 @@
             <a:r>
               <a:rPr lang="en-US" sz="4300">
                 <a:solidFill>
-                  <a:srgbClr val="49495A"/>
+                  <a:srgbClr val="C4B8F5"/>
                 </a:solidFill>
                 <a:latin typeface="Libre Baskerville"/>
                 <a:ea typeface="Libre Baskerville"/>
@@ -3386,7 +3354,7 @@
             <a:r>
               <a:rPr lang="en-US" sz="1900">
                 <a:solidFill>
-                  <a:srgbClr val="49495A"/>
+                  <a:srgbClr val="C4B8F5"/>
                 </a:solidFill>
                 <a:latin typeface="Libre Baskerville"/>
                 <a:ea typeface="Libre Baskerville"/>
@@ -3429,7 +3397,7 @@
             <a:r>
               <a:rPr lang="en-US" sz="1550">
                 <a:solidFill>
-                  <a:srgbClr val="49495A"/>
+                  <a:srgbClr val="C4B8F5"/>
                 </a:solidFill>
                 <a:latin typeface="Open Sans"/>
                 <a:ea typeface="Open Sans"/>
@@ -3472,7 +3440,7 @@
             <a:r>
               <a:rPr lang="en-US" sz="4300">
                 <a:solidFill>
-                  <a:srgbClr val="49495A"/>
+                  <a:srgbClr val="C4B8F5"/>
                 </a:solidFill>
                 <a:latin typeface="Libre Baskerville"/>
                 <a:ea typeface="Libre Baskerville"/>
@@ -3515,7 +3483,7 @@
             <a:r>
               <a:rPr lang="en-US" sz="1900">
                 <a:solidFill>
-                  <a:srgbClr val="49495A"/>
+                  <a:srgbClr val="C4B8F5"/>
                 </a:solidFill>
                 <a:latin typeface="Libre Baskerville"/>
                 <a:ea typeface="Libre Baskerville"/>
@@ -3558,7 +3526,7 @@
             <a:r>
               <a:rPr lang="en-US" sz="1550">
                 <a:solidFill>
-                  <a:srgbClr val="49495A"/>
+                  <a:srgbClr val="C4B8F5"/>
                 </a:solidFill>
                 <a:latin typeface="Open Sans"/>
                 <a:ea typeface="Open Sans"/>
@@ -3601,7 +3569,7 @@
             <a:r>
               <a:rPr lang="en-US" sz="4300">
                 <a:solidFill>
-                  <a:srgbClr val="49495A"/>
+                  <a:srgbClr val="C4B8F5"/>
                 </a:solidFill>
                 <a:latin typeface="Libre Baskerville"/>
                 <a:ea typeface="Libre Baskerville"/>
@@ -3644,7 +3612,7 @@
             <a:r>
               <a:rPr lang="en-US" sz="1900">
                 <a:solidFill>
-                  <a:srgbClr val="49495A"/>
+                  <a:srgbClr val="C4B8F5"/>
                 </a:solidFill>
                 <a:latin typeface="Libre Baskerville"/>
                 <a:ea typeface="Libre Baskerville"/>
@@ -3687,7 +3655,7 @@
             <a:r>
               <a:rPr lang="en-US" sz="1550">
                 <a:solidFill>
-                  <a:srgbClr val="49495A"/>
+                  <a:srgbClr val="C4B8F5"/>
                 </a:solidFill>
                 <a:latin typeface="Open Sans"/>
                 <a:ea typeface="Open Sans"/>
@@ -3730,7 +3698,7 @@
             <a:r>
               <a:rPr lang="en-US" sz="4300">
                 <a:solidFill>
-                  <a:srgbClr val="49495A"/>
+                  <a:srgbClr val="C4B8F5"/>
                 </a:solidFill>
                 <a:latin typeface="Libre Baskerville"/>
                 <a:ea typeface="Libre Baskerville"/>
@@ -3773,7 +3741,7 @@
             <a:r>
               <a:rPr lang="en-US" sz="1900">
                 <a:solidFill>
-                  <a:srgbClr val="49495A"/>
+                  <a:srgbClr val="C4B8F5"/>
                 </a:solidFill>
                 <a:latin typeface="Libre Baskerville"/>
                 <a:ea typeface="Libre Baskerville"/>
@@ -3816,7 +3784,7 @@
             <a:r>
               <a:rPr lang="en-US" sz="1550">
                 <a:solidFill>
-                  <a:srgbClr val="49495A"/>
+                  <a:srgbClr val="C4B8F5"/>
                 </a:solidFill>
                 <a:latin typeface="Open Sans"/>
                 <a:ea typeface="Open Sans"/>
@@ -3859,7 +3827,7 @@
             <a:r>
               <a:rPr lang="en-US" sz="1400" i="1">
                 <a:solidFill>
-                  <a:srgbClr val="49495A"/>
+                  <a:srgbClr val="C4B8F5"/>
                 </a:solidFill>
                 <a:latin typeface="Open Sans"/>
                 <a:ea typeface="Open Sans"/>
@@ -3886,7 +3854,7 @@
             <a:avLst/>
           </a:prstGeom>
           <a:solidFill>
-            <a:schemeClr val="bg1"/>
+            <a:srgbClr val="14142E"/>
           </a:solidFill>
           <a:ln w="12700" cap="flat" cmpd="sng" algn="ctr">
             <a:noFill/>
@@ -3927,6 +3895,32 @@
           </a:p>
         </p:txBody>
       </p:sp>
+      <p:pic>
+        <p:nvPicPr>
+          <p:cNvPr id="4242000001" name="QR Code Relax Room">
+            <a:hlinkClick xmlns:r="http://schemas.openxmlformats.org/officeDocument/2006/relationships" r:id="rId6" tooltip=""/>
+          </p:cNvPr>
+          <p:cNvPicPr>
+            <a:picLocks noChangeAspect="1"/>
+          </p:cNvPicPr>
+          <p:nvPr/>
+        </p:nvPicPr>
+        <p:blipFill rotWithShape="1">
+          <a:blip xmlns:r="http://schemas.openxmlformats.org/officeDocument/2006/relationships" r:embed="rId5"/>
+          <a:stretch>
+            <a:fillRect/>
+          </a:stretch>
+        </p:blipFill>
+        <p:spPr bwMode="auto">
+          <a:xfrm>
+            <a:off x="6515200" y="4550000"/>
+            <a:ext cx="1600000" cy="1600000"/>
+          </a:xfrm>
+          <a:prstGeom prst="rect">
+            <a:avLst/>
+          </a:prstGeom>
+        </p:spPr>
+      </p:pic>
     </p:spTree>
   </p:cSld>
   <p:clrMapOvr>
@@ -3940,6 +3934,371 @@
       <p:transition advClick="1"/>
     </mc:Fallback>
   </mc:AlternateContent>
+</p:sld>
+</file>
+
+<file path=ppt/slides/slide11.xml><?xml version="1.0" encoding="utf-8"?>
+<p:sld xmlns:a="http://schemas.openxmlformats.org/drawingml/2006/main" xmlns:r="http://schemas.openxmlformats.org/officeDocument/2006/relationships" xmlns:p="http://schemas.openxmlformats.org/presentationml/2006/main" xmlns:mc="http://schemas.openxmlformats.org/markup-compatibility/2006" showMasterPhAnim="0" showMasterSp="1" show="1">
+  <p:cSld name="Perché e Per Chi">
+    <p:spTree>
+      <p:nvGrpSpPr>
+        <p:cNvPr id="1" name=""/>
+        <p:cNvGrpSpPr/>
+        <p:nvPr/>
+      </p:nvGrpSpPr>
+      <p:grpSpPr bwMode="auto">
+        <a:xfrm>
+          <a:off x="0" y="0"/>
+          <a:ext cx="0" cy="0"/>
+          <a:chOff x="0" y="0"/>
+          <a:chExt cx="0" cy="0"/>
+        </a:xfrm>
+      </p:grpSpPr>
+      <p:sp>
+        <p:nvSpPr>
+          <p:cNvPr id="1001" name="Title"/>
+          <p:cNvSpPr/>
+          <p:nvPr/>
+        </p:nvSpPr>
+        <p:spPr bwMode="auto">
+          <a:xfrm>
+            <a:off x="731520" y="457200"/>
+            <a:ext cx="13167360" cy="822960"/>
+          </a:xfrm>
+          <a:prstGeom prst="rect">
+            <a:avLst/>
+          </a:prstGeom>
+          <a:noFill/>
+          <a:ln/>
+        </p:spPr>
+        <p:txBody>
+          <a:bodyPr wrap="square" lIns="0" tIns="0" rIns="0" bIns="0" rtlCol="0" anchor="ctr"/>
+          <a:lstStyle/>
+          <a:p>
+            <a:pPr marL="0" indent="0" algn="l">
+              <a:buNone/>
+              <a:defRPr/>
+            </a:pPr>
+            <a:r>
+              <a:rPr lang="it-IT" sz="4200" b="1">
+                <a:solidFill>
+                  <a:srgbClr val="9A93F5"/>
+                </a:solidFill>
+                <a:latin typeface="Open Sans"/>
+                <a:ea typeface="Open Sans"/>
+                <a:cs typeface="Open Sans"/>
+              </a:rPr>
+              <a:t>Perché &amp; Per Chi</a:t>
+            </a:r>
+            <a:endParaRPr lang="it-IT"/>
+          </a:p>
+        </p:txBody>
+      </p:sp>
+      <p:sp>
+        <p:nvSpPr>
+          <p:cNvPr id="1100" name="Perché Card"/>
+          <p:cNvSpPr/>
+          <p:nvPr/>
+        </p:nvSpPr>
+        <p:spPr bwMode="auto">
+          <a:xfrm>
+            <a:off x="731520" y="1700000"/>
+            <a:ext cx="6483680" cy="5500000"/>
+          </a:xfrm>
+          <a:prstGeom prst="roundRect">
+            <a:avLst>
+              <a:gd name="adj" fmla="val 6000"/>
+            </a:avLst>
+          </a:prstGeom>
+          <a:solidFill>
+            <a:srgbClr val="23213C"/>
+          </a:solidFill>
+          <a:ln w="9525">
+            <a:solidFill>
+              <a:srgbClr val="33325A"/>
+            </a:solidFill>
+          </a:ln>
+        </p:spPr>
+      </p:sp>
+      <p:sp>
+        <p:nvSpPr>
+          <p:cNvPr id="1101" name="Perché Card Stripe"/>
+          <p:cNvSpPr/>
+          <p:nvPr/>
+        </p:nvSpPr>
+        <p:spPr bwMode="auto">
+          <a:xfrm>
+            <a:off x="911520" y="2060000"/>
+            <a:ext cx="60000" cy="4780000"/>
+          </a:xfrm>
+          <a:prstGeom prst="rect">
+            <a:avLst/>
+          </a:prstGeom>
+          <a:solidFill>
+            <a:srgbClr val="9A93F5"/>
+          </a:solidFill>
+          <a:ln>
+            <a:noFill/>
+          </a:ln>
+        </p:spPr>
+      </p:sp>
+      <p:sp>
+        <p:nvSpPr>
+          <p:cNvPr id="1110" name="Perché Label"/>
+          <p:cNvSpPr/>
+          <p:nvPr/>
+        </p:nvSpPr>
+        <p:spPr bwMode="auto">
+          <a:xfrm>
+            <a:off x="1161520" y="2120000"/>
+            <a:ext cx="4000000" cy="450000"/>
+          </a:xfrm>
+          <a:prstGeom prst="rect">
+            <a:avLst/>
+          </a:prstGeom>
+          <a:noFill/>
+          <a:ln/>
+        </p:spPr>
+        <p:txBody>
+          <a:bodyPr wrap="square" lIns="0" tIns="0" rIns="0" bIns="0" rtlCol="0" anchor="t"/>
+          <a:lstStyle/>
+          <a:p>
+            <a:pPr marL="0" indent="0" algn="l">
+              <a:buNone/>
+              <a:defRPr/>
+            </a:pPr>
+            <a:r>
+              <a:rPr lang="it-IT" sz="1600" b="1" spc="300">
+                <a:solidFill>
+                  <a:srgbClr val="A7A0F8"/>
+                </a:solidFill>
+                <a:latin typeface="Open Sans"/>
+                <a:ea typeface="Open Sans"/>
+                <a:cs typeface="Open Sans"/>
+              </a:rPr>
+              <a:t>PERCHÉ</a:t>
+            </a:r>
+            <a:endParaRPr lang="it-IT"/>
+          </a:p>
+        </p:txBody>
+      </p:sp>
+      <p:sp>
+        <p:nvSpPr>
+          <p:cNvPr id="1111" name="Perché Quote"/>
+          <p:cNvSpPr/>
+          <p:nvPr/>
+        </p:nvSpPr>
+        <p:spPr bwMode="auto">
+          <a:xfrm>
+            <a:off x="1161520" y="2800000"/>
+            <a:ext cx="5623680" cy="4000000"/>
+          </a:xfrm>
+          <a:prstGeom prst="rect">
+            <a:avLst/>
+          </a:prstGeom>
+          <a:noFill/>
+          <a:ln/>
+        </p:spPr>
+        <p:txBody>
+          <a:bodyPr wrap="square" lIns="0" tIns="0" rIns="0" bIns="0" rtlCol="0" anchor="t"/>
+          <a:lstStyle/>
+          <a:p>
+            <a:pPr marL="0" indent="0" algn="l">
+              <a:buNone/>
+              <a:defRPr/>
+            </a:pPr>
+            <a:r>
+              <a:rPr lang="it-IT" sz="4400" b="1">
+                <a:solidFill>
+                  <a:srgbClr val="9A93F5"/>
+                </a:solidFill>
+                <a:latin typeface="Libre Baskerville"/>
+                <a:ea typeface="Libre Baskerville"/>
+                <a:cs typeface="Libre Baskerville"/>
+              </a:rPr>
+              <a:t>« </a:t>
+            </a:r>
+            <a:r>
+              <a:rPr lang="it-IT" sz="2800" i="1">
+                <a:solidFill>
+                  <a:srgbClr val="F2EEFF"/>
+                </a:solidFill>
+                <a:latin typeface="Libre Baskerville"/>
+                <a:ea typeface="Libre Baskerville"/>
+                <a:cs typeface="Libre Baskerville"/>
+              </a:rPr>
+              <a:t>In un mondo che corre, abbiamo costruito un angolo dove fermarsi.</a:t>
+            </a:r>
+            <a:r>
+              <a:rPr lang="it-IT" sz="4400" b="1">
+                <a:solidFill>
+                  <a:srgbClr val="9A93F5"/>
+                </a:solidFill>
+                <a:latin typeface="Libre Baskerville"/>
+                <a:ea typeface="Libre Baskerville"/>
+                <a:cs typeface="Libre Baskerville"/>
+              </a:rPr>
+              <a:t> »</a:t>
+            </a:r>
+            <a:endParaRPr lang="it-IT"/>
+          </a:p>
+        </p:txBody>
+      </p:sp>
+      <p:sp>
+        <p:nvSpPr>
+          <p:cNvPr id="1200" name="Per Chi Card"/>
+          <p:cNvSpPr/>
+          <p:nvPr/>
+        </p:nvSpPr>
+        <p:spPr bwMode="auto">
+          <a:xfrm>
+            <a:off x="7415200" y="1700000"/>
+            <a:ext cx="6483680" cy="5500000"/>
+          </a:xfrm>
+          <a:prstGeom prst="roundRect">
+            <a:avLst>
+              <a:gd name="adj" fmla="val 6000"/>
+            </a:avLst>
+          </a:prstGeom>
+          <a:solidFill>
+            <a:srgbClr val="23213C"/>
+          </a:solidFill>
+          <a:ln w="9525">
+            <a:solidFill>
+              <a:srgbClr val="33325A"/>
+            </a:solidFill>
+          </a:ln>
+        </p:spPr>
+      </p:sp>
+      <p:sp>
+        <p:nvSpPr>
+          <p:cNvPr id="1201" name="Per Chi Card Stripe"/>
+          <p:cNvSpPr/>
+          <p:nvPr/>
+        </p:nvSpPr>
+        <p:spPr bwMode="auto">
+          <a:xfrm>
+            <a:off x="7595200" y="2060000"/>
+            <a:ext cx="60000" cy="4780000"/>
+          </a:xfrm>
+          <a:prstGeom prst="rect">
+            <a:avLst/>
+          </a:prstGeom>
+          <a:solidFill>
+            <a:srgbClr val="FF6B6B"/>
+          </a:solidFill>
+          <a:ln>
+            <a:noFill/>
+          </a:ln>
+        </p:spPr>
+      </p:sp>
+      <p:sp>
+        <p:nvSpPr>
+          <p:cNvPr id="1210" name="Per Chi Label"/>
+          <p:cNvSpPr/>
+          <p:nvPr/>
+        </p:nvSpPr>
+        <p:spPr bwMode="auto">
+          <a:xfrm>
+            <a:off x="7845200" y="2120000"/>
+            <a:ext cx="4000000" cy="450000"/>
+          </a:xfrm>
+          <a:prstGeom prst="rect">
+            <a:avLst/>
+          </a:prstGeom>
+          <a:noFill/>
+          <a:ln/>
+        </p:spPr>
+        <p:txBody>
+          <a:bodyPr wrap="square" lIns="0" tIns="0" rIns="0" bIns="0" rtlCol="0" anchor="t"/>
+          <a:lstStyle/>
+          <a:p>
+            <a:pPr marL="0" indent="0" algn="l">
+              <a:buNone/>
+              <a:defRPr/>
+            </a:pPr>
+            <a:r>
+              <a:rPr lang="it-IT" sz="1600" b="1" spc="300">
+                <a:solidFill>
+                  <a:srgbClr val="FF9B9B"/>
+                </a:solidFill>
+                <a:latin typeface="Open Sans"/>
+                <a:ea typeface="Open Sans"/>
+                <a:cs typeface="Open Sans"/>
+              </a:rPr>
+              <a:t>PER CHI</a:t>
+            </a:r>
+            <a:endParaRPr lang="it-IT"/>
+          </a:p>
+        </p:txBody>
+      </p:sp>
+      <p:sp>
+        <p:nvSpPr>
+          <p:cNvPr id="1211" name="Per Chi Text"/>
+          <p:cNvSpPr/>
+          <p:nvPr/>
+        </p:nvSpPr>
+        <p:spPr bwMode="auto">
+          <a:xfrm>
+            <a:off x="7845200" y="2800000"/>
+            <a:ext cx="5623680" cy="4000000"/>
+          </a:xfrm>
+          <a:prstGeom prst="rect">
+            <a:avLst/>
+          </a:prstGeom>
+          <a:noFill/>
+          <a:ln/>
+        </p:spPr>
+        <p:txBody>
+          <a:bodyPr wrap="square" lIns="0" tIns="0" rIns="0" bIns="0" rtlCol="0" anchor="t"/>
+          <a:lstStyle/>
+          <a:p>
+            <a:pPr marL="0" indent="0" algn="l">
+              <a:buNone/>
+              <a:defRPr/>
+            </a:pPr>
+            <a:r>
+              <a:rPr lang="it-IT" sz="2800">
+                <a:solidFill>
+                  <a:srgbClr val="F2EEFF"/>
+                </a:solidFill>
+                <a:latin typeface="Open Sans"/>
+                <a:ea typeface="Open Sans"/>
+                <a:cs typeface="Open Sans"/>
+              </a:rPr>
+              <a:t>Studenti in cerca di uno spazio tranquillo, lavoratori remoti, creativi.</a:t>
+            </a:r>
+            <a:endParaRPr lang="it-IT"/>
+          </a:p>
+        </p:txBody>
+      </p:sp>
+      <p:sp>
+        <p:nvSpPr>
+          <p:cNvPr id="1900" name="Watermark Cover"/>
+          <p:cNvSpPr/>
+          <p:nvPr/>
+        </p:nvSpPr>
+        <p:spPr bwMode="auto">
+          <a:xfrm>
+            <a:off x="12301840" y="7660956"/>
+            <a:ext cx="2371116" cy="526914"/>
+          </a:xfrm>
+          <a:prstGeom prst="rect">
+            <a:avLst/>
+          </a:prstGeom>
+          <a:solidFill>
+            <a:srgbClr val="14142E"/>
+          </a:solidFill>
+          <a:ln>
+            <a:noFill/>
+          </a:ln>
+        </p:spPr>
+      </p:sp>
+    </p:spTree>
+  </p:cSld>
+  <p:clrMapOvr>
+    <a:masterClrMapping/>
+  </p:clrMapOvr>
 </p:sld>
 </file>
 
@@ -3991,7 +4350,7 @@
             <a:r>
               <a:rPr lang="en-US" sz="4200" b="1">
                 <a:solidFill>
-                  <a:srgbClr val="403CCF"/>
+                  <a:srgbClr val="9A93F5"/>
                 </a:solidFill>
                 <a:latin typeface="Libre Baskerville"/>
                 <a:ea typeface="Libre Baskerville"/>
@@ -4020,11 +4379,11 @@
             </a:avLst>
           </a:prstGeom>
           <a:solidFill>
-            <a:srgbClr val="FBFAFF"/>
+            <a:srgbClr val="14142E"/>
           </a:solidFill>
           <a:ln w="22860">
             <a:solidFill>
-              <a:srgbClr val="D0CED9"/>
+              <a:srgbClr val="1A1A2E"/>
             </a:solidFill>
             <a:prstDash val="solid"/>
           </a:ln>
@@ -4083,7 +4442,7 @@
             <a:r>
               <a:rPr lang="en-US" sz="2600" b="1">
                 <a:solidFill>
-                  <a:srgbClr val="49495A"/>
+                  <a:srgbClr val="C4B8F5"/>
                 </a:solidFill>
                 <a:latin typeface="Libre Baskerville"/>
                 <a:ea typeface="Libre Baskerville"/>
@@ -4094,7 +4453,7 @@
             <a:r>
               <a:rPr lang="en-US" sz="2000">
                 <a:solidFill>
-                  <a:srgbClr val="49495A"/>
+                  <a:srgbClr val="C4B8F5"/>
                 </a:solidFill>
                 <a:latin typeface="Libre Baskerville"/>
                 <a:ea typeface="Libre Baskerville"/>
@@ -4105,7 +4464,7 @@
             <a:r>
               <a:rPr lang="en-US" sz="2000">
                 <a:solidFill>
-                  <a:srgbClr val="5955EB"/>
+                  <a:srgbClr val="ADA8F9"/>
                 </a:solidFill>
                 <a:latin typeface="Libre Baskerville"/>
                 <a:ea typeface="Libre Baskerville"/>
@@ -4148,7 +4507,7 @@
             <a:r>
               <a:rPr lang="en-US" sz="1800">
                 <a:solidFill>
-                  <a:srgbClr val="49495A"/>
+                  <a:srgbClr val="C4B8F5"/>
                 </a:solidFill>
                 <a:latin typeface="Open Sans"/>
                 <a:ea typeface="Open Sans"/>
@@ -4177,11 +4536,11 @@
             </a:avLst>
           </a:prstGeom>
           <a:solidFill>
-            <a:srgbClr val="FBFAFF"/>
+            <a:srgbClr val="14142E"/>
           </a:solidFill>
           <a:ln w="22860">
             <a:solidFill>
-              <a:srgbClr val="D0CED9"/>
+              <a:srgbClr val="1A1A2E"/>
             </a:solidFill>
             <a:prstDash val="solid"/>
           </a:ln>
@@ -4240,7 +4599,7 @@
             <a:r>
               <a:rPr lang="en-US" sz="2600" b="1">
                 <a:solidFill>
-                  <a:srgbClr val="49495A"/>
+                  <a:srgbClr val="C4B8F5"/>
                 </a:solidFill>
                 <a:latin typeface="Libre Baskerville"/>
                 <a:ea typeface="Libre Baskerville"/>
@@ -4251,7 +4610,7 @@
             <a:r>
               <a:rPr lang="en-US" sz="2200">
                 <a:solidFill>
-                  <a:srgbClr val="49495A"/>
+                  <a:srgbClr val="C4B8F5"/>
                 </a:solidFill>
                 <a:latin typeface="Libre Baskerville"/>
                 <a:ea typeface="Libre Baskerville"/>
@@ -4262,7 +4621,7 @@
             <a:r>
               <a:rPr lang="en-US" sz="2200">
                 <a:solidFill>
-                  <a:srgbClr val="5955EB"/>
+                  <a:srgbClr val="ADA8F9"/>
                 </a:solidFill>
                 <a:latin typeface="Libre Baskerville"/>
                 <a:ea typeface="Libre Baskerville"/>
@@ -4305,7 +4664,7 @@
             <a:r>
               <a:rPr lang="en-US" sz="1800">
                 <a:solidFill>
-                  <a:srgbClr val="49495A"/>
+                  <a:srgbClr val="C4B8F5"/>
                 </a:solidFill>
                 <a:latin typeface="Open Sans"/>
                 <a:ea typeface="Open Sans"/>
@@ -4334,11 +4693,11 @@
             </a:avLst>
           </a:prstGeom>
           <a:solidFill>
-            <a:srgbClr val="FBFAFF"/>
+            <a:srgbClr val="14142E"/>
           </a:solidFill>
           <a:ln w="22860">
             <a:solidFill>
-              <a:srgbClr val="D0CED9"/>
+              <a:srgbClr val="1A1A2E"/>
             </a:solidFill>
             <a:prstDash val="solid"/>
           </a:ln>
@@ -4397,7 +4756,7 @@
             <a:r>
               <a:rPr lang="en-US" sz="2600" b="1">
                 <a:solidFill>
-                  <a:srgbClr val="49495A"/>
+                  <a:srgbClr val="C4B8F5"/>
                 </a:solidFill>
                 <a:latin typeface="Libre Baskerville"/>
                 <a:ea typeface="Libre Baskerville"/>
@@ -4408,7 +4767,7 @@
             <a:r>
               <a:rPr lang="en-US" sz="2200">
                 <a:solidFill>
-                  <a:srgbClr val="49495A"/>
+                  <a:srgbClr val="C4B8F5"/>
                 </a:solidFill>
                 <a:latin typeface="Libre Baskerville"/>
                 <a:ea typeface="Libre Baskerville"/>
@@ -4419,7 +4778,7 @@
             <a:r>
               <a:rPr lang="en-US" sz="2200">
                 <a:solidFill>
-                  <a:srgbClr val="5955EB"/>
+                  <a:srgbClr val="ADA8F9"/>
                 </a:solidFill>
                 <a:latin typeface="Libre Baskerville"/>
                 <a:ea typeface="Libre Baskerville"/>
@@ -4462,7 +4821,7 @@
             <a:r>
               <a:rPr lang="en-US" sz="1800">
                 <a:solidFill>
-                  <a:srgbClr val="49495A"/>
+                  <a:srgbClr val="C4B8F5"/>
                 </a:solidFill>
                 <a:latin typeface="Open Sans"/>
                 <a:ea typeface="Open Sans"/>
@@ -4505,7 +4864,7 @@
             <a:r>
               <a:rPr lang="en-US" sz="1400" i="1">
                 <a:solidFill>
-                  <a:srgbClr val="49495A"/>
+                  <a:srgbClr val="C4B8F5"/>
                 </a:solidFill>
                 <a:latin typeface="Open Sans"/>
                 <a:ea typeface="Open Sans"/>
@@ -4534,7 +4893,7 @@
             </a:avLst>
           </a:prstGeom>
           <a:solidFill>
-            <a:srgbClr val="E7E0FF"/>
+            <a:srgbClr val="23213C"/>
           </a:solidFill>
           <a:ln/>
         </p:spPr>
@@ -4570,7 +4929,7 @@
             <a:r>
               <a:rPr lang="en-US" sz="1750">
                 <a:solidFill>
-                  <a:srgbClr val="000000"/>
+                  <a:srgbClr val="F2EEFF"/>
                 </a:solidFill>
                 <a:latin typeface="Libre Baskerville"/>
                 <a:ea typeface="Libre Baskerville"/>
@@ -4613,7 +4972,7 @@
             <a:r>
               <a:rPr lang="en-US" sz="1600">
                 <a:solidFill>
-                  <a:srgbClr val="49495A"/>
+                  <a:srgbClr val="C4B8F5"/>
                 </a:solidFill>
                 <a:latin typeface="Open Sans"/>
                 <a:ea typeface="Open Sans"/>
@@ -4656,7 +5015,7 @@
             <a:r>
               <a:rPr lang="en-US" sz="1700">
                 <a:solidFill>
-                  <a:srgbClr val="000000"/>
+                  <a:srgbClr val="F2EEFF"/>
                 </a:solidFill>
                 <a:latin typeface="Open Sans"/>
                 <a:ea typeface="Open Sans"/>
@@ -4667,7 +5026,7 @@
             <a:r>
               <a:rPr lang="en-US" sz="1700">
                 <a:solidFill>
-                  <a:srgbClr val="49495A"/>
+                  <a:srgbClr val="C4B8F5"/>
                 </a:solidFill>
                 <a:latin typeface="Open Sans"/>
                 <a:ea typeface="Open Sans"/>
@@ -4678,7 +5037,7 @@
             <a:r>
               <a:rPr lang="en-US" sz="1700" b="1">
                 <a:solidFill>
-                  <a:srgbClr val="49495A"/>
+                  <a:srgbClr val="C4B8F5"/>
                 </a:solidFill>
                 <a:latin typeface="Open Sans"/>
                 <a:ea typeface="Open Sans"/>
@@ -4689,7 +5048,7 @@
             <a:r>
               <a:rPr lang="en-US" sz="1700">
                 <a:solidFill>
-                  <a:srgbClr val="49495A"/>
+                  <a:srgbClr val="C4B8F5"/>
                 </a:solidFill>
                 <a:latin typeface="Open Sans"/>
                 <a:ea typeface="Open Sans"/>
@@ -4710,7 +5069,7 @@
             <a:r>
               <a:rPr lang="en-US" sz="1700">
                 <a:solidFill>
-                  <a:srgbClr val="000000"/>
+                  <a:srgbClr val="F2EEFF"/>
                 </a:solidFill>
                 <a:latin typeface="Open Sans"/>
                 <a:ea typeface="Open Sans"/>
@@ -4721,7 +5080,7 @@
             <a:r>
               <a:rPr lang="en-US" sz="1700">
                 <a:solidFill>
-                  <a:srgbClr val="49495A"/>
+                  <a:srgbClr val="C4B8F5"/>
                 </a:solidFill>
                 <a:latin typeface="Open Sans"/>
                 <a:ea typeface="Open Sans"/>
@@ -4732,7 +5091,7 @@
             <a:r>
               <a:rPr lang="en-US" sz="1700" b="1">
                 <a:solidFill>
-                  <a:srgbClr val="49495A"/>
+                  <a:srgbClr val="C4B8F5"/>
                 </a:solidFill>
                 <a:latin typeface="Open Sans"/>
                 <a:ea typeface="Open Sans"/>
@@ -4743,7 +5102,7 @@
             <a:r>
               <a:rPr lang="en-US" sz="1700">
                 <a:solidFill>
-                  <a:srgbClr val="49495A"/>
+                  <a:srgbClr val="C4B8F5"/>
                 </a:solidFill>
                 <a:latin typeface="Open Sans"/>
                 <a:ea typeface="Open Sans"/>
@@ -4764,7 +5123,7 @@
             <a:r>
               <a:rPr lang="en-US" sz="1700">
                 <a:solidFill>
-                  <a:srgbClr val="000000"/>
+                  <a:srgbClr val="F2EEFF"/>
                 </a:solidFill>
                 <a:latin typeface="Open Sans"/>
                 <a:ea typeface="Open Sans"/>
@@ -4775,7 +5134,7 @@
             <a:r>
               <a:rPr lang="en-US" sz="1700">
                 <a:solidFill>
-                  <a:srgbClr val="49495A"/>
+                  <a:srgbClr val="C4B8F5"/>
                 </a:solidFill>
                 <a:latin typeface="Open Sans"/>
                 <a:ea typeface="Open Sans"/>
@@ -4786,7 +5145,7 @@
             <a:r>
               <a:rPr lang="en-US" sz="1700" b="1">
                 <a:solidFill>
-                  <a:srgbClr val="49495A"/>
+                  <a:srgbClr val="C4B8F5"/>
                 </a:solidFill>
                 <a:latin typeface="Open Sans"/>
                 <a:ea typeface="Open Sans"/>
@@ -4797,7 +5156,7 @@
             <a:r>
               <a:rPr lang="en-US" sz="1700">
                 <a:solidFill>
-                  <a:srgbClr val="49495A"/>
+                  <a:srgbClr val="C4B8F5"/>
                 </a:solidFill>
                 <a:latin typeface="Open Sans"/>
                 <a:ea typeface="Open Sans"/>
@@ -4818,7 +5177,7 @@
             <a:r>
               <a:rPr lang="en-US" sz="1700">
                 <a:solidFill>
-                  <a:srgbClr val="000000"/>
+                  <a:srgbClr val="F2EEFF"/>
                 </a:solidFill>
                 <a:latin typeface="Open Sans"/>
                 <a:ea typeface="Open Sans"/>
@@ -4829,7 +5188,7 @@
             <a:r>
               <a:rPr lang="en-US" sz="1700">
                 <a:solidFill>
-                  <a:srgbClr val="49495A"/>
+                  <a:srgbClr val="C4B8F5"/>
                 </a:solidFill>
                 <a:latin typeface="Open Sans"/>
                 <a:ea typeface="Open Sans"/>
@@ -4840,7 +5199,7 @@
             <a:r>
               <a:rPr lang="en-US" sz="1700" b="1">
                 <a:solidFill>
-                  <a:srgbClr val="49495A"/>
+                  <a:srgbClr val="C4B8F5"/>
                 </a:solidFill>
                 <a:latin typeface="Open Sans"/>
                 <a:ea typeface="Open Sans"/>
@@ -4851,7 +5210,7 @@
             <a:r>
               <a:rPr lang="en-US" sz="1700">
                 <a:solidFill>
-                  <a:srgbClr val="49495A"/>
+                  <a:srgbClr val="C4B8F5"/>
                 </a:solidFill>
                 <a:latin typeface="Open Sans"/>
                 <a:ea typeface="Open Sans"/>
@@ -4872,7 +5231,7 @@
             <a:r>
               <a:rPr lang="en-US" sz="1700">
                 <a:solidFill>
-                  <a:srgbClr val="000000"/>
+                  <a:srgbClr val="F2EEFF"/>
                 </a:solidFill>
                 <a:latin typeface="Open Sans"/>
                 <a:ea typeface="Open Sans"/>
@@ -4883,7 +5242,7 @@
             <a:r>
               <a:rPr lang="en-US" sz="1700">
                 <a:solidFill>
-                  <a:srgbClr val="49495A"/>
+                  <a:srgbClr val="C4B8F5"/>
                 </a:solidFill>
                 <a:latin typeface="Open Sans"/>
                 <a:ea typeface="Open Sans"/>
@@ -4894,7 +5253,7 @@
             <a:r>
               <a:rPr lang="en-US" sz="1700" b="1">
                 <a:solidFill>
-                  <a:srgbClr val="49495A"/>
+                  <a:srgbClr val="C4B8F5"/>
                 </a:solidFill>
                 <a:latin typeface="Open Sans"/>
                 <a:ea typeface="Open Sans"/>
@@ -4905,7 +5264,7 @@
             <a:r>
               <a:rPr lang="en-US" sz="1700">
                 <a:solidFill>
-                  <a:srgbClr val="49495A"/>
+                  <a:srgbClr val="C4B8F5"/>
                 </a:solidFill>
                 <a:latin typeface="Open Sans"/>
                 <a:ea typeface="Open Sans"/>
@@ -4926,7 +5285,7 @@
             <a:r>
               <a:rPr lang="en-US" sz="1700">
                 <a:solidFill>
-                  <a:srgbClr val="000000"/>
+                  <a:srgbClr val="F2EEFF"/>
                 </a:solidFill>
                 <a:latin typeface="Open Sans"/>
                 <a:ea typeface="Open Sans"/>
@@ -4937,7 +5296,7 @@
             <a:r>
               <a:rPr lang="en-US" sz="1700">
                 <a:solidFill>
-                  <a:srgbClr val="49495A"/>
+                  <a:srgbClr val="C4B8F5"/>
                 </a:solidFill>
                 <a:latin typeface="Open Sans"/>
                 <a:ea typeface="Open Sans"/>
@@ -4948,7 +5307,7 @@
             <a:r>
               <a:rPr lang="en-US" sz="1700" b="1">
                 <a:solidFill>
-                  <a:srgbClr val="49495A"/>
+                  <a:srgbClr val="C4B8F5"/>
                 </a:solidFill>
                 <a:latin typeface="Open Sans"/>
                 <a:ea typeface="Open Sans"/>
@@ -4959,7 +5318,7 @@
             <a:r>
               <a:rPr lang="en-US" sz="1700">
                 <a:solidFill>
-                  <a:srgbClr val="49495A"/>
+                  <a:srgbClr val="C4B8F5"/>
                 </a:solidFill>
                 <a:latin typeface="Open Sans"/>
                 <a:ea typeface="Open Sans"/>
@@ -5002,7 +5361,7 @@
             <a:r>
               <a:rPr lang="en-US" sz="1500" i="1">
                 <a:solidFill>
-                  <a:srgbClr val="49495A"/>
+                  <a:srgbClr val="C4B8F5"/>
                 </a:solidFill>
                 <a:latin typeface="Open Sans"/>
                 <a:ea typeface="Open Sans"/>
@@ -5029,7 +5388,7 @@
             <a:avLst/>
           </a:prstGeom>
           <a:solidFill>
-            <a:srgbClr val="403CCF"/>
+            <a:srgbClr val="5A52DC"/>
           </a:solidFill>
           <a:ln/>
         </p:spPr>
@@ -5049,7 +5408,7 @@
             <a:avLst/>
           </a:prstGeom>
           <a:solidFill>
-            <a:schemeClr val="bg1"/>
+            <a:srgbClr val="14142E"/>
           </a:solidFill>
           <a:ln w="12700" cap="flat" cmpd="sng" algn="ctr">
             <a:noFill/>
@@ -5112,7 +5471,7 @@
     <p:bg>
       <p:bgPr shadeToTitle="0">
         <a:solidFill>
-          <a:schemeClr val="bg1"/>
+          <a:srgbClr val="14142E"/>
         </a:solidFill>
       </p:bgPr>
     </p:bg>
@@ -5158,7 +5517,7 @@
             <a:r>
               <a:rPr lang="en-US" sz="4200" b="1">
                 <a:solidFill>
-                  <a:srgbClr val="4F46E5"/>
+                  <a:srgbClr val="A7A0F8"/>
                 </a:solidFill>
                 <a:latin typeface="Open Sans"/>
                 <a:ea typeface="Open Sans"/>
@@ -5198,7 +5557,7 @@
             <a:r>
               <a:rPr lang="en-US" sz="2600" b="1" i="1">
                 <a:solidFill>
-                  <a:srgbClr val="1F1F2E"/>
+                  <a:srgbClr val="E7E0FF"/>
                 </a:solidFill>
                 <a:latin typeface="Open Sans"/>
                 <a:ea typeface="Open Sans"/>
@@ -5227,11 +5586,11 @@
             </a:avLst>
           </a:prstGeom>
           <a:solidFill>
-            <a:srgbClr val="4F46E5"/>
+            <a:srgbClr val="635AE8"/>
           </a:solidFill>
           <a:ln w="19050">
             <a:solidFill>
-              <a:srgbClr val="4F46E5"/>
+              <a:srgbClr val="635AE8"/>
             </a:solidFill>
             <a:prstDash val="solid"/>
           </a:ln>
@@ -5334,11 +5693,11 @@
             </a:avLst>
           </a:prstGeom>
           <a:solidFill>
-            <a:srgbClr val="ECEBFA"/>
+            <a:srgbClr val="1A1A2E"/>
           </a:solidFill>
           <a:ln w="19050">
             <a:solidFill>
-              <a:srgbClr val="C4B8F5"/>
+              <a:srgbClr val="3B337A"/>
             </a:solidFill>
             <a:prstDash val="solid"/>
           </a:ln>
@@ -5372,7 +5731,7 @@
             <a:r>
               <a:rPr lang="en-US" sz="5600" b="1">
                 <a:solidFill>
-                  <a:srgbClr val="4F46E5"/>
+                  <a:srgbClr val="A7A0F8"/>
                 </a:solidFill>
                 <a:latin typeface="Open Sans"/>
                 <a:ea typeface="Open Sans"/>
@@ -5412,7 +5771,7 @@
             <a:r>
               <a:rPr lang="en-US" sz="1400">
                 <a:solidFill>
-                  <a:srgbClr val="49495A"/>
+                  <a:srgbClr val="C4B8F5"/>
                 </a:solidFill>
                 <a:latin typeface="Open Sans"/>
                 <a:ea typeface="Open Sans"/>
@@ -5441,11 +5800,11 @@
             </a:avLst>
           </a:prstGeom>
           <a:solidFill>
-            <a:srgbClr val="ECEBFA"/>
+            <a:srgbClr val="1A1A2E"/>
           </a:solidFill>
           <a:ln w="19050">
             <a:solidFill>
-              <a:srgbClr val="C4B8F5"/>
+              <a:srgbClr val="3B337A"/>
             </a:solidFill>
             <a:prstDash val="solid"/>
           </a:ln>
@@ -5479,7 +5838,7 @@
             <a:r>
               <a:rPr lang="en-US" sz="5600" b="1">
                 <a:solidFill>
-                  <a:srgbClr val="4F46E5"/>
+                  <a:srgbClr val="A7A0F8"/>
                 </a:solidFill>
                 <a:latin typeface="Open Sans"/>
                 <a:ea typeface="Open Sans"/>
@@ -5519,7 +5878,7 @@
             <a:r>
               <a:rPr lang="en-US" sz="1400">
                 <a:solidFill>
-                  <a:srgbClr val="49495A"/>
+                  <a:srgbClr val="C4B8F5"/>
                 </a:solidFill>
                 <a:latin typeface="Open Sans"/>
                 <a:ea typeface="Open Sans"/>
@@ -5548,11 +5907,11 @@
             </a:avLst>
           </a:prstGeom>
           <a:solidFill>
-            <a:srgbClr val="ECEBFA"/>
+            <a:srgbClr val="1A1A2E"/>
           </a:solidFill>
           <a:ln w="19050">
             <a:solidFill>
-              <a:srgbClr val="C4B8F5"/>
+              <a:srgbClr val="3B337A"/>
             </a:solidFill>
             <a:prstDash val="solid"/>
           </a:ln>
@@ -5586,7 +5945,7 @@
             <a:r>
               <a:rPr lang="en-US" sz="2200" b="1">
                 <a:solidFill>
-                  <a:srgbClr val="1F1F2E"/>
+                  <a:srgbClr val="E7E0FF"/>
                 </a:solidFill>
                 <a:latin typeface="Open Sans"/>
                 <a:ea typeface="Open Sans"/>
@@ -5597,7 +5956,7 @@
             <a:br>
               <a:rPr lang="en-US" sz="1800" b="1">
                 <a:solidFill>
-                  <a:srgbClr val="1F1F2E"/>
+                  <a:srgbClr val="E7E0FF"/>
                 </a:solidFill>
                 <a:latin typeface="Open Sans"/>
                 <a:ea typeface="Open Sans"/>
@@ -5607,7 +5966,7 @@
             <a:r>
               <a:rPr lang="en-US" sz="1800">
                 <a:solidFill>
-                  <a:srgbClr val="49495A"/>
+                  <a:srgbClr val="C4B8F5"/>
                 </a:solidFill>
                 <a:latin typeface="Open Sans"/>
                 <a:ea typeface="Open Sans"/>
@@ -5647,7 +6006,7 @@
             <a:r>
               <a:rPr lang="en-US" sz="1600" b="1">
                 <a:solidFill>
-                  <a:srgbClr val="1F1F2E"/>
+                  <a:srgbClr val="E7E0FF"/>
                 </a:solidFill>
                 <a:latin typeface="Open Sans"/>
                 <a:ea typeface="Open Sans"/>
@@ -5658,7 +6017,7 @@
             <a:r>
               <a:rPr lang="en-US" sz="1600">
                 <a:solidFill>
-                  <a:srgbClr val="49495A"/>
+                  <a:srgbClr val="C4B8F5"/>
                 </a:solidFill>
                 <a:latin typeface="Open Sans"/>
                 <a:ea typeface="Open Sans"/>
@@ -5687,7 +6046,7 @@
           <a:noFill/>
           <a:ln w="12700">
             <a:solidFill>
-              <a:srgbClr val="C4B8F5"/>
+              <a:srgbClr val="3B337A"/>
             </a:solidFill>
             <a:prstDash val="solid"/>
           </a:ln>
@@ -5721,7 +6080,7 @@
             <a:r>
               <a:rPr lang="en-US" sz="2600" b="1" i="1">
                 <a:solidFill>
-                  <a:srgbClr val="1F1F2E"/>
+                  <a:srgbClr val="E7E0FF"/>
                 </a:solidFill>
                 <a:latin typeface="Open Sans"/>
                 <a:ea typeface="Open Sans"/>
@@ -5761,7 +6120,7 @@
             <a:r>
               <a:rPr lang="en-US" sz="4000" b="1">
                 <a:solidFill>
-                  <a:srgbClr val="4F46E5"/>
+                  <a:srgbClr val="A7A0F8"/>
                 </a:solidFill>
                 <a:latin typeface="Open Sans"/>
                 <a:ea typeface="Open Sans"/>
@@ -5772,7 +6131,7 @@
             <a:r>
               <a:rPr lang="en-US" sz="1800">
                 <a:solidFill>
-                  <a:srgbClr val="49495A"/>
+                  <a:srgbClr val="C4B8F5"/>
                 </a:solidFill>
                 <a:latin typeface="Open Sans"/>
                 <a:ea typeface="Open Sans"/>
@@ -5783,7 +6142,7 @@
             <a:r>
               <a:rPr lang="en-US" sz="2000">
                 <a:solidFill>
-                  <a:srgbClr val="49495A"/>
+                  <a:srgbClr val="C4B8F5"/>
                 </a:solidFill>
                 <a:latin typeface="Open Sans"/>
                 <a:ea typeface="Open Sans"/>
@@ -5794,7 +6153,7 @@
             <a:r>
               <a:rPr lang="en-US" sz="1800">
                 <a:solidFill>
-                  <a:srgbClr val="49495A"/>
+                  <a:srgbClr val="C4B8F5"/>
                 </a:solidFill>
                 <a:latin typeface="Open Sans"/>
                 <a:ea typeface="Open Sans"/>
@@ -5805,7 +6164,7 @@
             <a:r>
               <a:rPr lang="en-US" sz="4000" b="1">
                 <a:solidFill>
-                  <a:srgbClr val="4F46E5"/>
+                  <a:srgbClr val="A7A0F8"/>
                 </a:solidFill>
                 <a:latin typeface="Open Sans"/>
                 <a:ea typeface="Open Sans"/>
@@ -5816,7 +6175,7 @@
             <a:r>
               <a:rPr lang="en-US" sz="1800">
                 <a:solidFill>
-                  <a:srgbClr val="49495A"/>
+                  <a:srgbClr val="C4B8F5"/>
                 </a:solidFill>
                 <a:latin typeface="Open Sans"/>
                 <a:ea typeface="Open Sans"/>
@@ -5827,7 +6186,7 @@
             <a:r>
               <a:rPr lang="en-US" sz="2000">
                 <a:solidFill>
-                  <a:srgbClr val="49495A"/>
+                  <a:srgbClr val="C4B8F5"/>
                 </a:solidFill>
                 <a:latin typeface="Open Sans"/>
                 <a:ea typeface="Open Sans"/>
@@ -5867,7 +6226,7 @@
             <a:r>
               <a:rPr lang="en-US" sz="1500">
                 <a:solidFill>
-                  <a:srgbClr val="1F1F2E"/>
+                  <a:srgbClr val="E7E0FF"/>
                 </a:solidFill>
                 <a:latin typeface="Open Sans"/>
                 <a:ea typeface="Open Sans"/>
@@ -5896,11 +6255,11 @@
             </a:avLst>
           </a:prstGeom>
           <a:solidFill>
-            <a:srgbClr val="4F46E5"/>
+            <a:srgbClr val="635AE8"/>
           </a:solidFill>
           <a:ln w="12700">
             <a:solidFill>
-              <a:srgbClr val="4F46E5"/>
+              <a:srgbClr val="635AE8"/>
             </a:solidFill>
             <a:prstDash val="solid"/>
           </a:ln>
@@ -5934,7 +6293,7 @@
             <a:r>
               <a:rPr lang="en-US" sz="1500" b="1">
                 <a:solidFill>
-                  <a:srgbClr val="1F1F2E"/>
+                  <a:srgbClr val="E7E0FF"/>
                 </a:solidFill>
                 <a:latin typeface="Open Sans"/>
                 <a:ea typeface="Open Sans"/>
@@ -5974,7 +6333,7 @@
             <a:r>
               <a:rPr lang="en-US" sz="1500">
                 <a:solidFill>
-                  <a:srgbClr val="1F1F2E"/>
+                  <a:srgbClr val="E7E0FF"/>
                 </a:solidFill>
                 <a:latin typeface="Open Sans"/>
                 <a:ea typeface="Open Sans"/>
@@ -6003,11 +6362,11 @@
             </a:avLst>
           </a:prstGeom>
           <a:solidFill>
-            <a:srgbClr val="4F46E5"/>
+            <a:srgbClr val="635AE8"/>
           </a:solidFill>
           <a:ln w="12700">
             <a:solidFill>
-              <a:srgbClr val="4F46E5"/>
+              <a:srgbClr val="635AE8"/>
             </a:solidFill>
             <a:prstDash val="solid"/>
           </a:ln>
@@ -6041,7 +6400,7 @@
             <a:r>
               <a:rPr lang="en-US" sz="1500" b="1">
                 <a:solidFill>
-                  <a:srgbClr val="1F1F2E"/>
+                  <a:srgbClr val="E7E0FF"/>
                 </a:solidFill>
                 <a:latin typeface="Open Sans"/>
                 <a:ea typeface="Open Sans"/>
@@ -6081,7 +6440,7 @@
             <a:r>
               <a:rPr lang="en-US" sz="1500">
                 <a:solidFill>
-                  <a:srgbClr val="1F1F2E"/>
+                  <a:srgbClr val="E7E0FF"/>
                 </a:solidFill>
                 <a:latin typeface="Open Sans"/>
                 <a:ea typeface="Open Sans"/>
@@ -6110,11 +6469,11 @@
             </a:avLst>
           </a:prstGeom>
           <a:solidFill>
-            <a:srgbClr val="4F46E5"/>
+            <a:srgbClr val="635AE8"/>
           </a:solidFill>
           <a:ln w="12700">
             <a:solidFill>
-              <a:srgbClr val="4F46E5"/>
+              <a:srgbClr val="635AE8"/>
             </a:solidFill>
             <a:prstDash val="solid"/>
           </a:ln>
@@ -6148,7 +6507,7 @@
             <a:r>
               <a:rPr lang="en-US" sz="1500" b="1">
                 <a:solidFill>
-                  <a:srgbClr val="1F1F2E"/>
+                  <a:srgbClr val="E7E0FF"/>
                 </a:solidFill>
                 <a:latin typeface="Open Sans"/>
                 <a:ea typeface="Open Sans"/>
@@ -6188,7 +6547,7 @@
             <a:r>
               <a:rPr lang="en-US" sz="1500">
                 <a:solidFill>
-                  <a:srgbClr val="1F1F2E"/>
+                  <a:srgbClr val="E7E0FF"/>
                 </a:solidFill>
                 <a:latin typeface="Open Sans"/>
                 <a:ea typeface="Open Sans"/>
@@ -6217,11 +6576,11 @@
             </a:avLst>
           </a:prstGeom>
           <a:solidFill>
-            <a:srgbClr val="4F46E5"/>
+            <a:srgbClr val="635AE8"/>
           </a:solidFill>
           <a:ln w="12700">
             <a:solidFill>
-              <a:srgbClr val="4F46E5"/>
+              <a:srgbClr val="635AE8"/>
             </a:solidFill>
             <a:prstDash val="solid"/>
           </a:ln>
@@ -6255,7 +6614,7 @@
             <a:r>
               <a:rPr lang="en-US" sz="1500" b="1">
                 <a:solidFill>
-                  <a:srgbClr val="1F1F2E"/>
+                  <a:srgbClr val="E7E0FF"/>
                 </a:solidFill>
                 <a:latin typeface="Open Sans"/>
                 <a:ea typeface="Open Sans"/>
@@ -6295,7 +6654,7 @@
             <a:r>
               <a:rPr lang="en-US" sz="1500">
                 <a:solidFill>
-                  <a:srgbClr val="1F1F2E"/>
+                  <a:srgbClr val="E7E0FF"/>
                 </a:solidFill>
                 <a:latin typeface="Open Sans"/>
                 <a:ea typeface="Open Sans"/>
@@ -6324,11 +6683,11 @@
             </a:avLst>
           </a:prstGeom>
           <a:solidFill>
-            <a:srgbClr val="4F46E5"/>
+            <a:srgbClr val="635AE8"/>
           </a:solidFill>
           <a:ln w="12700">
             <a:solidFill>
-              <a:srgbClr val="4F46E5"/>
+              <a:srgbClr val="635AE8"/>
             </a:solidFill>
             <a:prstDash val="solid"/>
           </a:ln>
@@ -6362,7 +6721,7 @@
             <a:r>
               <a:rPr lang="en-US" sz="1500" b="1">
                 <a:solidFill>
-                  <a:srgbClr val="1F1F2E"/>
+                  <a:srgbClr val="E7E0FF"/>
                 </a:solidFill>
                 <a:latin typeface="Open Sans"/>
                 <a:ea typeface="Open Sans"/>
@@ -6402,7 +6761,7 @@
             <a:r>
               <a:rPr lang="en-US" sz="1500">
                 <a:solidFill>
-                  <a:srgbClr val="1F1F2E"/>
+                  <a:srgbClr val="E7E0FF"/>
                 </a:solidFill>
                 <a:latin typeface="Open Sans"/>
                 <a:ea typeface="Open Sans"/>
@@ -6431,11 +6790,11 @@
             </a:avLst>
           </a:prstGeom>
           <a:solidFill>
-            <a:srgbClr val="7B6FE8"/>
+            <a:srgbClr val="8F88F0"/>
           </a:solidFill>
           <a:ln w="12700">
             <a:solidFill>
-              <a:srgbClr val="7B6FE8"/>
+              <a:srgbClr val="8F88F0"/>
             </a:solidFill>
             <a:prstDash val="solid"/>
           </a:ln>
@@ -6469,7 +6828,7 @@
             <a:r>
               <a:rPr lang="en-US" sz="1500" b="1">
                 <a:solidFill>
-                  <a:srgbClr val="1F1F2E"/>
+                  <a:srgbClr val="E7E0FF"/>
                 </a:solidFill>
                 <a:latin typeface="Open Sans"/>
                 <a:ea typeface="Open Sans"/>
@@ -6496,7 +6855,7 @@
             <a:avLst/>
           </a:prstGeom>
           <a:solidFill>
-            <a:schemeClr val="bg1"/>
+            <a:srgbClr val="14142E"/>
           </a:solidFill>
           <a:ln w="12700" cap="flat" cmpd="sng" algn="ctr">
             <a:noFill/>
@@ -6601,7 +6960,7 @@
             <a:r>
               <a:rPr lang="en-US" sz="4200" b="1">
                 <a:solidFill>
-                  <a:srgbClr val="403CCF"/>
+                  <a:srgbClr val="9A93F5"/>
                 </a:solidFill>
                 <a:latin typeface="Libre Baskerville"/>
                 <a:ea typeface="Libre Baskerville"/>
@@ -6644,7 +7003,7 @@
             <a:r>
               <a:rPr lang="en-US" sz="2000" i="1">
                 <a:solidFill>
-                  <a:srgbClr val="49495A"/>
+                  <a:srgbClr val="C4B8F5"/>
                 </a:solidFill>
                 <a:latin typeface="Open Sans"/>
                 <a:ea typeface="Open Sans"/>
@@ -6671,7 +7030,7 @@
             <a:avLst/>
           </a:prstGeom>
           <a:solidFill>
-            <a:srgbClr val="403CCF"/>
+            <a:srgbClr val="5A52DC"/>
           </a:solidFill>
           <a:ln/>
         </p:spPr>
@@ -6707,7 +7066,7 @@
             <a:r>
               <a:rPr lang="en-US" sz="2400" b="1">
                 <a:solidFill>
-                  <a:srgbClr val="403CCF"/>
+                  <a:srgbClr val="9A93F5"/>
                 </a:solidFill>
                 <a:latin typeface="Libre Baskerville"/>
                 <a:ea typeface="Libre Baskerville"/>
@@ -6778,7 +7137,7 @@
             <a:r>
               <a:rPr lang="en-US" sz="2000" b="1">
                 <a:solidFill>
-                  <a:srgbClr val="000000"/>
+                  <a:srgbClr val="F2EEFF"/>
                 </a:solidFill>
                 <a:latin typeface="Libre Baskerville"/>
                 <a:ea typeface="Libre Baskerville"/>
@@ -6789,7 +7148,7 @@
             <a:r>
               <a:rPr lang="en-US" sz="2000" b="1">
                 <a:solidFill>
-                  <a:srgbClr val="49495A"/>
+                  <a:srgbClr val="C4B8F5"/>
                 </a:solidFill>
                 <a:latin typeface="Libre Baskerville"/>
                 <a:ea typeface="Libre Baskerville"/>
@@ -6832,7 +7191,7 @@
             <a:r>
               <a:rPr lang="en-US" sz="1700">
                 <a:solidFill>
-                  <a:srgbClr val="49495A"/>
+                  <a:srgbClr val="C4B8F5"/>
                 </a:solidFill>
                 <a:latin typeface="Open Sans"/>
                 <a:ea typeface="Open Sans"/>
@@ -6897,7 +7256,7 @@
             <a:r>
               <a:rPr lang="en-US" sz="2000" b="1">
                 <a:solidFill>
-                  <a:srgbClr val="000000"/>
+                  <a:srgbClr val="F2EEFF"/>
                 </a:solidFill>
                 <a:latin typeface="Libre Baskerville"/>
                 <a:ea typeface="Libre Baskerville"/>
@@ -6908,7 +7267,7 @@
             <a:r>
               <a:rPr lang="en-US" sz="2000" b="1">
                 <a:solidFill>
-                  <a:srgbClr val="49495A"/>
+                  <a:srgbClr val="C4B8F5"/>
                 </a:solidFill>
                 <a:latin typeface="Libre Baskerville"/>
                 <a:ea typeface="Libre Baskerville"/>
@@ -6951,7 +7310,7 @@
             <a:r>
               <a:rPr lang="en-US" sz="1700">
                 <a:solidFill>
-                  <a:srgbClr val="49495A"/>
+                  <a:srgbClr val="C4B8F5"/>
                 </a:solidFill>
                 <a:latin typeface="Open Sans"/>
                 <a:ea typeface="Open Sans"/>
@@ -7016,7 +7375,7 @@
             <a:r>
               <a:rPr lang="en-US" sz="2000" b="1">
                 <a:solidFill>
-                  <a:srgbClr val="000000"/>
+                  <a:srgbClr val="F2EEFF"/>
                 </a:solidFill>
                 <a:latin typeface="Libre Baskerville"/>
                 <a:ea typeface="Libre Baskerville"/>
@@ -7027,7 +7386,7 @@
             <a:r>
               <a:rPr lang="en-US" sz="2000" b="1">
                 <a:solidFill>
-                  <a:srgbClr val="49495A"/>
+                  <a:srgbClr val="C4B8F5"/>
                 </a:solidFill>
                 <a:latin typeface="Libre Baskerville"/>
                 <a:ea typeface="Libre Baskerville"/>
@@ -7070,7 +7429,7 @@
             <a:r>
               <a:rPr lang="en-US" sz="1700">
                 <a:solidFill>
-                  <a:srgbClr val="49495A"/>
+                  <a:srgbClr val="C4B8F5"/>
                 </a:solidFill>
                 <a:latin typeface="Open Sans"/>
                 <a:ea typeface="Open Sans"/>
@@ -7135,7 +7494,7 @@
             <a:r>
               <a:rPr lang="en-US" sz="2000" b="1">
                 <a:solidFill>
-                  <a:srgbClr val="000000"/>
+                  <a:srgbClr val="F2EEFF"/>
                 </a:solidFill>
                 <a:latin typeface="Libre Baskerville"/>
                 <a:ea typeface="Libre Baskerville"/>
@@ -7146,7 +7505,7 @@
             <a:r>
               <a:rPr lang="en-US" sz="2000" b="1">
                 <a:solidFill>
-                  <a:srgbClr val="49495A"/>
+                  <a:srgbClr val="C4B8F5"/>
                 </a:solidFill>
                 <a:latin typeface="Libre Baskerville"/>
                 <a:ea typeface="Libre Baskerville"/>
@@ -7189,7 +7548,7 @@
             <a:r>
               <a:rPr lang="en-US" sz="1700">
                 <a:solidFill>
-                  <a:srgbClr val="49495A"/>
+                  <a:srgbClr val="C4B8F5"/>
                 </a:solidFill>
                 <a:latin typeface="Open Sans"/>
                 <a:ea typeface="Open Sans"/>
@@ -7254,7 +7613,7 @@
             <a:r>
               <a:rPr lang="en-US" sz="2000" b="1">
                 <a:solidFill>
-                  <a:srgbClr val="000000"/>
+                  <a:srgbClr val="F2EEFF"/>
                 </a:solidFill>
                 <a:latin typeface="Libre Baskerville"/>
                 <a:ea typeface="Libre Baskerville"/>
@@ -7265,7 +7624,7 @@
             <a:r>
               <a:rPr lang="en-US" sz="2000" b="1">
                 <a:solidFill>
-                  <a:srgbClr val="49495A"/>
+                  <a:srgbClr val="C4B8F5"/>
                 </a:solidFill>
                 <a:latin typeface="Libre Baskerville"/>
                 <a:ea typeface="Libre Baskerville"/>
@@ -7276,7 +7635,7 @@
             <a:r>
               <a:rPr lang="en-US" sz="2000" b="1">
                 <a:solidFill>
-                  <a:srgbClr val="49495A"/>
+                  <a:srgbClr val="C4B8F5"/>
                 </a:solidFill>
                 <a:latin typeface="Libre Baskerville"/>
                 <a:ea typeface="Libre Baskerville"/>
@@ -7319,7 +7678,7 @@
             <a:r>
               <a:rPr lang="en-US" sz="1700">
                 <a:solidFill>
-                  <a:srgbClr val="49495A"/>
+                  <a:srgbClr val="C4B8F5"/>
                 </a:solidFill>
                 <a:latin typeface="Open Sans"/>
                 <a:ea typeface="Open Sans"/>
@@ -7384,7 +7743,7 @@
             <a:r>
               <a:rPr lang="en-US" sz="2000" b="1">
                 <a:solidFill>
-                  <a:srgbClr val="000000"/>
+                  <a:srgbClr val="F2EEFF"/>
                 </a:solidFill>
                 <a:latin typeface="Libre Baskerville"/>
                 <a:ea typeface="Libre Baskerville"/>
@@ -7395,7 +7754,7 @@
             <a:r>
               <a:rPr lang="en-US" sz="2000" b="1">
                 <a:solidFill>
-                  <a:srgbClr val="49495A"/>
+                  <a:srgbClr val="C4B8F5"/>
                 </a:solidFill>
                 <a:latin typeface="Libre Baskerville"/>
                 <a:ea typeface="Libre Baskerville"/>
@@ -7438,7 +7797,7 @@
             <a:r>
               <a:rPr lang="en-US" sz="1700">
                 <a:solidFill>
-                  <a:srgbClr val="49495A"/>
+                  <a:srgbClr val="C4B8F5"/>
                 </a:solidFill>
                 <a:latin typeface="Open Sans"/>
                 <a:ea typeface="Open Sans"/>
@@ -7481,7 +7840,7 @@
             <a:r>
               <a:rPr lang="en-US" sz="2400" b="1">
                 <a:solidFill>
-                  <a:srgbClr val="403CCF"/>
+                  <a:srgbClr val="9A93F5"/>
                 </a:solidFill>
                 <a:latin typeface="Libre Baskerville"/>
                 <a:ea typeface="Libre Baskerville"/>
@@ -7510,11 +7869,11 @@
             </a:avLst>
           </a:prstGeom>
           <a:solidFill>
-            <a:srgbClr val="FBFAFF"/>
+            <a:srgbClr val="14142E"/>
           </a:solidFill>
           <a:ln w="15240">
             <a:solidFill>
-              <a:srgbClr val="D0CED9"/>
+              <a:srgbClr val="1A1A2E"/>
             </a:solidFill>
             <a:prstDash val="solid"/>
           </a:ln>
@@ -7573,7 +7932,7 @@
             <a:r>
               <a:rPr lang="en-US" sz="1800" b="1">
                 <a:solidFill>
-                  <a:srgbClr val="49495A"/>
+                  <a:srgbClr val="C4B8F5"/>
                 </a:solidFill>
                 <a:latin typeface="Libre Baskerville"/>
                 <a:ea typeface="Libre Baskerville"/>
@@ -7584,7 +7943,7 @@
             <a:r>
               <a:rPr lang="en-US" sz="1800" b="1">
                 <a:solidFill>
-                  <a:srgbClr val="49495A"/>
+                  <a:srgbClr val="C4B8F5"/>
                 </a:solidFill>
                 <a:latin typeface="Libre Baskerville"/>
                 <a:ea typeface="Libre Baskerville"/>
@@ -7627,7 +7986,7 @@
             <a:r>
               <a:rPr lang="en-US" sz="1500">
                 <a:solidFill>
-                  <a:srgbClr val="49495A"/>
+                  <a:srgbClr val="C4B8F5"/>
                 </a:solidFill>
                 <a:latin typeface="Open Sans"/>
                 <a:ea typeface="Open Sans"/>
@@ -7656,11 +8015,11 @@
             </a:avLst>
           </a:prstGeom>
           <a:solidFill>
-            <a:srgbClr val="FBFAFF"/>
+            <a:srgbClr val="14142E"/>
           </a:solidFill>
           <a:ln w="15240">
             <a:solidFill>
-              <a:srgbClr val="D0CED9"/>
+              <a:srgbClr val="1A1A2E"/>
             </a:solidFill>
             <a:prstDash val="solid"/>
           </a:ln>
@@ -7719,7 +8078,7 @@
             <a:r>
               <a:rPr lang="en-US" sz="1800" b="1">
                 <a:solidFill>
-                  <a:srgbClr val="49495A"/>
+                  <a:srgbClr val="C4B8F5"/>
                 </a:solidFill>
                 <a:latin typeface="Libre Baskerville"/>
                 <a:ea typeface="Libre Baskerville"/>
@@ -7762,7 +8121,7 @@
             <a:r>
               <a:rPr lang="en-US" sz="1500">
                 <a:solidFill>
-                  <a:srgbClr val="49495A"/>
+                  <a:srgbClr val="C4B8F5"/>
                 </a:solidFill>
                 <a:latin typeface="Open Sans"/>
                 <a:ea typeface="Open Sans"/>
@@ -7791,11 +8150,11 @@
             </a:avLst>
           </a:prstGeom>
           <a:solidFill>
-            <a:srgbClr val="FBFAFF"/>
+            <a:srgbClr val="14142E"/>
           </a:solidFill>
           <a:ln w="15240">
             <a:solidFill>
-              <a:srgbClr val="D0CED9"/>
+              <a:srgbClr val="1A1A2E"/>
             </a:solidFill>
             <a:prstDash val="solid"/>
           </a:ln>
@@ -7854,7 +8213,7 @@
             <a:r>
               <a:rPr lang="en-US" sz="1800" b="1">
                 <a:solidFill>
-                  <a:srgbClr val="49495A"/>
+                  <a:srgbClr val="C4B8F5"/>
                 </a:solidFill>
                 <a:latin typeface="Libre Baskerville"/>
                 <a:ea typeface="Libre Baskerville"/>
@@ -7897,7 +8256,7 @@
             <a:r>
               <a:rPr lang="en-US" sz="1500">
                 <a:solidFill>
-                  <a:srgbClr val="49495A"/>
+                  <a:srgbClr val="C4B8F5"/>
                 </a:solidFill>
                 <a:latin typeface="Open Sans"/>
                 <a:ea typeface="Open Sans"/>
@@ -7926,11 +8285,11 @@
             </a:avLst>
           </a:prstGeom>
           <a:solidFill>
-            <a:srgbClr val="FBFAFF"/>
+            <a:srgbClr val="14142E"/>
           </a:solidFill>
           <a:ln w="15240">
             <a:solidFill>
-              <a:srgbClr val="D0CED9"/>
+              <a:srgbClr val="1A1A2E"/>
             </a:solidFill>
             <a:prstDash val="solid"/>
           </a:ln>
@@ -7989,7 +8348,7 @@
             <a:r>
               <a:rPr lang="en-US" sz="1800" b="1">
                 <a:solidFill>
-                  <a:srgbClr val="49495A"/>
+                  <a:srgbClr val="C4B8F5"/>
                 </a:solidFill>
                 <a:latin typeface="Libre Baskerville"/>
                 <a:ea typeface="Libre Baskerville"/>
@@ -8032,7 +8391,7 @@
             <a:r>
               <a:rPr lang="en-US" sz="1500">
                 <a:solidFill>
-                  <a:srgbClr val="49495A"/>
+                  <a:srgbClr val="C4B8F5"/>
                 </a:solidFill>
                 <a:latin typeface="Open Sans"/>
                 <a:ea typeface="Open Sans"/>
@@ -8061,7 +8420,7 @@
             </a:avLst>
           </a:prstGeom>
           <a:solidFill>
-            <a:srgbClr val="B6D6FC"/>
+            <a:srgbClr val="2E3E5C"/>
           </a:solidFill>
           <a:ln/>
         </p:spPr>
@@ -8119,7 +8478,7 @@
             <a:r>
               <a:rPr lang="en-US" sz="1400">
                 <a:solidFill>
-                  <a:srgbClr val="000000"/>
+                  <a:srgbClr val="F2EEFF"/>
                 </a:solidFill>
                 <a:latin typeface="Open Sans"/>
                 <a:ea typeface="Open Sans"/>
@@ -8130,7 +8489,7 @@
             <a:r>
               <a:rPr lang="en-US" sz="1400" b="1">
                 <a:solidFill>
-                  <a:srgbClr val="000000"/>
+                  <a:srgbClr val="F2EEFF"/>
                 </a:solidFill>
                 <a:latin typeface="Open Sans"/>
                 <a:ea typeface="Open Sans"/>
@@ -8141,7 +8500,7 @@
             <a:r>
               <a:rPr lang="en-US" sz="1400">
                 <a:solidFill>
-                  <a:srgbClr val="000000"/>
+                  <a:srgbClr val="F2EEFF"/>
                 </a:solidFill>
                 <a:latin typeface="Open Sans"/>
                 <a:ea typeface="Open Sans"/>
@@ -8168,7 +8527,7 @@
             <a:avLst/>
           </a:prstGeom>
           <a:solidFill>
-            <a:schemeClr val="bg1"/>
+            <a:srgbClr val="14142E"/>
           </a:solidFill>
           <a:ln w="12700" cap="flat" cmpd="sng" algn="ctr">
             <a:noFill/>
@@ -8240,7 +8599,7 @@
             <a:r>
               <a:rPr lang="en-US" sz="2000" b="1" u="none">
                 <a:solidFill>
-                  <a:srgbClr val="C00000"/>
+                  <a:srgbClr val="FF6B6B"/>
                 </a:solidFill>
                 <a:latin typeface="Libre Baskerville"/>
                 <a:ea typeface="Libre Baskerville"/>
@@ -8250,7 +8609,7 @@
             </a:r>
             <a:endParaRPr sz="2000" b="1" u="none">
               <a:solidFill>
-                <a:srgbClr val="C00000"/>
+                <a:srgbClr val="FF6B6B"/>
               </a:solidFill>
               <a:latin typeface="Libre Baskerville"/>
               <a:ea typeface="Libre Baskerville"/>
@@ -8268,7 +8627,7 @@
             <a:r>
               <a:rPr lang="en-US" sz="2000" b="1" u="none">
                 <a:solidFill>
-                  <a:srgbClr val="C00000"/>
+                  <a:srgbClr val="FF6B6B"/>
                 </a:solidFill>
                 <a:latin typeface="Libre Baskerville"/>
                 <a:ea typeface="Libre Baskerville"/>
@@ -8278,7 +8637,7 @@
             </a:r>
             <a:endParaRPr sz="2000" b="1" u="none">
               <a:solidFill>
-                <a:srgbClr val="C00000"/>
+                <a:srgbClr val="FF6B6B"/>
               </a:solidFill>
             </a:endParaRPr>
           </a:p>
@@ -8315,7 +8674,7 @@
             <a:r>
               <a:rPr lang="en-US" sz="1600" i="1">
                 <a:solidFill>
-                  <a:srgbClr val="49495A"/>
+                  <a:srgbClr val="C4B8F5"/>
                 </a:solidFill>
                 <a:latin typeface="Open Sans"/>
                 <a:ea typeface="Open Sans"/>
@@ -8349,7 +8708,7 @@
     <p:bg>
       <p:bgPr shadeToTitle="0">
         <a:solidFill>
-          <a:srgbClr val="F6F6FB"/>
+          <a:srgbClr val="0B0B14"/>
         </a:solidFill>
       </p:bgPr>
     </p:bg>
@@ -8395,7 +8754,7 @@
             <a:r>
               <a:rPr lang="en-US" sz="4200" b="1">
                 <a:solidFill>
-                  <a:srgbClr val="4F46E5"/>
+                  <a:srgbClr val="A7A0F8"/>
                 </a:solidFill>
                 <a:latin typeface="Open Sans"/>
                 <a:ea typeface="Open Sans"/>
@@ -8435,7 +8794,7 @@
             <a:r>
               <a:rPr lang="en-US" sz="2200" b="1">
                 <a:solidFill>
-                  <a:srgbClr val="1F1F2E"/>
+                  <a:srgbClr val="E7E0FF"/>
                 </a:solidFill>
                 <a:latin typeface="Open Sans"/>
                 <a:ea typeface="Open Sans"/>
@@ -8446,7 +8805,7 @@
             <a:r>
               <a:rPr lang="en-US" sz="2200" i="1">
                 <a:solidFill>
-                  <a:srgbClr val="49495A"/>
+                  <a:srgbClr val="C4B8F5"/>
                 </a:solidFill>
                 <a:latin typeface="Open Sans"/>
                 <a:ea typeface="Open Sans"/>
@@ -8473,7 +8832,7 @@
             <a:avLst/>
           </a:prstGeom>
           <a:solidFill>
-            <a:srgbClr val="C4B8F5">
+            <a:srgbClr val="3B337A">
               <a:alpha val="50000"/>
             </a:srgbClr>
           </a:solidFill>
@@ -8497,11 +8856,11 @@
             </a:avLst>
           </a:prstGeom>
           <a:solidFill>
-            <a:srgbClr val="4F46E5"/>
+            <a:srgbClr val="635AE8"/>
           </a:solidFill>
           <a:ln w="12700">
             <a:solidFill>
-              <a:srgbClr val="4F46E5"/>
+              <a:srgbClr val="635AE8"/>
             </a:solidFill>
             <a:prstDash val="solid"/>
           </a:ln>
@@ -8583,11 +8942,11 @@
             <a:avLst/>
           </a:prstGeom>
           <a:solidFill>
-            <a:srgbClr val="FFFFFF"/>
+            <a:srgbClr val="14142E"/>
           </a:solidFill>
           <a:ln w="12700">
             <a:solidFill>
-              <a:srgbClr val="FFFFFF"/>
+              <a:srgbClr val="14142E"/>
             </a:solidFill>
             <a:prstDash val="solid"/>
           </a:ln>
@@ -8610,11 +8969,11 @@
             </a:avLst>
           </a:prstGeom>
           <a:solidFill>
-            <a:srgbClr val="FFFFFF"/>
+            <a:srgbClr val="14142E"/>
           </a:solidFill>
           <a:ln w="25400">
             <a:solidFill>
-              <a:srgbClr val="C4B8F5"/>
+              <a:srgbClr val="3B337A"/>
             </a:solidFill>
             <a:prstDash val="solid"/>
           </a:ln>
@@ -8644,11 +9003,11 @@
             <a:avLst/>
           </a:prstGeom>
           <a:solidFill>
-            <a:srgbClr val="4F46E5"/>
+            <a:srgbClr val="635AE8"/>
           </a:solidFill>
           <a:ln w="12700">
             <a:solidFill>
-              <a:srgbClr val="4F46E5"/>
+              <a:srgbClr val="635AE8"/>
             </a:solidFill>
             <a:prstDash val="solid"/>
           </a:ln>
@@ -8682,7 +9041,7 @@
             <a:r>
               <a:rPr lang="en-US" sz="2000" b="1">
                 <a:solidFill>
-                  <a:srgbClr val="1F1F2E"/>
+                  <a:srgbClr val="E7E0FF"/>
                 </a:solidFill>
                 <a:latin typeface="Open Sans"/>
                 <a:ea typeface="Open Sans"/>
@@ -8693,7 +9052,7 @@
             <a:br>
               <a:rPr lang="en-US" sz="1800" b="1">
                 <a:solidFill>
-                  <a:srgbClr val="1F1F2E"/>
+                  <a:srgbClr val="E7E0FF"/>
                 </a:solidFill>
                 <a:latin typeface="Open Sans"/>
                 <a:ea typeface="Open Sans"/>
@@ -8703,7 +9062,7 @@
             <a:r>
               <a:rPr lang="en-US" sz="1600">
                 <a:solidFill>
-                  <a:srgbClr val="49495A"/>
+                  <a:srgbClr val="C4B8F5"/>
                 </a:solidFill>
                 <a:latin typeface="Open Sans"/>
                 <a:ea typeface="Open Sans"/>
@@ -8732,7 +9091,7 @@
           <a:noFill/>
           <a:ln w="25400">
             <a:solidFill>
-              <a:srgbClr val="4F46E5"/>
+              <a:srgbClr val="635AE8"/>
             </a:solidFill>
             <a:prstDash val="solid"/>
             <a:tailEnd type="triangle"/>
@@ -8756,7 +9115,7 @@
           <a:noFill/>
           <a:ln w="25400">
             <a:solidFill>
-              <a:srgbClr val="7B6FE8"/>
+              <a:srgbClr val="8F88F0"/>
             </a:solidFill>
             <a:prstDash val="dash"/>
             <a:tailEnd type="triangle"/>
@@ -8791,7 +9150,7 @@
             <a:r>
               <a:rPr lang="en-US" sz="1300" b="1" i="1">
                 <a:solidFill>
-                  <a:srgbClr val="4F46E5"/>
+                  <a:srgbClr val="A7A0F8"/>
                 </a:solidFill>
                 <a:latin typeface="Open Sans"/>
                 <a:ea typeface="Open Sans"/>
@@ -8820,11 +9179,11 @@
             </a:avLst>
           </a:prstGeom>
           <a:solidFill>
-            <a:srgbClr val="FFFFFF"/>
+            <a:srgbClr val="14142E"/>
           </a:solidFill>
           <a:ln w="25400">
             <a:solidFill>
-              <a:srgbClr val="C4B8F5"/>
+              <a:srgbClr val="3B337A"/>
             </a:solidFill>
             <a:prstDash val="solid"/>
           </a:ln>
@@ -8854,11 +9213,11 @@
             <a:avLst/>
           </a:prstGeom>
           <a:solidFill>
-            <a:srgbClr val="4F46E5"/>
+            <a:srgbClr val="635AE8"/>
           </a:solidFill>
           <a:ln w="12700">
             <a:solidFill>
-              <a:srgbClr val="4F46E5"/>
+              <a:srgbClr val="635AE8"/>
             </a:solidFill>
             <a:prstDash val="solid"/>
           </a:ln>
@@ -8892,7 +9251,7 @@
             <a:r>
               <a:rPr lang="en-US" sz="2000" b="1">
                 <a:solidFill>
-                  <a:srgbClr val="1F1F2E"/>
+                  <a:srgbClr val="E7E0FF"/>
                 </a:solidFill>
                 <a:latin typeface="Open Sans"/>
                 <a:ea typeface="Open Sans"/>
@@ -8903,7 +9262,7 @@
             <a:br>
               <a:rPr lang="en-US" sz="1800" b="1">
                 <a:solidFill>
-                  <a:srgbClr val="1F1F2E"/>
+                  <a:srgbClr val="E7E0FF"/>
                 </a:solidFill>
                 <a:latin typeface="Open Sans"/>
                 <a:ea typeface="Open Sans"/>
@@ -8913,7 +9272,7 @@
             <a:r>
               <a:rPr lang="en-US" sz="1600">
                 <a:solidFill>
-                  <a:srgbClr val="49495A"/>
+                  <a:srgbClr val="C4B8F5"/>
                 </a:solidFill>
                 <a:latin typeface="Open Sans"/>
                 <a:ea typeface="Open Sans"/>
@@ -8942,7 +9301,7 @@
           <a:noFill/>
           <a:ln w="25400">
             <a:solidFill>
-              <a:srgbClr val="4F46E5"/>
+              <a:srgbClr val="635AE8"/>
             </a:solidFill>
             <a:prstDash val="solid"/>
             <a:tailEnd type="triangle"/>
@@ -8966,7 +9325,7 @@
           <a:noFill/>
           <a:ln w="25400">
             <a:solidFill>
-              <a:srgbClr val="7B6FE8"/>
+              <a:srgbClr val="8F88F0"/>
             </a:solidFill>
             <a:prstDash val="dash"/>
             <a:tailEnd type="triangle"/>
@@ -9001,7 +9360,7 @@
             <a:r>
               <a:rPr lang="en-US" sz="1300" b="1" i="1">
                 <a:solidFill>
-                  <a:srgbClr val="4F46E5"/>
+                  <a:srgbClr val="A7A0F8"/>
                 </a:solidFill>
                 <a:latin typeface="Open Sans"/>
                 <a:ea typeface="Open Sans"/>
@@ -9030,11 +9389,11 @@
             </a:avLst>
           </a:prstGeom>
           <a:solidFill>
-            <a:srgbClr val="FFFFFF"/>
+            <a:srgbClr val="14142E"/>
           </a:solidFill>
           <a:ln w="25400">
             <a:solidFill>
-              <a:srgbClr val="C4B8F5"/>
+              <a:srgbClr val="3B337A"/>
             </a:solidFill>
             <a:prstDash val="solid"/>
           </a:ln>
@@ -9055,11 +9414,11 @@
             <a:avLst/>
           </a:prstGeom>
           <a:solidFill>
-            <a:srgbClr val="4F46E5"/>
+            <a:srgbClr val="635AE8"/>
           </a:solidFill>
           <a:ln w="12700">
             <a:solidFill>
-              <a:srgbClr val="4F46E5"/>
+              <a:srgbClr val="635AE8"/>
             </a:solidFill>
             <a:prstDash val="solid"/>
           </a:ln>
@@ -9093,7 +9452,7 @@
             <a:r>
               <a:rPr lang="en-US" sz="2000" b="1">
                 <a:solidFill>
-                  <a:srgbClr val="1F1F2E"/>
+                  <a:srgbClr val="E7E0FF"/>
                 </a:solidFill>
                 <a:latin typeface="Open Sans"/>
                 <a:ea typeface="Open Sans"/>
@@ -9104,7 +9463,7 @@
             <a:br>
               <a:rPr lang="en-US" sz="2000" b="1">
                 <a:solidFill>
-                  <a:srgbClr val="1F1F2E"/>
+                  <a:srgbClr val="E7E0FF"/>
                 </a:solidFill>
                 <a:latin typeface="Open Sans"/>
                 <a:ea typeface="Open Sans"/>
@@ -9114,7 +9473,7 @@
             <a:r>
               <a:rPr lang="en-US" sz="1600">
                 <a:solidFill>
-                  <a:srgbClr val="49495A"/>
+                  <a:srgbClr val="C4B8F5"/>
                 </a:solidFill>
                 <a:latin typeface="Open Sans"/>
                 <a:ea typeface="Open Sans"/>
@@ -9143,7 +9502,7 @@
           <a:noFill/>
           <a:ln w="25400">
             <a:solidFill>
-              <a:srgbClr val="4F46E5"/>
+              <a:srgbClr val="635AE8"/>
             </a:solidFill>
             <a:prstDash val="solid"/>
             <a:tailEnd type="triangle"/>
@@ -9167,7 +9526,7 @@
           <a:noFill/>
           <a:ln w="25400">
             <a:solidFill>
-              <a:srgbClr val="7B6FE8"/>
+              <a:srgbClr val="8F88F0"/>
             </a:solidFill>
             <a:prstDash val="dash"/>
             <a:tailEnd type="triangle"/>
@@ -9202,7 +9561,7 @@
             <a:r>
               <a:rPr lang="en-US" sz="1300" b="1" i="1">
                 <a:solidFill>
-                  <a:srgbClr val="4F46E5"/>
+                  <a:srgbClr val="A7A0F8"/>
                 </a:solidFill>
                 <a:latin typeface="Open Sans"/>
                 <a:ea typeface="Open Sans"/>
@@ -9231,11 +9590,11 @@
             </a:avLst>
           </a:prstGeom>
           <a:solidFill>
-            <a:srgbClr val="FFFFFF"/>
+            <a:srgbClr val="14142E"/>
           </a:solidFill>
           <a:ln w="25400">
             <a:solidFill>
-              <a:srgbClr val="C4B8F5"/>
+              <a:srgbClr val="3B337A"/>
             </a:solidFill>
             <a:prstDash val="solid"/>
           </a:ln>
@@ -9265,11 +9624,11 @@
             <a:avLst/>
           </a:prstGeom>
           <a:solidFill>
-            <a:srgbClr val="4F46E5"/>
+            <a:srgbClr val="635AE8"/>
           </a:solidFill>
           <a:ln w="12700">
             <a:solidFill>
-              <a:srgbClr val="4F46E5"/>
+              <a:srgbClr val="635AE8"/>
             </a:solidFill>
             <a:prstDash val="solid"/>
           </a:ln>
@@ -9303,7 +9662,7 @@
             <a:r>
               <a:rPr lang="en-US" sz="2000" b="1">
                 <a:solidFill>
-                  <a:srgbClr val="1F1F2E"/>
+                  <a:srgbClr val="E7E0FF"/>
                 </a:solidFill>
                 <a:latin typeface="Open Sans"/>
                 <a:ea typeface="Open Sans"/>
@@ -9314,7 +9673,7 @@
             <a:br>
               <a:rPr lang="en-US" sz="2000" b="1">
                 <a:solidFill>
-                  <a:srgbClr val="1F1F2E"/>
+                  <a:srgbClr val="E7E0FF"/>
                 </a:solidFill>
                 <a:latin typeface="Open Sans"/>
                 <a:ea typeface="Open Sans"/>
@@ -9324,7 +9683,7 @@
             <a:r>
               <a:rPr lang="en-US" sz="1600">
                 <a:solidFill>
-                  <a:srgbClr val="49495A"/>
+                  <a:srgbClr val="C4B8F5"/>
                 </a:solidFill>
                 <a:latin typeface="Open Sans"/>
                 <a:ea typeface="Open Sans"/>
@@ -9353,7 +9712,7 @@
           <a:noFill/>
           <a:ln w="25400">
             <a:solidFill>
-              <a:srgbClr val="4F46E5"/>
+              <a:srgbClr val="635AE8"/>
             </a:solidFill>
             <a:prstDash val="solid"/>
             <a:tailEnd type="triangle"/>
@@ -9377,7 +9736,7 @@
           <a:noFill/>
           <a:ln w="25400">
             <a:solidFill>
-              <a:srgbClr val="7B6FE8"/>
+              <a:srgbClr val="8F88F0"/>
             </a:solidFill>
             <a:prstDash val="dash"/>
             <a:tailEnd type="triangle"/>
@@ -9412,7 +9771,7 @@
             <a:r>
               <a:rPr lang="en-US" sz="1300" b="1" i="1">
                 <a:solidFill>
-                  <a:srgbClr val="4F46E5"/>
+                  <a:srgbClr val="A7A0F8"/>
                 </a:solidFill>
                 <a:latin typeface="Open Sans"/>
                 <a:ea typeface="Open Sans"/>
@@ -9441,11 +9800,11 @@
             </a:avLst>
           </a:prstGeom>
           <a:solidFill>
-            <a:srgbClr val="FFFFFF"/>
+            <a:srgbClr val="14142E"/>
           </a:solidFill>
           <a:ln w="12700">
             <a:solidFill>
-              <a:srgbClr val="C4B8F5"/>
+              <a:srgbClr val="3B337A"/>
             </a:solidFill>
             <a:prstDash val="solid"/>
           </a:ln>
@@ -9468,7 +9827,7 @@
           <a:noFill/>
           <a:ln w="25400">
             <a:solidFill>
-              <a:srgbClr val="4F46E5"/>
+              <a:srgbClr val="635AE8"/>
             </a:solidFill>
             <a:prstDash val="solid"/>
             <a:tailEnd type="triangle"/>
@@ -9503,7 +9862,7 @@
             <a:r>
               <a:rPr lang="en-US" sz="1500">
                 <a:solidFill>
-                  <a:srgbClr val="1F1F2E"/>
+                  <a:srgbClr val="E7E0FF"/>
                 </a:solidFill>
                 <a:latin typeface="Open Sans"/>
                 <a:ea typeface="Open Sans"/>
@@ -9532,7 +9891,7 @@
           <a:noFill/>
           <a:ln w="25400">
             <a:solidFill>
-              <a:srgbClr val="7B6FE8"/>
+              <a:srgbClr val="8F88F0"/>
             </a:solidFill>
             <a:prstDash val="dash"/>
             <a:tailEnd type="triangle"/>
@@ -9567,7 +9926,7 @@
             <a:r>
               <a:rPr lang="en-US" sz="1500">
                 <a:solidFill>
-                  <a:srgbClr val="1F1F2E"/>
+                  <a:srgbClr val="E7E0FF"/>
                 </a:solidFill>
                 <a:latin typeface="Open Sans"/>
                 <a:ea typeface="Open Sans"/>
@@ -9594,7 +9953,7 @@
             <a:avLst/>
           </a:prstGeom>
           <a:solidFill>
-            <a:schemeClr val="bg1"/>
+            <a:srgbClr val="14142E"/>
           </a:solidFill>
           <a:ln w="12700" cap="flat" cmpd="sng" algn="ctr">
             <a:noFill/>
@@ -9699,7 +10058,7 @@
             <a:r>
               <a:rPr lang="en-US" sz="4200" b="1">
                 <a:solidFill>
-                  <a:srgbClr val="403CCF"/>
+                  <a:srgbClr val="9A93F5"/>
                 </a:solidFill>
                 <a:latin typeface="Libre Baskerville"/>
                 <a:ea typeface="Libre Baskerville"/>
@@ -9742,7 +10101,7 @@
             <a:r>
               <a:rPr lang="en-US" sz="2200">
                 <a:solidFill>
-                  <a:srgbClr val="403CCF"/>
+                  <a:srgbClr val="9A93F5"/>
                 </a:solidFill>
                 <a:latin typeface="Libre Baskerville"/>
                 <a:ea typeface="Libre Baskerville"/>
@@ -9771,7 +10130,7 @@
             </a:avLst>
           </a:prstGeom>
           <a:solidFill>
-            <a:srgbClr val="EAE8F3"/>
+            <a:srgbClr val="1A1A2E"/>
           </a:solidFill>
           <a:ln/>
         </p:spPr>
@@ -9857,7 +10216,7 @@
             <a:r>
               <a:rPr lang="en-US" sz="1900" i="1" u="sng">
                 <a:solidFill>
-                  <a:srgbClr val="49495A"/>
+                  <a:srgbClr val="C4B8F5"/>
                 </a:solidFill>
                 <a:latin typeface="Libre Baskerville"/>
                 <a:ea typeface="Libre Baskerville"/>
@@ -9900,7 +10259,7 @@
             <a:r>
               <a:rPr lang="en-US" sz="1600">
                 <a:solidFill>
-                  <a:srgbClr val="49495A"/>
+                  <a:srgbClr val="C4B8F5"/>
                 </a:solidFill>
                 <a:latin typeface="Open Sans"/>
                 <a:ea typeface="Open Sans"/>
@@ -9929,7 +10288,7 @@
             </a:avLst>
           </a:prstGeom>
           <a:solidFill>
-            <a:srgbClr val="EAE8F3"/>
+            <a:srgbClr val="1A1A2E"/>
           </a:solidFill>
           <a:ln/>
         </p:spPr>
@@ -10015,7 +10374,7 @@
             <a:r>
               <a:rPr lang="en-US" sz="1900" i="1" u="sng">
                 <a:solidFill>
-                  <a:srgbClr val="49495A"/>
+                  <a:srgbClr val="C4B8F5"/>
                 </a:solidFill>
                 <a:latin typeface="Libre Baskerville"/>
                 <a:ea typeface="Libre Baskerville"/>
@@ -10058,7 +10417,7 @@
             <a:r>
               <a:rPr lang="en-US" sz="1600">
                 <a:solidFill>
-                  <a:srgbClr val="49495A"/>
+                  <a:srgbClr val="C4B8F5"/>
                 </a:solidFill>
                 <a:latin typeface="Open Sans"/>
                 <a:ea typeface="Open Sans"/>
@@ -10087,7 +10446,7 @@
             </a:avLst>
           </a:prstGeom>
           <a:solidFill>
-            <a:srgbClr val="EAE8F3"/>
+            <a:srgbClr val="1A1A2E"/>
           </a:solidFill>
           <a:ln/>
         </p:spPr>
@@ -10173,7 +10532,7 @@
             <a:r>
               <a:rPr lang="en-US" sz="1900" i="1" u="sng">
                 <a:solidFill>
-                  <a:srgbClr val="49495A"/>
+                  <a:srgbClr val="C4B8F5"/>
                 </a:solidFill>
                 <a:latin typeface="Libre Baskerville"/>
                 <a:ea typeface="Libre Baskerville"/>
@@ -10216,7 +10575,7 @@
             <a:r>
               <a:rPr lang="en-US" sz="1600">
                 <a:solidFill>
-                  <a:srgbClr val="49495A"/>
+                  <a:srgbClr val="C4B8F5"/>
                 </a:solidFill>
                 <a:latin typeface="Open Sans"/>
                 <a:ea typeface="Open Sans"/>
@@ -10245,7 +10604,7 @@
             </a:avLst>
           </a:prstGeom>
           <a:solidFill>
-            <a:srgbClr val="EAE8F3"/>
+            <a:srgbClr val="1A1A2E"/>
           </a:solidFill>
           <a:ln/>
         </p:spPr>
@@ -10331,7 +10690,7 @@
             <a:r>
               <a:rPr lang="en-US" sz="1900" i="1" u="sng">
                 <a:solidFill>
-                  <a:srgbClr val="49495A"/>
+                  <a:srgbClr val="C4B8F5"/>
                 </a:solidFill>
                 <a:latin typeface="Libre Baskerville"/>
                 <a:ea typeface="Libre Baskerville"/>
@@ -10374,7 +10733,7 @@
             <a:r>
               <a:rPr lang="en-US" sz="1600">
                 <a:solidFill>
-                  <a:srgbClr val="49495A"/>
+                  <a:srgbClr val="C4B8F5"/>
                 </a:solidFill>
                 <a:latin typeface="Open Sans"/>
                 <a:ea typeface="Open Sans"/>
@@ -10417,7 +10776,7 @@
             <a:r>
               <a:rPr lang="en-US" sz="2200" b="1">
                 <a:solidFill>
-                  <a:srgbClr val="403CCF"/>
+                  <a:srgbClr val="9A93F5"/>
                 </a:solidFill>
                 <a:latin typeface="Libre Baskerville"/>
                 <a:ea typeface="Libre Baskerville"/>
@@ -10460,7 +10819,7 @@
             <a:r>
               <a:rPr lang="en-US" sz="1600">
                 <a:solidFill>
-                  <a:srgbClr val="49495A"/>
+                  <a:srgbClr val="C4B8F5"/>
                 </a:solidFill>
                 <a:latin typeface="Open Sans"/>
                 <a:ea typeface="Open Sans"/>
@@ -10503,7 +10862,7 @@
             <a:r>
               <a:rPr lang="en-US" sz="2200" b="1">
                 <a:solidFill>
-                  <a:srgbClr val="403CCF"/>
+                  <a:srgbClr val="9A93F5"/>
                 </a:solidFill>
                 <a:latin typeface="Libre Baskerville"/>
                 <a:ea typeface="Libre Baskerville"/>
@@ -10546,7 +10905,7 @@
             <a:r>
               <a:rPr lang="en-US" sz="1600">
                 <a:solidFill>
-                  <a:srgbClr val="49495A"/>
+                  <a:srgbClr val="C4B8F5"/>
                 </a:solidFill>
                 <a:latin typeface="Open Sans"/>
                 <a:ea typeface="Open Sans"/>
@@ -10589,7 +10948,7 @@
             <a:r>
               <a:rPr lang="en-US" sz="1600">
                 <a:solidFill>
-                  <a:srgbClr val="49495A"/>
+                  <a:srgbClr val="C4B8F5"/>
                 </a:solidFill>
                 <a:latin typeface="Open Sans"/>
                 <a:ea typeface="Open Sans"/>
@@ -10616,7 +10975,7 @@
             <a:avLst/>
           </a:prstGeom>
           <a:solidFill>
-            <a:srgbClr val="403CCF"/>
+            <a:srgbClr val="5A52DC"/>
           </a:solidFill>
           <a:ln/>
         </p:spPr>
@@ -10636,7 +10995,7 @@
             <a:avLst/>
           </a:prstGeom>
           <a:solidFill>
-            <a:schemeClr val="bg1"/>
+            <a:srgbClr val="14142E"/>
           </a:solidFill>
           <a:ln w="12700" cap="flat" cmpd="sng" algn="ctr">
             <a:noFill/>
@@ -10741,7 +11100,7 @@
             <a:r>
               <a:rPr lang="en-US" sz="4200" b="1">
                 <a:solidFill>
-                  <a:srgbClr val="403CCF"/>
+                  <a:srgbClr val="9A93F5"/>
                 </a:solidFill>
                 <a:latin typeface="Libre Baskerville"/>
                 <a:ea typeface="Libre Baskerville"/>
@@ -10772,7 +11131,7 @@
           <a:noFill/>
           <a:ln w="7620">
             <a:solidFill>
-              <a:srgbClr val="000000">
+              <a:srgbClr val="0B0B14">
                 <a:alpha val="7999"/>
               </a:srgbClr>
             </a:solidFill>
@@ -10811,7 +11170,7 @@
             <a:r>
               <a:rPr lang="en-US" sz="1600" b="1">
                 <a:solidFill>
-                  <a:srgbClr val="49495A"/>
+                  <a:srgbClr val="C4B8F5"/>
                 </a:solidFill>
                 <a:latin typeface="Open Sans"/>
                 <a:ea typeface="Open Sans"/>
@@ -10854,7 +11213,7 @@
             <a:r>
               <a:rPr lang="en-US" sz="1600" b="1">
                 <a:solidFill>
-                  <a:srgbClr val="49495A"/>
+                  <a:srgbClr val="C4B8F5"/>
                 </a:solidFill>
                 <a:latin typeface="Open Sans"/>
                 <a:ea typeface="Open Sans"/>
@@ -10897,7 +11256,7 @@
             <a:r>
               <a:rPr lang="en-US" sz="1600" b="1">
                 <a:solidFill>
-                  <a:srgbClr val="49495A"/>
+                  <a:srgbClr val="C4B8F5"/>
                 </a:solidFill>
                 <a:latin typeface="Open Sans"/>
                 <a:ea typeface="Open Sans"/>
@@ -10940,7 +11299,7 @@
             <a:r>
               <a:rPr lang="en-US" sz="1600">
                 <a:solidFill>
-                  <a:srgbClr val="49495A"/>
+                  <a:srgbClr val="C4B8F5"/>
                 </a:solidFill>
                 <a:latin typeface="Open Sans"/>
                 <a:ea typeface="Open Sans"/>
@@ -10983,7 +11342,7 @@
             <a:r>
               <a:rPr lang="en-US" sz="1600">
                 <a:solidFill>
-                  <a:srgbClr val="49495A"/>
+                  <a:srgbClr val="C4B8F5"/>
                 </a:solidFill>
                 <a:latin typeface="Open Sans"/>
                 <a:ea typeface="Open Sans"/>
@@ -11026,7 +11385,7 @@
             <a:r>
               <a:rPr lang="en-US" sz="1600">
                 <a:solidFill>
-                  <a:srgbClr val="49495A"/>
+                  <a:srgbClr val="C4B8F5"/>
                 </a:solidFill>
                 <a:latin typeface="Open Sans"/>
                 <a:ea typeface="Open Sans"/>
@@ -11069,7 +11428,7 @@
             <a:r>
               <a:rPr lang="en-US" sz="1600">
                 <a:solidFill>
-                  <a:srgbClr val="49495A"/>
+                  <a:srgbClr val="C4B8F5"/>
                 </a:solidFill>
                 <a:latin typeface="Open Sans"/>
                 <a:ea typeface="Open Sans"/>
@@ -11112,7 +11471,7 @@
             <a:r>
               <a:rPr lang="en-US" sz="1600">
                 <a:solidFill>
-                  <a:srgbClr val="49495A"/>
+                  <a:srgbClr val="C4B8F5"/>
                 </a:solidFill>
                 <a:latin typeface="Open Sans"/>
                 <a:ea typeface="Open Sans"/>
@@ -11155,7 +11514,7 @@
             <a:r>
               <a:rPr lang="en-US" sz="1600">
                 <a:solidFill>
-                  <a:srgbClr val="49495A"/>
+                  <a:srgbClr val="C4B8F5"/>
                 </a:solidFill>
                 <a:latin typeface="Open Sans"/>
                 <a:ea typeface="Open Sans"/>
@@ -11198,7 +11557,7 @@
             <a:r>
               <a:rPr lang="en-US" sz="1600">
                 <a:solidFill>
-                  <a:srgbClr val="49495A"/>
+                  <a:srgbClr val="C4B8F5"/>
                 </a:solidFill>
                 <a:latin typeface="Open Sans"/>
                 <a:ea typeface="Open Sans"/>
@@ -11241,7 +11600,7 @@
             <a:r>
               <a:rPr lang="en-US" sz="1600">
                 <a:solidFill>
-                  <a:srgbClr val="49495A"/>
+                  <a:srgbClr val="C4B8F5"/>
                 </a:solidFill>
                 <a:latin typeface="Open Sans"/>
                 <a:ea typeface="Open Sans"/>
@@ -11284,7 +11643,7 @@
             <a:r>
               <a:rPr lang="en-US" sz="1600">
                 <a:solidFill>
-                  <a:srgbClr val="49495A"/>
+                  <a:srgbClr val="C4B8F5"/>
                 </a:solidFill>
                 <a:latin typeface="Open Sans"/>
                 <a:ea typeface="Open Sans"/>
@@ -11327,7 +11686,7 @@
             <a:r>
               <a:rPr lang="en-US" sz="1600">
                 <a:solidFill>
-                  <a:srgbClr val="49495A"/>
+                  <a:srgbClr val="C4B8F5"/>
                 </a:solidFill>
                 <a:latin typeface="Open Sans"/>
                 <a:ea typeface="Open Sans"/>
@@ -11370,7 +11729,7 @@
             <a:r>
               <a:rPr lang="en-US" sz="1600">
                 <a:solidFill>
-                  <a:srgbClr val="49495A"/>
+                  <a:srgbClr val="C4B8F5"/>
                 </a:solidFill>
                 <a:latin typeface="Open Sans"/>
                 <a:ea typeface="Open Sans"/>
@@ -11413,7 +11772,7 @@
             <a:r>
               <a:rPr lang="en-US" sz="1600">
                 <a:solidFill>
-                  <a:srgbClr val="49495A"/>
+                  <a:srgbClr val="C4B8F5"/>
                 </a:solidFill>
                 <a:latin typeface="Open Sans"/>
                 <a:ea typeface="Open Sans"/>
@@ -11456,7 +11815,7 @@
             <a:r>
               <a:rPr lang="en-US" sz="1600">
                 <a:solidFill>
-                  <a:srgbClr val="49495A"/>
+                  <a:srgbClr val="C4B8F5"/>
                 </a:solidFill>
                 <a:latin typeface="Open Sans"/>
                 <a:ea typeface="Open Sans"/>
@@ -11499,7 +11858,7 @@
             <a:r>
               <a:rPr lang="en-US" sz="1600">
                 <a:solidFill>
-                  <a:srgbClr val="49495A"/>
+                  <a:srgbClr val="C4B8F5"/>
                 </a:solidFill>
                 <a:latin typeface="Open Sans"/>
                 <a:ea typeface="Open Sans"/>
@@ -11542,7 +11901,7 @@
             <a:r>
               <a:rPr lang="en-US" sz="1600">
                 <a:solidFill>
-                  <a:srgbClr val="49495A"/>
+                  <a:srgbClr val="C4B8F5"/>
                 </a:solidFill>
                 <a:latin typeface="Open Sans"/>
                 <a:ea typeface="Open Sans"/>
@@ -11585,7 +11944,7 @@
             <a:r>
               <a:rPr lang="en-US" sz="1600">
                 <a:solidFill>
-                  <a:srgbClr val="49495A"/>
+                  <a:srgbClr val="C4B8F5"/>
                 </a:solidFill>
                 <a:latin typeface="Open Sans"/>
                 <a:ea typeface="Open Sans"/>
@@ -11628,7 +11987,7 @@
             <a:r>
               <a:rPr lang="en-US" sz="1600">
                 <a:solidFill>
-                  <a:srgbClr val="49495A"/>
+                  <a:srgbClr val="C4B8F5"/>
                 </a:solidFill>
                 <a:latin typeface="Open Sans"/>
                 <a:ea typeface="Open Sans"/>
@@ -11671,7 +12030,7 @@
             <a:r>
               <a:rPr lang="en-US" sz="1600">
                 <a:solidFill>
-                  <a:srgbClr val="49495A"/>
+                  <a:srgbClr val="C4B8F5"/>
                 </a:solidFill>
                 <a:latin typeface="Open Sans"/>
                 <a:ea typeface="Open Sans"/>
@@ -11714,7 +12073,7 @@
             <a:r>
               <a:rPr lang="en-US" sz="1600">
                 <a:solidFill>
-                  <a:srgbClr val="49495A"/>
+                  <a:srgbClr val="C4B8F5"/>
                 </a:solidFill>
                 <a:latin typeface="Open Sans"/>
                 <a:ea typeface="Open Sans"/>
@@ -11757,7 +12116,7 @@
             <a:r>
               <a:rPr lang="en-US" sz="1600">
                 <a:solidFill>
-                  <a:srgbClr val="49495A"/>
+                  <a:srgbClr val="C4B8F5"/>
                 </a:solidFill>
                 <a:latin typeface="Open Sans"/>
                 <a:ea typeface="Open Sans"/>
@@ -11800,7 +12159,7 @@
             <a:r>
               <a:rPr lang="en-US" sz="1600">
                 <a:solidFill>
-                  <a:srgbClr val="49495A"/>
+                  <a:srgbClr val="C4B8F5"/>
                 </a:solidFill>
                 <a:latin typeface="Open Sans"/>
                 <a:ea typeface="Open Sans"/>
@@ -11843,7 +12202,7 @@
             <a:r>
               <a:rPr lang="en-US" sz="1600">
                 <a:solidFill>
-                  <a:srgbClr val="49495A"/>
+                  <a:srgbClr val="C4B8F5"/>
                 </a:solidFill>
                 <a:latin typeface="Open Sans"/>
                 <a:ea typeface="Open Sans"/>
@@ -11886,7 +12245,7 @@
             <a:r>
               <a:rPr lang="en-US" sz="1600">
                 <a:solidFill>
-                  <a:srgbClr val="49495A"/>
+                  <a:srgbClr val="C4B8F5"/>
                 </a:solidFill>
                 <a:latin typeface="Open Sans"/>
                 <a:ea typeface="Open Sans"/>
@@ -11929,7 +12288,7 @@
             <a:r>
               <a:rPr lang="en-US" sz="1600">
                 <a:solidFill>
-                  <a:srgbClr val="49495A"/>
+                  <a:srgbClr val="C4B8F5"/>
                 </a:solidFill>
                 <a:latin typeface="Open Sans"/>
                 <a:ea typeface="Open Sans"/>
@@ -11958,7 +12317,7 @@
             </a:avLst>
           </a:prstGeom>
           <a:solidFill>
-            <a:srgbClr val="EAE8F3"/>
+            <a:srgbClr val="1A1A2E"/>
           </a:solidFill>
           <a:ln/>
         </p:spPr>
@@ -11994,7 +12353,7 @@
             <a:r>
               <a:rPr lang="en-US" sz="1900">
                 <a:solidFill>
-                  <a:srgbClr val="49495A"/>
+                  <a:srgbClr val="C4B8F5"/>
                 </a:solidFill>
                 <a:latin typeface="Libre Baskerville"/>
                 <a:ea typeface="Libre Baskerville"/>
@@ -12037,7 +12396,7 @@
             <a:r>
               <a:rPr lang="en-US" sz="1500">
                 <a:solidFill>
-                  <a:srgbClr val="49495A"/>
+                  <a:srgbClr val="C4B8F5"/>
                 </a:solidFill>
                 <a:latin typeface="Open Sans"/>
                 <a:ea typeface="Open Sans"/>
@@ -12066,7 +12425,7 @@
             </a:avLst>
           </a:prstGeom>
           <a:solidFill>
-            <a:srgbClr val="EAE8F3"/>
+            <a:srgbClr val="1A1A2E"/>
           </a:solidFill>
           <a:ln/>
         </p:spPr>
@@ -12102,7 +12461,7 @@
             <a:r>
               <a:rPr lang="en-US" sz="1900">
                 <a:solidFill>
-                  <a:srgbClr val="49495A"/>
+                  <a:srgbClr val="C4B8F5"/>
                 </a:solidFill>
                 <a:latin typeface="Libre Baskerville"/>
                 <a:ea typeface="Libre Baskerville"/>
@@ -12145,7 +12504,7 @@
             <a:r>
               <a:rPr lang="en-US" sz="1500">
                 <a:solidFill>
-                  <a:srgbClr val="49495A"/>
+                  <a:srgbClr val="C4B8F5"/>
                 </a:solidFill>
                 <a:latin typeface="Open Sans"/>
                 <a:ea typeface="Open Sans"/>
@@ -12174,7 +12533,7 @@
             </a:avLst>
           </a:prstGeom>
           <a:solidFill>
-            <a:srgbClr val="EAE8F3"/>
+            <a:srgbClr val="1A1A2E"/>
           </a:solidFill>
           <a:ln/>
         </p:spPr>
@@ -12210,7 +12569,7 @@
             <a:r>
               <a:rPr lang="en-US" sz="1900">
                 <a:solidFill>
-                  <a:srgbClr val="49495A"/>
+                  <a:srgbClr val="C4B8F5"/>
                 </a:solidFill>
                 <a:latin typeface="Libre Baskerville"/>
                 <a:ea typeface="Libre Baskerville"/>
@@ -12253,7 +12612,7 @@
             <a:r>
               <a:rPr lang="en-US" sz="1500">
                 <a:solidFill>
-                  <a:srgbClr val="49495A"/>
+                  <a:srgbClr val="C4B8F5"/>
                 </a:solidFill>
                 <a:latin typeface="Open Sans"/>
                 <a:ea typeface="Open Sans"/>
@@ -12280,7 +12639,7 @@
             <a:avLst/>
           </a:prstGeom>
           <a:solidFill>
-            <a:schemeClr val="bg1"/>
+            <a:srgbClr val="14142E"/>
           </a:solidFill>
           <a:ln w="12700" cap="flat" cmpd="sng" algn="ctr">
             <a:noFill/>
@@ -12385,7 +12744,7 @@
             <a:r>
               <a:rPr lang="en-US" sz="4200" b="1">
                 <a:solidFill>
-                  <a:srgbClr val="403CCF"/>
+                  <a:srgbClr val="9A93F5"/>
                 </a:solidFill>
                 <a:latin typeface="Libre Baskerville"/>
                 <a:ea typeface="Libre Baskerville"/>
@@ -12428,7 +12787,7 @@
             <a:r>
               <a:rPr lang="en-US" sz="2400">
                 <a:solidFill>
-                  <a:srgbClr val="5955EB"/>
+                  <a:srgbClr val="ADA8F9"/>
                 </a:solidFill>
                 <a:latin typeface="Libre Baskerville"/>
                 <a:ea typeface="Libre Baskerville"/>
@@ -12439,7 +12798,7 @@
             <a:r>
               <a:rPr lang="en-US" sz="2400">
                 <a:solidFill>
-                  <a:srgbClr val="403CCF"/>
+                  <a:srgbClr val="9A93F5"/>
                 </a:solidFill>
                 <a:latin typeface="Libre Baskerville"/>
                 <a:ea typeface="Libre Baskerville"/>
@@ -12468,7 +12827,7 @@
             </a:avLst>
           </a:prstGeom>
           <a:solidFill>
-            <a:srgbClr val="EAE8F3"/>
+            <a:srgbClr val="1A1A2E"/>
           </a:solidFill>
           <a:ln/>
         </p:spPr>
@@ -12490,7 +12849,7 @@
             </a:avLst>
           </a:prstGeom>
           <a:solidFill>
-            <a:srgbClr val="EAE8F3"/>
+            <a:srgbClr val="1A1A2E"/>
           </a:solidFill>
           <a:ln/>
         </p:spPr>
@@ -12554,7 +12913,7 @@
             <a:r>
               <a:rPr lang="en-US" sz="2150">
                 <a:solidFill>
-                  <a:srgbClr val="49495A"/>
+                  <a:srgbClr val="C4B8F5"/>
                 </a:solidFill>
                 <a:latin typeface="Libre Baskerville"/>
                 <a:ea typeface="Libre Baskerville"/>
@@ -12597,7 +12956,7 @@
             <a:r>
               <a:rPr lang="en-US" sz="1700">
                 <a:solidFill>
-                  <a:srgbClr val="49495A"/>
+                  <a:srgbClr val="C4B8F5"/>
                 </a:solidFill>
                 <a:latin typeface="Open Sans"/>
                 <a:ea typeface="Open Sans"/>
@@ -12608,7 +12967,7 @@
             <a:r>
               <a:rPr lang="en-US" sz="1700">
                 <a:solidFill>
-                  <a:srgbClr val="49495A"/>
+                  <a:srgbClr val="C4B8F5"/>
                 </a:solidFill>
                 <a:highlight>
                   <a:srgbClr val="EEEDF2"/>
@@ -12622,7 +12981,7 @@
             <a:r>
               <a:rPr lang="en-US" sz="1700">
                 <a:solidFill>
-                  <a:srgbClr val="49495A"/>
+                  <a:srgbClr val="C4B8F5"/>
                 </a:solidFill>
                 <a:latin typeface="Open Sans"/>
                 <a:ea typeface="Open Sans"/>
@@ -12633,7 +12992,7 @@
             <a:r>
               <a:rPr lang="en-US" sz="1700" b="1">
                 <a:solidFill>
-                  <a:srgbClr val="49495A"/>
+                  <a:srgbClr val="C4B8F5"/>
                 </a:solidFill>
                 <a:latin typeface="Open Sans"/>
                 <a:ea typeface="Open Sans"/>
@@ -12644,7 +13003,7 @@
             <a:r>
               <a:rPr lang="en-US" sz="1700">
                 <a:solidFill>
-                  <a:srgbClr val="49495A"/>
+                  <a:srgbClr val="C4B8F5"/>
                 </a:solidFill>
                 <a:latin typeface="Open Sans"/>
                 <a:ea typeface="Open Sans"/>
@@ -12673,7 +13032,7 @@
             </a:avLst>
           </a:prstGeom>
           <a:solidFill>
-            <a:srgbClr val="EAE8F3"/>
+            <a:srgbClr val="1A1A2E"/>
           </a:solidFill>
           <a:ln/>
         </p:spPr>
@@ -12695,7 +13054,7 @@
             </a:avLst>
           </a:prstGeom>
           <a:solidFill>
-            <a:srgbClr val="EAE8F3"/>
+            <a:srgbClr val="1A1A2E"/>
           </a:solidFill>
           <a:ln/>
         </p:spPr>
@@ -12759,7 +13118,7 @@
             <a:r>
               <a:rPr lang="en-US" sz="2150">
                 <a:solidFill>
-                  <a:srgbClr val="49495A"/>
+                  <a:srgbClr val="C4B8F5"/>
                 </a:solidFill>
                 <a:latin typeface="Libre Baskerville"/>
                 <a:ea typeface="Libre Baskerville"/>
@@ -12802,7 +13161,7 @@
             <a:r>
               <a:rPr lang="en-US" sz="1700">
                 <a:solidFill>
-                  <a:srgbClr val="49495A"/>
+                  <a:srgbClr val="C4B8F5"/>
                 </a:solidFill>
                 <a:latin typeface="Open Sans"/>
                 <a:ea typeface="Open Sans"/>
@@ -12813,7 +13172,7 @@
             <a:r>
               <a:rPr lang="en-US" sz="1700" b="1">
                 <a:solidFill>
-                  <a:srgbClr val="49495A"/>
+                  <a:srgbClr val="C4B8F5"/>
                 </a:solidFill>
                 <a:latin typeface="Open Sans"/>
                 <a:ea typeface="Open Sans"/>
@@ -12824,7 +13183,7 @@
             <a:r>
               <a:rPr lang="en-US" sz="1700">
                 <a:solidFill>
-                  <a:srgbClr val="49495A"/>
+                  <a:srgbClr val="C4B8F5"/>
                 </a:solidFill>
                 <a:latin typeface="Open Sans"/>
                 <a:ea typeface="Open Sans"/>
@@ -12853,7 +13212,7 @@
             </a:avLst>
           </a:prstGeom>
           <a:solidFill>
-            <a:srgbClr val="EAE8F3"/>
+            <a:srgbClr val="1A1A2E"/>
           </a:solidFill>
           <a:ln/>
         </p:spPr>
@@ -12875,7 +13234,7 @@
             </a:avLst>
           </a:prstGeom>
           <a:solidFill>
-            <a:srgbClr val="EAE8F3"/>
+            <a:srgbClr val="1A1A2E"/>
           </a:solidFill>
           <a:ln/>
         </p:spPr>
@@ -12939,7 +13298,7 @@
             <a:r>
               <a:rPr lang="en-US" sz="2150">
                 <a:solidFill>
-                  <a:srgbClr val="49495A"/>
+                  <a:srgbClr val="C4B8F5"/>
                 </a:solidFill>
                 <a:latin typeface="Libre Baskerville"/>
                 <a:ea typeface="Libre Baskerville"/>
@@ -12982,7 +13341,7 @@
             <a:r>
               <a:rPr lang="en-US" sz="1700">
                 <a:solidFill>
-                  <a:srgbClr val="49495A"/>
+                  <a:srgbClr val="C4B8F5"/>
                 </a:solidFill>
                 <a:latin typeface="Open Sans"/>
                 <a:ea typeface="Open Sans"/>
@@ -12993,7 +13352,7 @@
             <a:r>
               <a:rPr lang="en-US" sz="1700" b="1">
                 <a:solidFill>
-                  <a:srgbClr val="49495A"/>
+                  <a:srgbClr val="C4B8F5"/>
                 </a:solidFill>
                 <a:latin typeface="Open Sans"/>
                 <a:ea typeface="Open Sans"/>
@@ -13004,7 +13363,7 @@
             <a:r>
               <a:rPr lang="en-US" sz="1700">
                 <a:solidFill>
-                  <a:srgbClr val="49495A"/>
+                  <a:srgbClr val="C4B8F5"/>
                 </a:solidFill>
                 <a:latin typeface="Open Sans"/>
                 <a:ea typeface="Open Sans"/>
@@ -13033,7 +13392,7 @@
             </a:avLst>
           </a:prstGeom>
           <a:solidFill>
-            <a:srgbClr val="B6D6FC"/>
+            <a:srgbClr val="2E3E5C"/>
           </a:solidFill>
           <a:ln/>
         </p:spPr>
@@ -13091,7 +13450,7 @@
             <a:r>
               <a:rPr lang="en-US" sz="1550" b="1">
                 <a:solidFill>
-                  <a:srgbClr val="000000"/>
+                  <a:srgbClr val="F2EEFF"/>
                 </a:solidFill>
                 <a:latin typeface="Open Sans"/>
                 <a:ea typeface="Open Sans"/>
@@ -13102,7 +13461,7 @@
             <a:r>
               <a:rPr lang="en-US" sz="1550">
                 <a:solidFill>
-                  <a:srgbClr val="000000"/>
+                  <a:srgbClr val="F2EEFF"/>
                 </a:solidFill>
                 <a:latin typeface="Open Sans"/>
                 <a:ea typeface="Open Sans"/>
@@ -13113,7 +13472,7 @@
             <a:r>
               <a:rPr lang="en-US" sz="1550" b="1">
                 <a:solidFill>
-                  <a:srgbClr val="000000"/>
+                  <a:srgbClr val="F2EEFF"/>
                 </a:solidFill>
                 <a:latin typeface="Open Sans"/>
                 <a:ea typeface="Open Sans"/>
@@ -13124,7 +13483,7 @@
             <a:r>
               <a:rPr lang="en-US" sz="1550">
                 <a:solidFill>
-                  <a:srgbClr val="000000"/>
+                  <a:srgbClr val="F2EEFF"/>
                 </a:solidFill>
                 <a:latin typeface="Open Sans"/>
                 <a:ea typeface="Open Sans"/>
@@ -13151,7 +13510,7 @@
             <a:avLst/>
           </a:prstGeom>
           <a:solidFill>
-            <a:schemeClr val="bg1"/>
+            <a:srgbClr val="14142E"/>
           </a:solidFill>
           <a:ln w="12700" cap="flat" cmpd="sng" algn="ctr">
             <a:noFill/>
@@ -13256,7 +13615,7 @@
             <a:r>
               <a:rPr lang="en-US" sz="4200" b="1">
                 <a:solidFill>
-                  <a:srgbClr val="403CCF"/>
+                  <a:srgbClr val="9A93F5"/>
                 </a:solidFill>
                 <a:latin typeface="Libre Baskerville"/>
                 <a:ea typeface="Libre Baskerville"/>
@@ -13285,7 +13644,7 @@
             </a:avLst>
           </a:prstGeom>
           <a:solidFill>
-            <a:srgbClr val="E7E0FF"/>
+            <a:srgbClr val="23213C"/>
           </a:solidFill>
           <a:ln/>
         </p:spPr>
@@ -13321,7 +13680,7 @@
             <a:r>
               <a:rPr lang="en-US" sz="2400" b="1">
                 <a:solidFill>
-                  <a:srgbClr val="000000"/>
+                  <a:srgbClr val="F2EEFF"/>
                 </a:solidFill>
                 <a:latin typeface="Libre Baskerville"/>
                 <a:ea typeface="Libre Baskerville"/>
@@ -13364,7 +13723,7 @@
             <a:r>
               <a:rPr lang="en-US" sz="1800" b="1">
                 <a:solidFill>
-                  <a:srgbClr val="49495A"/>
+                  <a:srgbClr val="C4B8F5"/>
                 </a:solidFill>
                 <a:latin typeface="Open Sans"/>
                 <a:ea typeface="Open Sans"/>
@@ -13375,7 +13734,7 @@
             <a:r>
               <a:rPr lang="en-US" sz="1800">
                 <a:solidFill>
-                  <a:srgbClr val="49495A"/>
+                  <a:srgbClr val="C4B8F5"/>
                 </a:solidFill>
                 <a:latin typeface="Open Sans"/>
                 <a:ea typeface="Open Sans"/>
@@ -13418,7 +13777,7 @@
             <a:r>
               <a:rPr lang="en-US" sz="2400" b="1">
                 <a:solidFill>
-                  <a:srgbClr val="000000"/>
+                  <a:srgbClr val="F2EEFF"/>
                 </a:solidFill>
                 <a:latin typeface="Libre Baskerville"/>
                 <a:ea typeface="Libre Baskerville"/>
@@ -13462,7 +13821,7 @@
             <a:r>
               <a:rPr lang="en-US" sz="2000" i="1">
                 <a:solidFill>
-                  <a:srgbClr val="49495A"/>
+                  <a:srgbClr val="C4B8F5"/>
                 </a:solidFill>
                 <a:latin typeface="Open Sans"/>
                 <a:ea typeface="Open Sans"/>
@@ -13484,7 +13843,7 @@
             <a:r>
               <a:rPr lang="en-US" sz="2000" i="1">
                 <a:solidFill>
-                  <a:srgbClr val="49495A"/>
+                  <a:srgbClr val="C4B8F5"/>
                 </a:solidFill>
                 <a:latin typeface="Open Sans"/>
                 <a:ea typeface="Open Sans"/>
@@ -13506,7 +13865,7 @@
             <a:r>
               <a:rPr lang="en-US" sz="2000" i="1">
                 <a:solidFill>
-                  <a:srgbClr val="49495A"/>
+                  <a:srgbClr val="C4B8F5"/>
                 </a:solidFill>
                 <a:latin typeface="Open Sans"/>
                 <a:ea typeface="Open Sans"/>
@@ -13528,7 +13887,7 @@
             <a:r>
               <a:rPr lang="en-US" sz="2000" i="1">
                 <a:solidFill>
-                  <a:srgbClr val="49495A"/>
+                  <a:srgbClr val="C4B8F5"/>
                 </a:solidFill>
                 <a:latin typeface="Open Sans"/>
                 <a:ea typeface="Open Sans"/>
@@ -13539,7 +13898,7 @@
             <a:r>
               <a:rPr lang="en-US" sz="2000" i="1">
                 <a:solidFill>
-                  <a:srgbClr val="49495A"/>
+                  <a:srgbClr val="C4B8F5"/>
                 </a:solidFill>
                 <a:latin typeface="Open Sans"/>
                 <a:ea typeface="Open Sans"/>
@@ -13550,7 +13909,7 @@
             <a:r>
               <a:rPr lang="en-US" sz="2000" i="1">
                 <a:solidFill>
-                  <a:srgbClr val="49495A"/>
+                  <a:srgbClr val="C4B8F5"/>
                 </a:solidFill>
                 <a:latin typeface="Open Sans"/>
                 <a:ea typeface="Open Sans"/>
@@ -13593,7 +13952,7 @@
             <a:r>
               <a:rPr lang="en-US" sz="2800" b="1" i="1">
                 <a:solidFill>
-                  <a:srgbClr val="403CCF"/>
+                  <a:srgbClr val="9A93F5"/>
                 </a:solidFill>
                 <a:latin typeface="Libre Baskerville"/>
                 <a:ea typeface="Libre Baskerville"/>
@@ -13604,7 +13963,7 @@
             <a:r>
               <a:rPr lang="en-US" sz="2800" b="1" i="1">
                 <a:solidFill>
-                  <a:srgbClr val="5955EB"/>
+                  <a:srgbClr val="ADA8F9"/>
                 </a:solidFill>
                 <a:latin typeface="Libre Baskerville"/>
                 <a:ea typeface="Libre Baskerville"/>
@@ -13647,7 +14006,7 @@
             <a:r>
               <a:rPr lang="en-US" sz="1800">
                 <a:solidFill>
-                  <a:srgbClr val="49495A"/>
+                  <a:srgbClr val="C4B8F5"/>
                 </a:solidFill>
                 <a:latin typeface="Open Sans"/>
                 <a:ea typeface="Open Sans"/>
@@ -13718,7 +14077,7 @@
             <a:r>
               <a:rPr lang="en-US" sz="2000" b="1">
                 <a:solidFill>
-                  <a:srgbClr val="49495A"/>
+                  <a:srgbClr val="C4B8F5"/>
                 </a:solidFill>
                 <a:latin typeface="Libre Baskerville"/>
                 <a:ea typeface="Libre Baskerville"/>
@@ -13761,7 +14120,7 @@
             <a:r>
               <a:rPr lang="en-US" sz="1600">
                 <a:solidFill>
-                  <a:srgbClr val="49495A"/>
+                  <a:srgbClr val="C4B8F5"/>
                 </a:solidFill>
                 <a:latin typeface="Open Sans"/>
                 <a:ea typeface="Open Sans"/>
@@ -13832,7 +14191,7 @@
             <a:r>
               <a:rPr lang="en-US" sz="2000" b="1">
                 <a:solidFill>
-                  <a:srgbClr val="49495A"/>
+                  <a:srgbClr val="C4B8F5"/>
                 </a:solidFill>
                 <a:latin typeface="Libre Baskerville"/>
                 <a:ea typeface="Libre Baskerville"/>
@@ -13875,7 +14234,7 @@
             <a:r>
               <a:rPr lang="en-US" sz="1600">
                 <a:solidFill>
-                  <a:srgbClr val="49495A"/>
+                  <a:srgbClr val="C4B8F5"/>
                 </a:solidFill>
                 <a:latin typeface="Open Sans"/>
                 <a:ea typeface="Open Sans"/>
@@ -13946,7 +14305,7 @@
             <a:r>
               <a:rPr lang="en-US" sz="2000" b="1">
                 <a:solidFill>
-                  <a:srgbClr val="49495A"/>
+                  <a:srgbClr val="C4B8F5"/>
                 </a:solidFill>
                 <a:latin typeface="Libre Baskerville"/>
                 <a:ea typeface="Libre Baskerville"/>
@@ -13989,7 +14348,7 @@
             <a:r>
               <a:rPr lang="en-US" sz="1600">
                 <a:solidFill>
-                  <a:srgbClr val="49495A"/>
+                  <a:srgbClr val="C4B8F5"/>
                 </a:solidFill>
                 <a:latin typeface="Open Sans"/>
                 <a:ea typeface="Open Sans"/>
@@ -14060,7 +14419,7 @@
             <a:r>
               <a:rPr lang="en-US" sz="2000" b="1">
                 <a:solidFill>
-                  <a:srgbClr val="49495A"/>
+                  <a:srgbClr val="C4B8F5"/>
                 </a:solidFill>
                 <a:latin typeface="Libre Baskerville"/>
                 <a:ea typeface="Libre Baskerville"/>
@@ -14103,7 +14462,7 @@
             <a:r>
               <a:rPr lang="en-US" sz="1600">
                 <a:solidFill>
-                  <a:srgbClr val="49495A"/>
+                  <a:srgbClr val="C4B8F5"/>
                 </a:solidFill>
                 <a:latin typeface="Open Sans"/>
                 <a:ea typeface="Open Sans"/>
@@ -14174,7 +14533,7 @@
             <a:r>
               <a:rPr lang="en-US" sz="2000" b="1">
                 <a:solidFill>
-                  <a:srgbClr val="49495A"/>
+                  <a:srgbClr val="C4B8F5"/>
                 </a:solidFill>
                 <a:latin typeface="Libre Baskerville"/>
                 <a:ea typeface="Libre Baskerville"/>
@@ -14217,7 +14576,7 @@
             <a:r>
               <a:rPr lang="en-US" sz="1600">
                 <a:solidFill>
-                  <a:srgbClr val="49495A"/>
+                  <a:srgbClr val="C4B8F5"/>
                 </a:solidFill>
                 <a:latin typeface="Open Sans"/>
                 <a:ea typeface="Open Sans"/>
@@ -14260,7 +14619,7 @@
             <a:r>
               <a:rPr lang="en-US" sz="1600">
                 <a:solidFill>
-                  <a:srgbClr val="49495A"/>
+                  <a:srgbClr val="C4B8F5"/>
                 </a:solidFill>
                 <a:latin typeface="Open Sans"/>
                 <a:ea typeface="Open Sans"/>
@@ -14287,7 +14646,7 @@
             <a:avLst/>
           </a:prstGeom>
           <a:solidFill>
-            <a:srgbClr val="403CCF"/>
+            <a:srgbClr val="5A52DC"/>
           </a:solidFill>
           <a:ln/>
         </p:spPr>
@@ -14307,7 +14666,7 @@
             <a:avLst/>
           </a:prstGeom>
           <a:solidFill>
-            <a:schemeClr val="bg1"/>
+            <a:srgbClr val="14142E"/>
           </a:solidFill>
           <a:ln w="12700" cap="flat" cmpd="sng" algn="ctr">
             <a:noFill/>
